--- a/docs/tutorials/code-review/examples/ZDMS_UPLOAD_FILES/report.pptx
+++ b/docs/tutorials/code-review/examples/ZDMS_UPLOAD_FILES/report.pptx
@@ -3098,14 +3098,57 @@
       <p:grpSpPr/>
       <p:sp>
         <p:nvSpPr>
-          <p:cNvPr id="2" name="TextBox 1"/>
+          <p:cNvPr id="2" name="Rectangle 1"/>
+          <p:cNvSpPr/>
+          <p:nvPr/>
+        </p:nvSpPr>
+        <p:spPr>
+          <a:xfrm>
+            <a:off x="0" y="0"/>
+            <a:ext cx="12188952" cy="6858000"/>
+          </a:xfrm>
+          <a:prstGeom prst="rect">
+            <a:avLst/>
+          </a:prstGeom>
+          <a:solidFill>
+            <a:srgbClr val="161616"/>
+          </a:solidFill>
+          <a:ln>
+            <a:noFill/>
+          </a:ln>
+        </p:spPr>
+        <p:style>
+          <a:lnRef idx="1">
+            <a:schemeClr val="accent1"/>
+          </a:lnRef>
+          <a:fillRef idx="3">
+            <a:schemeClr val="accent1"/>
+          </a:fillRef>
+          <a:effectRef idx="2">
+            <a:schemeClr val="accent1"/>
+          </a:effectRef>
+          <a:fontRef idx="minor">
+            <a:schemeClr val="lt1"/>
+          </a:fontRef>
+        </p:style>
+        <p:txBody>
+          <a:bodyPr rtlCol="0" anchor="ctr"/>
+          <a:lstStyle/>
+          <a:p>
+            <a:pPr algn="ctr"/>
+          </a:p>
+        </p:txBody>
+      </p:sp>
+      <p:sp>
+        <p:nvSpPr>
+          <p:cNvPr id="3" name="TextBox 2"/>
           <p:cNvSpPr txBox="1"/>
           <p:nvPr/>
         </p:nvSpPr>
         <p:spPr>
           <a:xfrm>
-            <a:off x="548640" y="2103120"/>
-            <a:ext cx="10972800" cy="1371600"/>
+            <a:off x="548640" y="457200"/>
+            <a:ext cx="5486400" cy="365760"/>
           </a:xfrm>
           <a:prstGeom prst="rect">
             <a:avLst/>
@@ -3119,28 +3162,72 @@
           <a:lstStyle/>
           <a:p>
             <a:pPr>
-              <a:defRPr sz="4600" b="1">
-                <a:solidFill>
-                  <a:srgbClr val="1F3A68"/>
-                </a:solidFill>
-              </a:defRPr>
-            </a:pPr>
-            <a:r>
-              <a:t>Code Review — ZDMS_UPLOAD_FILES</a:t>
-            </a:r>
-          </a:p>
-        </p:txBody>
-      </p:sp>
-      <p:sp>
-        <p:nvSpPr>
-          <p:cNvPr id="3" name="TextBox 2"/>
+              <a:defRPr sz="1100" b="1">
+                <a:solidFill>
+                  <a:srgbClr val="00B4C8"/>
+                </a:solidFill>
+                <a:latin typeface="Calibri"/>
+              </a:defRPr>
+            </a:pPr>
+            <a:r>
+              <a:t>CLOUD LLM HUB · ACCELERATOR DEMO</a:t>
+            </a:r>
+          </a:p>
+        </p:txBody>
+      </p:sp>
+      <p:sp>
+        <p:nvSpPr>
+          <p:cNvPr id="4" name="Rectangle 3"/>
+          <p:cNvSpPr/>
+          <p:nvPr/>
+        </p:nvSpPr>
+        <p:spPr>
+          <a:xfrm>
+            <a:off x="548640" y="1828800"/>
+            <a:ext cx="548640" cy="54864"/>
+          </a:xfrm>
+          <a:prstGeom prst="rect">
+            <a:avLst/>
+          </a:prstGeom>
+          <a:solidFill>
+            <a:srgbClr val="00B4C8"/>
+          </a:solidFill>
+          <a:ln>
+            <a:noFill/>
+          </a:ln>
+        </p:spPr>
+        <p:style>
+          <a:lnRef idx="1">
+            <a:schemeClr val="accent1"/>
+          </a:lnRef>
+          <a:fillRef idx="3">
+            <a:schemeClr val="accent1"/>
+          </a:fillRef>
+          <a:effectRef idx="2">
+            <a:schemeClr val="accent1"/>
+          </a:effectRef>
+          <a:fontRef idx="minor">
+            <a:schemeClr val="lt1"/>
+          </a:fontRef>
+        </p:style>
+        <p:txBody>
+          <a:bodyPr rtlCol="0" anchor="ctr"/>
+          <a:lstStyle/>
+          <a:p>
+            <a:pPr algn="ctr"/>
+          </a:p>
+        </p:txBody>
+      </p:sp>
+      <p:sp>
+        <p:nvSpPr>
+          <p:cNvPr id="5" name="TextBox 4"/>
           <p:cNvSpPr txBox="1"/>
           <p:nvPr/>
         </p:nvSpPr>
         <p:spPr>
           <a:xfrm>
-            <a:off x="548640" y="3291840"/>
-            <a:ext cx="10972800" cy="640080"/>
+            <a:off x="548640" y="2194560"/>
+            <a:ext cx="11064240" cy="2286000"/>
           </a:xfrm>
           <a:prstGeom prst="rect">
             <a:avLst/>
@@ -3154,28 +3241,29 @@
           <a:lstStyle/>
           <a:p>
             <a:pPr>
-              <a:defRPr sz="2200">
-                <a:solidFill>
-                  <a:srgbClr val="333333"/>
-                </a:solidFill>
-              </a:defRPr>
-            </a:pPr>
-            <a:r>
-              <a:t>Package Z001 · destination DS4_CLH · 2026-05-19</a:t>
-            </a:r>
-          </a:p>
-        </p:txBody>
-      </p:sp>
-      <p:sp>
-        <p:nvSpPr>
-          <p:cNvPr id="4" name="TextBox 3"/>
+              <a:defRPr sz="5000">
+                <a:solidFill>
+                  <a:srgbClr val="FFFFFF"/>
+                </a:solidFill>
+                <a:latin typeface="Calibri Light"/>
+              </a:defRPr>
+            </a:pPr>
+            <a:r>
+              <a:t>Code Review — ZDMS_UPLOAD_FILES</a:t>
+            </a:r>
+          </a:p>
+        </p:txBody>
+      </p:sp>
+      <p:sp>
+        <p:nvSpPr>
+          <p:cNvPr id="6" name="TextBox 5"/>
           <p:cNvSpPr txBox="1"/>
           <p:nvPr/>
         </p:nvSpPr>
         <p:spPr>
           <a:xfrm>
-            <a:off x="548640" y="4846320"/>
-            <a:ext cx="10972800" cy="640080"/>
+            <a:off x="548640" y="4389120"/>
+            <a:ext cx="11064240" cy="731520"/>
           </a:xfrm>
           <a:prstGeom prst="rect">
             <a:avLst/>
@@ -3189,14 +3277,55 @@
           <a:lstStyle/>
           <a:p>
             <a:pPr>
-              <a:defRPr sz="2000" i="1">
-                <a:solidFill>
-                  <a:srgbClr val="C83636"/>
-                </a:solidFill>
-              </a:defRPr>
-            </a:pPr>
-            <a:r>
-              <a:t>Four-category parallel review · 30 findings · every finding cites verbatim ABAP</a:t>
+              <a:defRPr sz="2000">
+                <a:solidFill>
+                  <a:srgbClr val="CCCCCC"/>
+                </a:solidFill>
+                <a:latin typeface="Calibri"/>
+              </a:defRPr>
+            </a:pPr>
+            <a:r>
+              <a:t>Package Z001 · destination DS4_CLH · 4 parallel category checks</a:t>
+            </a:r>
+          </a:p>
+        </p:txBody>
+      </p:sp>
+      <p:sp>
+        <p:nvSpPr>
+          <p:cNvPr id="7" name="TextBox 6"/>
+          <p:cNvSpPr txBox="1"/>
+          <p:nvPr/>
+        </p:nvSpPr>
+        <p:spPr>
+          <a:xfrm>
+            <a:off x="548640" y="5943600"/>
+            <a:ext cx="5486400" cy="365760"/>
+          </a:xfrm>
+          <a:prstGeom prst="rect">
+            <a:avLst/>
+          </a:prstGeom>
+          <a:noFill/>
+        </p:spPr>
+        <p:txBody>
+          <a:bodyPr wrap="none">
+            <a:spAutoFit/>
+          </a:bodyPr>
+          <a:lstStyle/>
+          <a:p>
+            <a:pPr>
+              <a:defRPr sz="1100" b="1">
+                <a:solidFill>
+                  <a:srgbClr val="00B4C8"/>
+                </a:solidFill>
+                <a:latin typeface="Calibri"/>
+              </a:defRPr>
+            </a:pPr>
+            <a:r>
+              <a:t>EPAM</a:t>
+            </a:r>
+            <a:br/>
+            <a:r>
+              <a:t>2026-05-19</a:t>
             </a:r>
           </a:p>
         </p:txBody>
@@ -3227,8 +3356,8 @@
         </p:nvSpPr>
         <p:spPr>
           <a:xfrm>
-            <a:off x="457200" y="228600"/>
-            <a:ext cx="11247120" cy="731520"/>
+            <a:off x="457200" y="274320"/>
+            <a:ext cx="11247120" cy="274320"/>
           </a:xfrm>
           <a:prstGeom prst="rect">
             <a:avLst/>
@@ -3242,10 +3371,47 @@
           <a:lstStyle/>
           <a:p>
             <a:pPr>
-              <a:defRPr sz="3400" b="1">
-                <a:solidFill>
-                  <a:srgbClr val="1F3A68"/>
-                </a:solidFill>
+              <a:defRPr sz="1000" b="1">
+                <a:solidFill>
+                  <a:srgbClr val="00B4C8"/>
+                </a:solidFill>
+                <a:latin typeface="Calibri"/>
+              </a:defRPr>
+            </a:pPr>
+            <a:r>
+              <a:t>SECTION 01 · FINDINGS</a:t>
+            </a:r>
+          </a:p>
+        </p:txBody>
+      </p:sp>
+      <p:sp>
+        <p:nvSpPr>
+          <p:cNvPr id="3" name="TextBox 2"/>
+          <p:cNvSpPr txBox="1"/>
+          <p:nvPr/>
+        </p:nvSpPr>
+        <p:spPr>
+          <a:xfrm>
+            <a:off x="457200" y="502920"/>
+            <a:ext cx="11247120" cy="640080"/>
+          </a:xfrm>
+          <a:prstGeom prst="rect">
+            <a:avLst/>
+          </a:prstGeom>
+          <a:noFill/>
+        </p:spPr>
+        <p:txBody>
+          <a:bodyPr wrap="none">
+            <a:spAutoFit/>
+          </a:bodyPr>
+          <a:lstStyle/>
+          <a:p>
+            <a:pPr>
+              <a:defRPr sz="2800">
+                <a:solidFill>
+                  <a:srgbClr val="161616"/>
+                </a:solidFill>
+                <a:latin typeface="Calibri Light"/>
               </a:defRPr>
             </a:pPr>
             <a:r>
@@ -3256,20 +3422,20 @@
       </p:sp>
       <p:sp>
         <p:nvSpPr>
-          <p:cNvPr id="3" name="Rounded Rectangle 2"/>
+          <p:cNvPr id="4" name="Rectangle 3"/>
           <p:cNvSpPr/>
           <p:nvPr/>
         </p:nvSpPr>
         <p:spPr>
           <a:xfrm>
-            <a:off x="548640" y="1371600"/>
+            <a:off x="548640" y="1554480"/>
             <a:ext cx="3657600" cy="2194560"/>
           </a:xfrm>
-          <a:prstGeom prst="roundRect">
+          <a:prstGeom prst="rect">
             <a:avLst/>
           </a:prstGeom>
           <a:solidFill>
-            <a:srgbClr val="1F3A68"/>
+            <a:srgbClr val="161616"/>
           </a:solidFill>
           <a:ln>
             <a:noFill/>
@@ -3294,10 +3460,11 @@
           <a:lstStyle/>
           <a:p>
             <a:pPr algn="ctr">
-              <a:defRPr sz="5600" b="1">
+              <a:defRPr sz="6000">
                 <a:solidFill>
                   <a:srgbClr val="FFFFFF"/>
                 </a:solidFill>
+                <a:latin typeface="Calibri Light"/>
               </a:defRPr>
             </a:pPr>
             <a:r>
@@ -3306,10 +3473,11 @@
           </a:p>
           <a:p>
             <a:pPr algn="ctr">
-              <a:defRPr sz="1400">
+              <a:defRPr sz="1300">
                 <a:solidFill>
                   <a:srgbClr val="FFFFFF"/>
                 </a:solidFill>
+                <a:latin typeface="Calibri"/>
               </a:defRPr>
             </a:pPr>
             <a:r>
@@ -3320,16 +3488,16 @@
       </p:sp>
       <p:sp>
         <p:nvSpPr>
-          <p:cNvPr id="4" name="Rounded Rectangle 3"/>
+          <p:cNvPr id="5" name="Rectangle 4"/>
           <p:cNvSpPr/>
           <p:nvPr/>
         </p:nvSpPr>
         <p:spPr>
           <a:xfrm>
-            <a:off x="4343400" y="1371600"/>
+            <a:off x="4343400" y="1554480"/>
             <a:ext cx="3657600" cy="2194560"/>
           </a:xfrm>
-          <a:prstGeom prst="roundRect">
+          <a:prstGeom prst="rect">
             <a:avLst/>
           </a:prstGeom>
           <a:solidFill>
@@ -3358,10 +3526,11 @@
           <a:lstStyle/>
           <a:p>
             <a:pPr algn="ctr">
-              <a:defRPr sz="5600" b="1">
+              <a:defRPr sz="6000">
                 <a:solidFill>
                   <a:srgbClr val="FFFFFF"/>
                 </a:solidFill>
+                <a:latin typeface="Calibri Light"/>
               </a:defRPr>
             </a:pPr>
             <a:r>
@@ -3370,10 +3539,11 @@
           </a:p>
           <a:p>
             <a:pPr algn="ctr">
-              <a:defRPr sz="1400">
+              <a:defRPr sz="1300">
                 <a:solidFill>
                   <a:srgbClr val="FFFFFF"/>
                 </a:solidFill>
+                <a:latin typeface="Calibri"/>
               </a:defRPr>
             </a:pPr>
             <a:r>
@@ -3384,16 +3554,16 @@
       </p:sp>
       <p:sp>
         <p:nvSpPr>
-          <p:cNvPr id="5" name="Rounded Rectangle 4"/>
+          <p:cNvPr id="6" name="Rectangle 5"/>
           <p:cNvSpPr/>
           <p:nvPr/>
         </p:nvSpPr>
         <p:spPr>
           <a:xfrm>
-            <a:off x="8138160" y="1371600"/>
+            <a:off x="8138160" y="1554480"/>
             <a:ext cx="3657600" cy="2194560"/>
           </a:xfrm>
-          <a:prstGeom prst="roundRect">
+          <a:prstGeom prst="rect">
             <a:avLst/>
           </a:prstGeom>
           <a:solidFill>
@@ -3422,10 +3592,11 @@
           <a:lstStyle/>
           <a:p>
             <a:pPr algn="ctr">
-              <a:defRPr sz="5600" b="1">
+              <a:defRPr sz="6000">
                 <a:solidFill>
                   <a:srgbClr val="FFFFFF"/>
                 </a:solidFill>
+                <a:latin typeface="Calibri Light"/>
               </a:defRPr>
             </a:pPr>
             <a:r>
@@ -3434,10 +3605,11 @@
           </a:p>
           <a:p>
             <a:pPr algn="ctr">
-              <a:defRPr sz="1400">
+              <a:defRPr sz="1300">
                 <a:solidFill>
                   <a:srgbClr val="FFFFFF"/>
                 </a:solidFill>
+                <a:latin typeface="Calibri"/>
               </a:defRPr>
             </a:pPr>
             <a:r>
@@ -3448,14 +3620,14 @@
       </p:sp>
       <p:sp>
         <p:nvSpPr>
-          <p:cNvPr id="6" name="TextBox 5"/>
+          <p:cNvPr id="7" name="TextBox 6"/>
           <p:cNvSpPr txBox="1"/>
           <p:nvPr/>
         </p:nvSpPr>
         <p:spPr>
           <a:xfrm>
-            <a:off x="548640" y="3931920"/>
-            <a:ext cx="10972800" cy="2560320"/>
+            <a:off x="548640" y="4023360"/>
+            <a:ext cx="10972800" cy="2286000"/>
           </a:xfrm>
           <a:prstGeom prst="rect">
             <a:avLst/>
@@ -3469,46 +3641,50 @@
           <a:lstStyle/>
           <a:p>
             <a:pPr>
-              <a:defRPr sz="1500" b="0">
+              <a:defRPr sz="1300" b="0">
                 <a:solidFill>
                   <a:srgbClr val="333333"/>
                 </a:solidFill>
-              </a:defRPr>
-            </a:pPr>
-            <a:r>
-              <a:t>• 0 CRITICAL issues — no immediate blockers on existing functionality.</a:t>
-            </a:r>
-          </a:p>
-          <a:p>
-            <a:pPr>
-              <a:defRPr sz="1500" b="0">
+                <a:latin typeface="Calibri"/>
+              </a:defRPr>
+            </a:pPr>
+            <a:r>
+              <a:t>• 0 CRITICAL — no immediate blockers on existing functionality.</a:t>
+            </a:r>
+          </a:p>
+          <a:p>
+            <a:pPr>
+              <a:defRPr sz="1300" b="0">
                 <a:solidFill>
                   <a:srgbClr val="333333"/>
                 </a:solidFill>
-              </a:defRPr>
-            </a:pPr>
-            <a:r>
-              <a:t>• 10 HIGH severity — 6 in CleanCore, 2 in security, 2 in performance.</a:t>
-            </a:r>
-          </a:p>
-          <a:p>
-            <a:pPr>
-              <a:defRPr sz="1500" b="0">
+                <a:latin typeface="Calibri"/>
+              </a:defRPr>
+            </a:pPr>
+            <a:r>
+              <a:t>• 10 HIGH — 6 in CleanCore, 2 in security, 2 in performance.</a:t>
+            </a:r>
+          </a:p>
+          <a:p>
+            <a:pPr>
+              <a:defRPr sz="1300" b="0">
                 <a:solidFill>
                   <a:srgbClr val="333333"/>
                 </a:solidFill>
-              </a:defRPr>
-            </a:pPr>
-            <a:r>
-              <a:t>• If S/4HANA Cloud / CleanCore migration is on the roadmap, this object cannot run as-is.</a:t>
-            </a:r>
-          </a:p>
-          <a:p>
-            <a:pPr>
-              <a:defRPr sz="1500" b="0">
+                <a:latin typeface="Calibri"/>
+              </a:defRPr>
+            </a:pPr>
+            <a:r>
+              <a:t>• If S/4HANA Cloud migration is on the roadmap, this object cannot run as-is.</a:t>
+            </a:r>
+          </a:p>
+          <a:p>
+            <a:pPr>
+              <a:defRPr sz="1300" b="0">
                 <a:solidFill>
                   <a:srgbClr val="333333"/>
                 </a:solidFill>
+                <a:latin typeface="Calibri"/>
               </a:defRPr>
             </a:pPr>
             <a:r>
@@ -3517,14 +3693,51 @@
           </a:p>
           <a:p>
             <a:pPr>
-              <a:defRPr sz="1500" b="0">
+              <a:defRPr sz="1300" b="0">
                 <a:solidFill>
                   <a:srgbClr val="333333"/>
                 </a:solidFill>
+                <a:latin typeface="Calibri"/>
               </a:defRPr>
             </a:pPr>
             <a:r>
               <a:t>• Every finding below is anchored to a verbatim ABAP snippet from the source.</a:t>
+            </a:r>
+          </a:p>
+        </p:txBody>
+      </p:sp>
+      <p:sp>
+        <p:nvSpPr>
+          <p:cNvPr id="8" name="TextBox 7"/>
+          <p:cNvSpPr txBox="1"/>
+          <p:nvPr/>
+        </p:nvSpPr>
+        <p:spPr>
+          <a:xfrm>
+            <a:off x="457200" y="6537960"/>
+            <a:ext cx="11247120" cy="228600"/>
+          </a:xfrm>
+          <a:prstGeom prst="rect">
+            <a:avLst/>
+          </a:prstGeom>
+          <a:noFill/>
+        </p:spPr>
+        <p:txBody>
+          <a:bodyPr wrap="none">
+            <a:spAutoFit/>
+          </a:bodyPr>
+          <a:lstStyle/>
+          <a:p>
+            <a:pPr>
+              <a:defRPr sz="800" i="1">
+                <a:solidFill>
+                  <a:srgbClr val="555555"/>
+                </a:solidFill>
+                <a:latin typeface="Calibri"/>
+              </a:defRPr>
+            </a:pPr>
+            <a:r>
+              <a:t>EPAM Proprietary &amp; Confidential</a:t>
             </a:r>
           </a:p>
         </p:txBody>
@@ -3555,8 +3768,8 @@
         </p:nvSpPr>
         <p:spPr>
           <a:xfrm>
-            <a:off x="457200" y="228600"/>
-            <a:ext cx="11247120" cy="731520"/>
+            <a:off x="457200" y="274320"/>
+            <a:ext cx="11247120" cy="274320"/>
           </a:xfrm>
           <a:prstGeom prst="rect">
             <a:avLst/>
@@ -3570,10 +3783,47 @@
           <a:lstStyle/>
           <a:p>
             <a:pPr>
-              <a:defRPr sz="2600" b="1">
-                <a:solidFill>
-                  <a:srgbClr val="1F3A68"/>
-                </a:solidFill>
+              <a:defRPr sz="1000" b="1">
+                <a:solidFill>
+                  <a:srgbClr val="00B4C8"/>
+                </a:solidFill>
+                <a:latin typeface="Calibri"/>
+              </a:defRPr>
+            </a:pPr>
+            <a:r>
+              <a:t>SECTION 01 · FINDINGS</a:t>
+            </a:r>
+          </a:p>
+        </p:txBody>
+      </p:sp>
+      <p:sp>
+        <p:nvSpPr>
+          <p:cNvPr id="3" name="TextBox 2"/>
+          <p:cNvSpPr txBox="1"/>
+          <p:nvPr/>
+        </p:nvSpPr>
+        <p:spPr>
+          <a:xfrm>
+            <a:off x="457200" y="502920"/>
+            <a:ext cx="11247120" cy="640080"/>
+          </a:xfrm>
+          <a:prstGeom prst="rect">
+            <a:avLst/>
+          </a:prstGeom>
+          <a:noFill/>
+        </p:spPr>
+        <p:txBody>
+          <a:bodyPr wrap="none">
+            <a:spAutoFit/>
+          </a:bodyPr>
+          <a:lstStyle/>
+          <a:p>
+            <a:pPr>
+              <a:defRPr sz="2800">
+                <a:solidFill>
+                  <a:srgbClr val="161616"/>
+                </a:solidFill>
+                <a:latin typeface="Calibri Light"/>
               </a:defRPr>
             </a:pPr>
             <a:r>
@@ -3584,15 +3834,15 @@
       </p:sp>
       <p:graphicFrame>
         <p:nvGraphicFramePr>
-          <p:cNvPr id="3" name="Table 2"/>
+          <p:cNvPr id="4" name="Table 3"/>
           <p:cNvGraphicFramePr>
             <a:graphicFrameLocks noGrp="1"/>
           </p:cNvGraphicFramePr>
           <p:nvPr/>
         </p:nvGraphicFramePr>
         <p:xfrm>
-          <a:off x="457200" y="1188720"/>
-          <a:ext cx="11247120" cy="3200400"/>
+          <a:off x="457200" y="1371600"/>
+          <a:ext cx="11247120" cy="3108960"/>
         </p:xfrm>
         <a:graphic>
           <a:graphicData uri="http://schemas.openxmlformats.org/drawingml/2006/table">
@@ -3608,17 +3858,18 @@
                 <a:gridCol w="1371600"/>
                 <a:gridCol w="2103120"/>
               </a:tblGrid>
-              <a:tr h="533400">
+              <a:tr h="518160">
                 <a:tc>
                   <a:txBody>
                     <a:bodyPr/>
                     <a:lstStyle/>
                     <a:p>
                       <a:pPr>
-                        <a:defRPr sz="1400" b="1">
+                        <a:defRPr sz="1100" b="1">
                           <a:solidFill>
                             <a:srgbClr val="FFFFFF"/>
                           </a:solidFill>
+                          <a:latin typeface="Calibri"/>
                         </a:defRPr>
                       </a:pPr>
                       <a:r>
@@ -3628,7 +3879,7 @@
                   </a:txBody>
                   <a:tcPr>
                     <a:solidFill>
-                      <a:srgbClr val="1F3A68"/>
+                      <a:srgbClr val="161616"/>
                     </a:solidFill>
                   </a:tcPr>
                 </a:tc>
@@ -3638,10 +3889,11 @@
                     <a:lstStyle/>
                     <a:p>
                       <a:pPr>
-                        <a:defRPr sz="1400" b="1">
+                        <a:defRPr sz="1100" b="1">
                           <a:solidFill>
                             <a:srgbClr val="FFFFFF"/>
                           </a:solidFill>
+                          <a:latin typeface="Calibri"/>
                         </a:defRPr>
                       </a:pPr>
                       <a:r>
@@ -3651,7 +3903,7 @@
                   </a:txBody>
                   <a:tcPr>
                     <a:solidFill>
-                      <a:srgbClr val="1F3A68"/>
+                      <a:srgbClr val="161616"/>
                     </a:solidFill>
                   </a:tcPr>
                 </a:tc>
@@ -3661,10 +3913,11 @@
                     <a:lstStyle/>
                     <a:p>
                       <a:pPr>
-                        <a:defRPr sz="1400" b="1">
+                        <a:defRPr sz="1100" b="1">
                           <a:solidFill>
                             <a:srgbClr val="FFFFFF"/>
                           </a:solidFill>
+                          <a:latin typeface="Calibri"/>
                         </a:defRPr>
                       </a:pPr>
                       <a:r>
@@ -3674,7 +3927,7 @@
                   </a:txBody>
                   <a:tcPr>
                     <a:solidFill>
-                      <a:srgbClr val="1F3A68"/>
+                      <a:srgbClr val="161616"/>
                     </a:solidFill>
                   </a:tcPr>
                 </a:tc>
@@ -3684,10 +3937,11 @@
                     <a:lstStyle/>
                     <a:p>
                       <a:pPr>
-                        <a:defRPr sz="1400" b="1">
+                        <a:defRPr sz="1100" b="1">
                           <a:solidFill>
                             <a:srgbClr val="FFFFFF"/>
                           </a:solidFill>
+                          <a:latin typeface="Calibri"/>
                         </a:defRPr>
                       </a:pPr>
                       <a:r>
@@ -3697,7 +3951,7 @@
                   </a:txBody>
                   <a:tcPr>
                     <a:solidFill>
-                      <a:srgbClr val="1F3A68"/>
+                      <a:srgbClr val="161616"/>
                     </a:solidFill>
                   </a:tcPr>
                 </a:tc>
@@ -3707,10 +3961,11 @@
                     <a:lstStyle/>
                     <a:p>
                       <a:pPr>
-                        <a:defRPr sz="1400" b="1">
+                        <a:defRPr sz="1100" b="1">
                           <a:solidFill>
                             <a:srgbClr val="FFFFFF"/>
                           </a:solidFill>
+                          <a:latin typeface="Calibri"/>
                         </a:defRPr>
                       </a:pPr>
                       <a:r>
@@ -3720,7 +3975,7 @@
                   </a:txBody>
                   <a:tcPr>
                     <a:solidFill>
-                      <a:srgbClr val="1F3A68"/>
+                      <a:srgbClr val="161616"/>
                     </a:solidFill>
                   </a:tcPr>
                 </a:tc>
@@ -3730,10 +3985,11 @@
                     <a:lstStyle/>
                     <a:p>
                       <a:pPr>
-                        <a:defRPr sz="1400" b="1">
+                        <a:defRPr sz="1100" b="1">
                           <a:solidFill>
                             <a:srgbClr val="FFFFFF"/>
                           </a:solidFill>
+                          <a:latin typeface="Calibri"/>
                         </a:defRPr>
                       </a:pPr>
                       <a:r>
@@ -3743,22 +3999,23 @@
                   </a:txBody>
                   <a:tcPr>
                     <a:solidFill>
-                      <a:srgbClr val="1F3A68"/>
+                      <a:srgbClr val="161616"/>
                     </a:solidFill>
                   </a:tcPr>
                 </a:tc>
               </a:tr>
-              <a:tr h="533400">
+              <a:tr h="518160">
                 <a:tc>
                   <a:txBody>
                     <a:bodyPr/>
                     <a:lstStyle/>
                     <a:p>
                       <a:pPr>
-                        <a:defRPr sz="1400">
+                        <a:defRPr sz="1200">
                           <a:solidFill>
                             <a:srgbClr val="333333"/>
                           </a:solidFill>
+                          <a:latin typeface="Calibri"/>
                         </a:defRPr>
                       </a:pPr>
                       <a:r>
@@ -3778,10 +4035,11 @@
                     <a:lstStyle/>
                     <a:p>
                       <a:pPr>
-                        <a:defRPr sz="1400">
+                        <a:defRPr sz="1200">
                           <a:solidFill>
                             <a:srgbClr val="333333"/>
                           </a:solidFill>
+                          <a:latin typeface="Calibri"/>
                         </a:defRPr>
                       </a:pPr>
                       <a:r>
@@ -3801,10 +4059,11 @@
                     <a:lstStyle/>
                     <a:p>
                       <a:pPr>
-                        <a:defRPr sz="1400">
+                        <a:defRPr sz="1200">
                           <a:solidFill>
                             <a:srgbClr val="333333"/>
                           </a:solidFill>
+                          <a:latin typeface="Calibri"/>
                         </a:defRPr>
                       </a:pPr>
                       <a:r>
@@ -3824,10 +4083,11 @@
                     <a:lstStyle/>
                     <a:p>
                       <a:pPr>
-                        <a:defRPr sz="1400">
+                        <a:defRPr sz="1200">
                           <a:solidFill>
                             <a:srgbClr val="333333"/>
                           </a:solidFill>
+                          <a:latin typeface="Calibri"/>
                         </a:defRPr>
                       </a:pPr>
                       <a:r>
@@ -3847,10 +4107,11 @@
                     <a:lstStyle/>
                     <a:p>
                       <a:pPr>
-                        <a:defRPr sz="1400">
+                        <a:defRPr sz="1200">
                           <a:solidFill>
                             <a:srgbClr val="333333"/>
                           </a:solidFill>
+                          <a:latin typeface="Calibri"/>
                         </a:defRPr>
                       </a:pPr>
                       <a:r>
@@ -3870,10 +4131,11 @@
                     <a:lstStyle/>
                     <a:p>
                       <a:pPr>
-                        <a:defRPr sz="1400">
+                        <a:defRPr sz="1200">
                           <a:solidFill>
                             <a:srgbClr val="333333"/>
                           </a:solidFill>
+                          <a:latin typeface="Calibri"/>
                         </a:defRPr>
                       </a:pPr>
                       <a:r>
@@ -3888,17 +4150,18 @@
                   </a:tcPr>
                 </a:tc>
               </a:tr>
-              <a:tr h="533400">
+              <a:tr h="518160">
                 <a:tc>
                   <a:txBody>
                     <a:bodyPr/>
                     <a:lstStyle/>
                     <a:p>
                       <a:pPr>
-                        <a:defRPr sz="1400">
+                        <a:defRPr sz="1200">
                           <a:solidFill>
                             <a:srgbClr val="333333"/>
                           </a:solidFill>
+                          <a:latin typeface="Calibri"/>
                         </a:defRPr>
                       </a:pPr>
                       <a:r>
@@ -3908,7 +4171,7 @@
                   </a:txBody>
                   <a:tcPr>
                     <a:solidFill>
-                      <a:srgbClr val="F0F2F7"/>
+                      <a:srgbClr val="F5F5F5"/>
                     </a:solidFill>
                   </a:tcPr>
                 </a:tc>
@@ -3918,10 +4181,11 @@
                     <a:lstStyle/>
                     <a:p>
                       <a:pPr>
-                        <a:defRPr sz="1400">
+                        <a:defRPr sz="1200">
                           <a:solidFill>
                             <a:srgbClr val="333333"/>
                           </a:solidFill>
+                          <a:latin typeface="Calibri"/>
                         </a:defRPr>
                       </a:pPr>
                       <a:r>
@@ -3931,7 +4195,7 @@
                   </a:txBody>
                   <a:tcPr>
                     <a:solidFill>
-                      <a:srgbClr val="F0F2F7"/>
+                      <a:srgbClr val="F5F5F5"/>
                     </a:solidFill>
                   </a:tcPr>
                 </a:tc>
@@ -3941,10 +4205,11 @@
                     <a:lstStyle/>
                     <a:p>
                       <a:pPr>
-                        <a:defRPr sz="1400">
+                        <a:defRPr sz="1200">
                           <a:solidFill>
                             <a:srgbClr val="333333"/>
                           </a:solidFill>
+                          <a:latin typeface="Calibri"/>
                         </a:defRPr>
                       </a:pPr>
                       <a:r>
@@ -3954,7 +4219,7 @@
                   </a:txBody>
                   <a:tcPr>
                     <a:solidFill>
-                      <a:srgbClr val="F0F2F7"/>
+                      <a:srgbClr val="F5F5F5"/>
                     </a:solidFill>
                   </a:tcPr>
                 </a:tc>
@@ -3964,10 +4229,11 @@
                     <a:lstStyle/>
                     <a:p>
                       <a:pPr>
-                        <a:defRPr sz="1400">
+                        <a:defRPr sz="1200">
                           <a:solidFill>
                             <a:srgbClr val="333333"/>
                           </a:solidFill>
+                          <a:latin typeface="Calibri"/>
                         </a:defRPr>
                       </a:pPr>
                       <a:r>
@@ -3977,7 +4243,7 @@
                   </a:txBody>
                   <a:tcPr>
                     <a:solidFill>
-                      <a:srgbClr val="F0F2F7"/>
+                      <a:srgbClr val="F5F5F5"/>
                     </a:solidFill>
                   </a:tcPr>
                 </a:tc>
@@ -3987,10 +4253,11 @@
                     <a:lstStyle/>
                     <a:p>
                       <a:pPr>
-                        <a:defRPr sz="1400">
+                        <a:defRPr sz="1200">
                           <a:solidFill>
                             <a:srgbClr val="333333"/>
                           </a:solidFill>
+                          <a:latin typeface="Calibri"/>
                         </a:defRPr>
                       </a:pPr>
                       <a:r>
@@ -4000,7 +4267,7 @@
                   </a:txBody>
                   <a:tcPr>
                     <a:solidFill>
-                      <a:srgbClr val="F0F2F7"/>
+                      <a:srgbClr val="F5F5F5"/>
                     </a:solidFill>
                   </a:tcPr>
                 </a:tc>
@@ -4010,10 +4277,11 @@
                     <a:lstStyle/>
                     <a:p>
                       <a:pPr>
-                        <a:defRPr sz="1400">
+                        <a:defRPr sz="1200">
                           <a:solidFill>
                             <a:srgbClr val="333333"/>
                           </a:solidFill>
+                          <a:latin typeface="Calibri"/>
                         </a:defRPr>
                       </a:pPr>
                       <a:r>
@@ -4023,22 +4291,23 @@
                   </a:txBody>
                   <a:tcPr>
                     <a:solidFill>
-                      <a:srgbClr val="F0F2F7"/>
+                      <a:srgbClr val="F5F5F5"/>
                     </a:solidFill>
                   </a:tcPr>
                 </a:tc>
               </a:tr>
-              <a:tr h="533400">
+              <a:tr h="518160">
                 <a:tc>
                   <a:txBody>
                     <a:bodyPr/>
                     <a:lstStyle/>
                     <a:p>
                       <a:pPr>
-                        <a:defRPr sz="1400">
+                        <a:defRPr sz="1200">
                           <a:solidFill>
                             <a:srgbClr val="333333"/>
                           </a:solidFill>
+                          <a:latin typeface="Calibri"/>
                         </a:defRPr>
                       </a:pPr>
                       <a:r>
@@ -4058,10 +4327,11 @@
                     <a:lstStyle/>
                     <a:p>
                       <a:pPr>
-                        <a:defRPr sz="1400">
+                        <a:defRPr sz="1200">
                           <a:solidFill>
                             <a:srgbClr val="333333"/>
                           </a:solidFill>
+                          <a:latin typeface="Calibri"/>
                         </a:defRPr>
                       </a:pPr>
                       <a:r>
@@ -4081,10 +4351,11 @@
                     <a:lstStyle/>
                     <a:p>
                       <a:pPr>
-                        <a:defRPr sz="1400">
+                        <a:defRPr sz="1200">
                           <a:solidFill>
                             <a:srgbClr val="333333"/>
                           </a:solidFill>
+                          <a:latin typeface="Calibri"/>
                         </a:defRPr>
                       </a:pPr>
                       <a:r>
@@ -4104,10 +4375,11 @@
                     <a:lstStyle/>
                     <a:p>
                       <a:pPr>
-                        <a:defRPr sz="1400">
+                        <a:defRPr sz="1200">
                           <a:solidFill>
                             <a:srgbClr val="333333"/>
                           </a:solidFill>
+                          <a:latin typeface="Calibri"/>
                         </a:defRPr>
                       </a:pPr>
                       <a:r>
@@ -4127,10 +4399,11 @@
                     <a:lstStyle/>
                     <a:p>
                       <a:pPr>
-                        <a:defRPr sz="1400">
+                        <a:defRPr sz="1200">
                           <a:solidFill>
                             <a:srgbClr val="333333"/>
                           </a:solidFill>
+                          <a:latin typeface="Calibri"/>
                         </a:defRPr>
                       </a:pPr>
                       <a:r>
@@ -4150,10 +4423,11 @@
                     <a:lstStyle/>
                     <a:p>
                       <a:pPr>
-                        <a:defRPr sz="1400">
+                        <a:defRPr sz="1200">
                           <a:solidFill>
                             <a:srgbClr val="333333"/>
                           </a:solidFill>
+                          <a:latin typeface="Calibri"/>
                         </a:defRPr>
                       </a:pPr>
                       <a:r>
@@ -4168,17 +4442,18 @@
                   </a:tcPr>
                 </a:tc>
               </a:tr>
-              <a:tr h="533400">
+              <a:tr h="518160">
                 <a:tc>
                   <a:txBody>
                     <a:bodyPr/>
                     <a:lstStyle/>
                     <a:p>
                       <a:pPr>
-                        <a:defRPr sz="1400">
+                        <a:defRPr sz="1200">
                           <a:solidFill>
                             <a:srgbClr val="333333"/>
                           </a:solidFill>
+                          <a:latin typeface="Calibri"/>
                         </a:defRPr>
                       </a:pPr>
                       <a:r>
@@ -4188,7 +4463,7 @@
                   </a:txBody>
                   <a:tcPr>
                     <a:solidFill>
-                      <a:srgbClr val="F0F2F7"/>
+                      <a:srgbClr val="F5F5F5"/>
                     </a:solidFill>
                   </a:tcPr>
                 </a:tc>
@@ -4198,10 +4473,11 @@
                     <a:lstStyle/>
                     <a:p>
                       <a:pPr>
-                        <a:defRPr sz="1400">
+                        <a:defRPr sz="1200">
                           <a:solidFill>
                             <a:srgbClr val="333333"/>
                           </a:solidFill>
+                          <a:latin typeface="Calibri"/>
                         </a:defRPr>
                       </a:pPr>
                       <a:r>
@@ -4211,7 +4487,7 @@
                   </a:txBody>
                   <a:tcPr>
                     <a:solidFill>
-                      <a:srgbClr val="F0F2F7"/>
+                      <a:srgbClr val="F5F5F5"/>
                     </a:solidFill>
                   </a:tcPr>
                 </a:tc>
@@ -4221,10 +4497,11 @@
                     <a:lstStyle/>
                     <a:p>
                       <a:pPr>
-                        <a:defRPr sz="1400">
+                        <a:defRPr sz="1200">
                           <a:solidFill>
                             <a:srgbClr val="333333"/>
                           </a:solidFill>
+                          <a:latin typeface="Calibri"/>
                         </a:defRPr>
                       </a:pPr>
                       <a:r>
@@ -4234,7 +4511,7 @@
                   </a:txBody>
                   <a:tcPr>
                     <a:solidFill>
-                      <a:srgbClr val="F0F2F7"/>
+                      <a:srgbClr val="F5F5F5"/>
                     </a:solidFill>
                   </a:tcPr>
                 </a:tc>
@@ -4244,10 +4521,11 @@
                     <a:lstStyle/>
                     <a:p>
                       <a:pPr>
-                        <a:defRPr sz="1400">
+                        <a:defRPr sz="1200">
                           <a:solidFill>
                             <a:srgbClr val="333333"/>
                           </a:solidFill>
+                          <a:latin typeface="Calibri"/>
                         </a:defRPr>
                       </a:pPr>
                       <a:r>
@@ -4257,7 +4535,7 @@
                   </a:txBody>
                   <a:tcPr>
                     <a:solidFill>
-                      <a:srgbClr val="F0F2F7"/>
+                      <a:srgbClr val="F5F5F5"/>
                     </a:solidFill>
                   </a:tcPr>
                 </a:tc>
@@ -4267,10 +4545,11 @@
                     <a:lstStyle/>
                     <a:p>
                       <a:pPr>
-                        <a:defRPr sz="1400">
+                        <a:defRPr sz="1200">
                           <a:solidFill>
                             <a:srgbClr val="333333"/>
                           </a:solidFill>
+                          <a:latin typeface="Calibri"/>
                         </a:defRPr>
                       </a:pPr>
                       <a:r>
@@ -4280,7 +4559,7 @@
                   </a:txBody>
                   <a:tcPr>
                     <a:solidFill>
-                      <a:srgbClr val="F0F2F7"/>
+                      <a:srgbClr val="F5F5F5"/>
                     </a:solidFill>
                   </a:tcPr>
                 </a:tc>
@@ -4290,10 +4569,11 @@
                     <a:lstStyle/>
                     <a:p>
                       <a:pPr>
-                        <a:defRPr sz="1400">
+                        <a:defRPr sz="1200">
                           <a:solidFill>
                             <a:srgbClr val="333333"/>
                           </a:solidFill>
+                          <a:latin typeface="Calibri"/>
                         </a:defRPr>
                       </a:pPr>
                       <a:r>
@@ -4303,22 +4583,23 @@
                   </a:txBody>
                   <a:tcPr>
                     <a:solidFill>
-                      <a:srgbClr val="F0F2F7"/>
+                      <a:srgbClr val="F5F5F5"/>
                     </a:solidFill>
                   </a:tcPr>
                 </a:tc>
               </a:tr>
-              <a:tr h="533400">
+              <a:tr h="518160">
                 <a:tc>
                   <a:txBody>
                     <a:bodyPr/>
                     <a:lstStyle/>
                     <a:p>
                       <a:pPr>
-                        <a:defRPr sz="1400" b="1">
+                        <a:defRPr sz="1200" b="1">
                           <a:solidFill>
                             <a:srgbClr val="333333"/>
                           </a:solidFill>
+                          <a:latin typeface="Calibri"/>
                         </a:defRPr>
                       </a:pPr>
                       <a:r>
@@ -4338,10 +4619,11 @@
                     <a:lstStyle/>
                     <a:p>
                       <a:pPr>
-                        <a:defRPr sz="1400" b="1">
+                        <a:defRPr sz="1200" b="1">
                           <a:solidFill>
                             <a:srgbClr val="333333"/>
                           </a:solidFill>
+                          <a:latin typeface="Calibri"/>
                         </a:defRPr>
                       </a:pPr>
                       <a:r>
@@ -4361,10 +4643,11 @@
                     <a:lstStyle/>
                     <a:p>
                       <a:pPr>
-                        <a:defRPr sz="1400" b="1">
+                        <a:defRPr sz="1200" b="1">
                           <a:solidFill>
                             <a:srgbClr val="333333"/>
                           </a:solidFill>
+                          <a:latin typeface="Calibri"/>
                         </a:defRPr>
                       </a:pPr>
                       <a:r>
@@ -4384,10 +4667,11 @@
                     <a:lstStyle/>
                     <a:p>
                       <a:pPr>
-                        <a:defRPr sz="1400" b="1">
+                        <a:defRPr sz="1200" b="1">
                           <a:solidFill>
                             <a:srgbClr val="333333"/>
                           </a:solidFill>
+                          <a:latin typeface="Calibri"/>
                         </a:defRPr>
                       </a:pPr>
                       <a:r>
@@ -4407,10 +4691,11 @@
                     <a:lstStyle/>
                     <a:p>
                       <a:pPr>
-                        <a:defRPr sz="1400" b="1">
+                        <a:defRPr sz="1200" b="1">
                           <a:solidFill>
                             <a:srgbClr val="333333"/>
                           </a:solidFill>
+                          <a:latin typeface="Calibri"/>
                         </a:defRPr>
                       </a:pPr>
                       <a:r>
@@ -4430,10 +4715,11 @@
                     <a:lstStyle/>
                     <a:p>
                       <a:pPr>
-                        <a:defRPr sz="1400" b="1">
+                        <a:defRPr sz="1200" b="1">
                           <a:solidFill>
                             <a:srgbClr val="333333"/>
                           </a:solidFill>
+                          <a:latin typeface="Calibri"/>
                         </a:defRPr>
                       </a:pPr>
                       <a:r>
@@ -4454,14 +4740,14 @@
       </p:graphicFrame>
       <p:sp>
         <p:nvSpPr>
-          <p:cNvPr id="4" name="TextBox 3"/>
+          <p:cNvPr id="5" name="TextBox 4"/>
           <p:cNvSpPr txBox="1"/>
           <p:nvPr/>
         </p:nvSpPr>
         <p:spPr>
           <a:xfrm>
-            <a:off x="457200" y="4663440"/>
-            <a:ext cx="11247120" cy="1828800"/>
+            <a:off x="457200" y="4754880"/>
+            <a:ext cx="11247120" cy="1554480"/>
           </a:xfrm>
           <a:prstGeom prst="rect">
             <a:avLst/>
@@ -4475,22 +4761,24 @@
           <a:lstStyle/>
           <a:p>
             <a:pPr>
-              <a:defRPr sz="1400" b="0">
+              <a:defRPr sz="1300" b="0">
                 <a:solidFill>
                   <a:srgbClr val="333333"/>
                 </a:solidFill>
-              </a:defRPr>
-            </a:pPr>
-            <a:r>
-              <a:t>Highest-impact category for migration: CleanCore — 100% HIGH severity, blocks S/4HANA Cloud.</a:t>
-            </a:r>
-          </a:p>
-          <a:p>
-            <a:pPr>
-              <a:defRPr sz="1400" b="0">
+                <a:latin typeface="Calibri"/>
+              </a:defRPr>
+            </a:pPr>
+            <a:r>
+              <a:t>Highest-impact for migration: CleanCore — 100% HIGH severity, blocks S/4HANA Cloud.</a:t>
+            </a:r>
+          </a:p>
+          <a:p>
+            <a:pPr>
+              <a:defRPr sz="1300" b="0">
                 <a:solidFill>
                   <a:srgbClr val="333333"/>
                 </a:solidFill>
+                <a:latin typeface="Calibri"/>
               </a:defRPr>
             </a:pPr>
             <a:r>
@@ -4499,14 +4787,51 @@
           </a:p>
           <a:p>
             <a:pPr>
-              <a:defRPr sz="1400" b="0">
+              <a:defRPr sz="1300" b="0">
                 <a:solidFill>
                   <a:srgbClr val="333333"/>
                 </a:solidFill>
+                <a:latin typeface="Calibri"/>
               </a:defRPr>
             </a:pPr>
             <a:r>
               <a:t>0 CRITICAL: legacy code has no immediate data-loss / breach risk, just compliance and perf drift.</a:t>
+            </a:r>
+          </a:p>
+        </p:txBody>
+      </p:sp>
+      <p:sp>
+        <p:nvSpPr>
+          <p:cNvPr id="6" name="TextBox 5"/>
+          <p:cNvSpPr txBox="1"/>
+          <p:nvPr/>
+        </p:nvSpPr>
+        <p:spPr>
+          <a:xfrm>
+            <a:off x="457200" y="6537960"/>
+            <a:ext cx="11247120" cy="228600"/>
+          </a:xfrm>
+          <a:prstGeom prst="rect">
+            <a:avLst/>
+          </a:prstGeom>
+          <a:noFill/>
+        </p:spPr>
+        <p:txBody>
+          <a:bodyPr wrap="none">
+            <a:spAutoFit/>
+          </a:bodyPr>
+          <a:lstStyle/>
+          <a:p>
+            <a:pPr>
+              <a:defRPr sz="800" i="1">
+                <a:solidFill>
+                  <a:srgbClr val="555555"/>
+                </a:solidFill>
+                <a:latin typeface="Calibri"/>
+              </a:defRPr>
+            </a:pPr>
+            <a:r>
+              <a:t>EPAM Proprietary &amp; Confidential</a:t>
             </a:r>
           </a:p>
         </p:txBody>
@@ -4537,8 +4862,8 @@
         </p:nvSpPr>
         <p:spPr>
           <a:xfrm>
-            <a:off x="457200" y="228600"/>
-            <a:ext cx="11247120" cy="731520"/>
+            <a:off x="457200" y="274320"/>
+            <a:ext cx="11247120" cy="274320"/>
           </a:xfrm>
           <a:prstGeom prst="rect">
             <a:avLst/>
@@ -4552,14 +4877,15 @@
           <a:lstStyle/>
           <a:p>
             <a:pPr>
-              <a:defRPr sz="2600" b="1">
-                <a:solidFill>
-                  <a:srgbClr val="1F3A68"/>
-                </a:solidFill>
-              </a:defRPr>
-            </a:pPr>
-            <a:r>
-              <a:t>Top CleanCore finding — SXPG OS shell access</a:t>
+              <a:defRPr sz="1000" b="1">
+                <a:solidFill>
+                  <a:srgbClr val="00B4C8"/>
+                </a:solidFill>
+                <a:latin typeface="Calibri"/>
+              </a:defRPr>
+            </a:pPr>
+            <a:r>
+              <a:t>SECTION 02 · CLEANCORE</a:t>
             </a:r>
           </a:p>
         </p:txBody>
@@ -4572,8 +4898,8 @@
         </p:nvSpPr>
         <p:spPr>
           <a:xfrm>
-            <a:off x="457200" y="1097280"/>
-            <a:ext cx="11247120" cy="457200"/>
+            <a:off x="457200" y="502920"/>
+            <a:ext cx="11247120" cy="640080"/>
           </a:xfrm>
           <a:prstGeom prst="rect">
             <a:avLst/>
@@ -4581,20 +4907,21 @@
           <a:noFill/>
         </p:spPr>
         <p:txBody>
-          <a:bodyPr wrap="square">
+          <a:bodyPr wrap="none">
             <a:spAutoFit/>
           </a:bodyPr>
           <a:lstStyle/>
           <a:p>
             <a:pPr>
-              <a:defRPr sz="1400" b="1">
-                <a:solidFill>
-                  <a:srgbClr val="C83636"/>
-                </a:solidFill>
-              </a:defRPr>
-            </a:pPr>
-            <a:r>
-              <a:t>HIGH — OS command execution via `SXPG_COMMAND_EXECUTE` (shell access)</a:t>
+              <a:defRPr sz="2800">
+                <a:solidFill>
+                  <a:srgbClr val="161616"/>
+                </a:solidFill>
+                <a:latin typeface="Calibri Light"/>
+              </a:defRPr>
+            </a:pPr>
+            <a:r>
+              <a:t>Top CleanCore finding — SXPG OS shell access</a:t>
             </a:r>
           </a:p>
         </p:txBody>
@@ -4607,7 +4934,7 @@
         </p:nvSpPr>
         <p:spPr>
           <a:xfrm>
-            <a:off x="457200" y="1554480"/>
+            <a:off x="457200" y="1188720"/>
             <a:ext cx="11247120" cy="365760"/>
           </a:xfrm>
           <a:prstGeom prst="rect">
@@ -4622,14 +4949,15 @@
           <a:lstStyle/>
           <a:p>
             <a:pPr>
-              <a:defRPr sz="1200" b="0">
-                <a:solidFill>
-                  <a:srgbClr val="333333"/>
-                </a:solidFill>
-              </a:defRPr>
-            </a:pPr>
-            <a:r>
-              <a:t>Location: ZDMS_UPLOAD_FILES_F01:~325</a:t>
+              <a:defRPr sz="1400" b="1">
+                <a:solidFill>
+                  <a:srgbClr val="C83636"/>
+                </a:solidFill>
+                <a:latin typeface="Calibri"/>
+              </a:defRPr>
+            </a:pPr>
+            <a:r>
+              <a:t>HIGH — OS command execution via `SXPG_COMMAND_EXECUTE` (shell access)</a:t>
             </a:r>
           </a:p>
         </p:txBody>
@@ -4642,14 +4970,50 @@
         </p:nvSpPr>
         <p:spPr>
           <a:xfrm>
-            <a:off x="457200" y="2011680"/>
+            <a:off x="457200" y="1600200"/>
+            <a:ext cx="11247120" cy="274320"/>
+          </a:xfrm>
+          <a:prstGeom prst="rect">
+            <a:avLst/>
+          </a:prstGeom>
+          <a:noFill/>
+        </p:spPr>
+        <p:txBody>
+          <a:bodyPr wrap="square">
+            <a:spAutoFit/>
+          </a:bodyPr>
+          <a:lstStyle/>
+          <a:p>
+            <a:pPr>
+              <a:defRPr sz="1100" b="0">
+                <a:solidFill>
+                  <a:srgbClr val="555555"/>
+                </a:solidFill>
+                <a:latin typeface="Calibri"/>
+              </a:defRPr>
+            </a:pPr>
+            <a:r>
+              <a:t>Source: ZDMS_UPLOAD_FILES_F01:~325</a:t>
+            </a:r>
+          </a:p>
+        </p:txBody>
+      </p:sp>
+      <p:sp>
+        <p:nvSpPr>
+          <p:cNvPr id="6" name="TextBox 5"/>
+          <p:cNvSpPr txBox="1"/>
+          <p:nvPr/>
+        </p:nvSpPr>
+        <p:spPr>
+          <a:xfrm>
+            <a:off x="457200" y="1965960"/>
             <a:ext cx="11247120" cy="1828800"/>
           </a:xfrm>
           <a:prstGeom prst="rect">
             <a:avLst/>
           </a:prstGeom>
           <a:solidFill>
-            <a:srgbClr val="F0F2F7"/>
+            <a:srgbClr val="F5F5F5"/>
           </a:solidFill>
         </p:spPr>
         <p:txBody>
@@ -4659,7 +5023,7 @@
           <a:lstStyle/>
           <a:p>
             <a:pPr>
-              <a:defRPr sz="1300" b="0">
+              <a:defRPr sz="1200" b="0">
                 <a:solidFill>
                   <a:srgbClr val="333333"/>
                 </a:solidFill>
@@ -4672,7 +5036,7 @@
           </a:p>
           <a:p>
             <a:pPr>
-              <a:defRPr sz="1300">
+              <a:defRPr sz="1200" b="0">
                 <a:solidFill>
                   <a:srgbClr val="333333"/>
                 </a:solidFill>
@@ -4685,7 +5049,7 @@
           </a:p>
           <a:p>
             <a:pPr>
-              <a:defRPr sz="1300">
+              <a:defRPr sz="1200" b="0">
                 <a:solidFill>
                   <a:srgbClr val="333333"/>
                 </a:solidFill>
@@ -4698,7 +5062,7 @@
           </a:p>
           <a:p>
             <a:pPr>
-              <a:defRPr sz="1300">
+              <a:defRPr sz="1200" b="0">
                 <a:solidFill>
                   <a:srgbClr val="333333"/>
                 </a:solidFill>
@@ -4713,13 +5077,13 @@
       </p:sp>
       <p:sp>
         <p:nvSpPr>
-          <p:cNvPr id="6" name="TextBox 5"/>
+          <p:cNvPr id="7" name="TextBox 6"/>
           <p:cNvSpPr txBox="1"/>
           <p:nvPr/>
         </p:nvSpPr>
         <p:spPr>
           <a:xfrm>
-            <a:off x="457200" y="4114800"/>
+            <a:off x="457200" y="4206240"/>
             <a:ext cx="11247120" cy="914400"/>
           </a:xfrm>
           <a:prstGeom prst="rect">
@@ -4734,10 +5098,11 @@
           <a:lstStyle/>
           <a:p>
             <a:pPr>
-              <a:defRPr sz="1300" b="0">
+              <a:defRPr sz="1200" b="0">
                 <a:solidFill>
                   <a:srgbClr val="333333"/>
                 </a:solidFill>
+                <a:latin typeface="Calibri"/>
               </a:defRPr>
             </a:pPr>
             <a:r>
@@ -4748,14 +5113,14 @@
       </p:sp>
       <p:sp>
         <p:nvSpPr>
-          <p:cNvPr id="7" name="TextBox 6"/>
+          <p:cNvPr id="8" name="TextBox 7"/>
           <p:cNvSpPr txBox="1"/>
           <p:nvPr/>
         </p:nvSpPr>
         <p:spPr>
           <a:xfrm>
-            <a:off x="457200" y="5212080"/>
-            <a:ext cx="11247120" cy="1371600"/>
+            <a:off x="457200" y="5303520"/>
+            <a:ext cx="11247120" cy="1097280"/>
           </a:xfrm>
           <a:prstGeom prst="rect">
             <a:avLst/>
@@ -4769,14 +5134,51 @@
           <a:lstStyle/>
           <a:p>
             <a:pPr>
-              <a:defRPr sz="1300" b="1">
-                <a:solidFill>
-                  <a:srgbClr val="1F3A68"/>
-                </a:solidFill>
+              <a:defRPr sz="1200" b="1">
+                <a:solidFill>
+                  <a:srgbClr val="418DFF"/>
+                </a:solidFill>
+                <a:latin typeface="Calibri"/>
               </a:defRPr>
             </a:pPr>
             <a:r>
               <a:t>Recommendation: Replace OS-command-based SFTP with a released integration approach (e.g., SAP Integration Suite / Cloud Connector, or an HTTP-based API using released ABAP HTTP clients to a managed endpoint). Avoid SM69/SXPG completely.</a:t>
+            </a:r>
+          </a:p>
+        </p:txBody>
+      </p:sp>
+      <p:sp>
+        <p:nvSpPr>
+          <p:cNvPr id="9" name="TextBox 8"/>
+          <p:cNvSpPr txBox="1"/>
+          <p:nvPr/>
+        </p:nvSpPr>
+        <p:spPr>
+          <a:xfrm>
+            <a:off x="457200" y="6537960"/>
+            <a:ext cx="11247120" cy="228600"/>
+          </a:xfrm>
+          <a:prstGeom prst="rect">
+            <a:avLst/>
+          </a:prstGeom>
+          <a:noFill/>
+        </p:spPr>
+        <p:txBody>
+          <a:bodyPr wrap="none">
+            <a:spAutoFit/>
+          </a:bodyPr>
+          <a:lstStyle/>
+          <a:p>
+            <a:pPr>
+              <a:defRPr sz="800" i="1">
+                <a:solidFill>
+                  <a:srgbClr val="555555"/>
+                </a:solidFill>
+                <a:latin typeface="Calibri"/>
+              </a:defRPr>
+            </a:pPr>
+            <a:r>
+              <a:t>EPAM Proprietary &amp; Confidential</a:t>
             </a:r>
           </a:p>
         </p:txBody>
@@ -4807,8 +5209,8 @@
         </p:nvSpPr>
         <p:spPr>
           <a:xfrm>
-            <a:off x="457200" y="228600"/>
-            <a:ext cx="11247120" cy="731520"/>
+            <a:off x="457200" y="274320"/>
+            <a:ext cx="11247120" cy="274320"/>
           </a:xfrm>
           <a:prstGeom prst="rect">
             <a:avLst/>
@@ -4822,14 +5224,15 @@
           <a:lstStyle/>
           <a:p>
             <a:pPr>
-              <a:defRPr sz="2600" b="1">
-                <a:solidFill>
-                  <a:srgbClr val="1F3A68"/>
-                </a:solidFill>
-              </a:defRPr>
-            </a:pPr>
-            <a:r>
-              <a:t>Top CleanCore finding — AL11 file I/O</a:t>
+              <a:defRPr sz="1000" b="1">
+                <a:solidFill>
+                  <a:srgbClr val="00B4C8"/>
+                </a:solidFill>
+                <a:latin typeface="Calibri"/>
+              </a:defRPr>
+            </a:pPr>
+            <a:r>
+              <a:t>SECTION 02 · CLEANCORE</a:t>
             </a:r>
           </a:p>
         </p:txBody>
@@ -4842,8 +5245,8 @@
         </p:nvSpPr>
         <p:spPr>
           <a:xfrm>
-            <a:off x="457200" y="1097280"/>
-            <a:ext cx="11247120" cy="457200"/>
+            <a:off x="457200" y="502920"/>
+            <a:ext cx="11247120" cy="640080"/>
           </a:xfrm>
           <a:prstGeom prst="rect">
             <a:avLst/>
@@ -4851,20 +5254,21 @@
           <a:noFill/>
         </p:spPr>
         <p:txBody>
-          <a:bodyPr wrap="square">
+          <a:bodyPr wrap="none">
             <a:spAutoFit/>
           </a:bodyPr>
           <a:lstStyle/>
           <a:p>
             <a:pPr>
-              <a:defRPr sz="1400" b="1">
-                <a:solidFill>
-                  <a:srgbClr val="C83636"/>
-                </a:solidFill>
-              </a:defRPr>
-            </a:pPr>
-            <a:r>
-              <a:t>HIGH — OS command execution via `SXPG_COMMAND_EXECUTE` (shell access)</a:t>
+              <a:defRPr sz="2800">
+                <a:solidFill>
+                  <a:srgbClr val="161616"/>
+                </a:solidFill>
+                <a:latin typeface="Calibri Light"/>
+              </a:defRPr>
+            </a:pPr>
+            <a:r>
+              <a:t>Top CleanCore finding — AL11 file I/O</a:t>
             </a:r>
           </a:p>
         </p:txBody>
@@ -4877,7 +5281,7 @@
         </p:nvSpPr>
         <p:spPr>
           <a:xfrm>
-            <a:off x="457200" y="1554480"/>
+            <a:off x="457200" y="1188720"/>
             <a:ext cx="11247120" cy="365760"/>
           </a:xfrm>
           <a:prstGeom prst="rect">
@@ -4892,14 +5296,15 @@
           <a:lstStyle/>
           <a:p>
             <a:pPr>
-              <a:defRPr sz="1200" b="0">
-                <a:solidFill>
-                  <a:srgbClr val="333333"/>
-                </a:solidFill>
-              </a:defRPr>
-            </a:pPr>
-            <a:r>
-              <a:t>Location: ZDMS_UPLOAD_FILES_F01:~388</a:t>
+              <a:defRPr sz="1400" b="1">
+                <a:solidFill>
+                  <a:srgbClr val="C83636"/>
+                </a:solidFill>
+                <a:latin typeface="Calibri"/>
+              </a:defRPr>
+            </a:pPr>
+            <a:r>
+              <a:t>HIGH — OS command execution via `SXPG_COMMAND_EXECUTE` (shell access)</a:t>
             </a:r>
           </a:p>
         </p:txBody>
@@ -4912,14 +5317,50 @@
         </p:nvSpPr>
         <p:spPr>
           <a:xfrm>
-            <a:off x="457200" y="2011680"/>
+            <a:off x="457200" y="1600200"/>
+            <a:ext cx="11247120" cy="274320"/>
+          </a:xfrm>
+          <a:prstGeom prst="rect">
+            <a:avLst/>
+          </a:prstGeom>
+          <a:noFill/>
+        </p:spPr>
+        <p:txBody>
+          <a:bodyPr wrap="square">
+            <a:spAutoFit/>
+          </a:bodyPr>
+          <a:lstStyle/>
+          <a:p>
+            <a:pPr>
+              <a:defRPr sz="1100" b="0">
+                <a:solidFill>
+                  <a:srgbClr val="555555"/>
+                </a:solidFill>
+                <a:latin typeface="Calibri"/>
+              </a:defRPr>
+            </a:pPr>
+            <a:r>
+              <a:t>Source: ZDMS_UPLOAD_FILES_F01:~388</a:t>
+            </a:r>
+          </a:p>
+        </p:txBody>
+      </p:sp>
+      <p:sp>
+        <p:nvSpPr>
+          <p:cNvPr id="6" name="TextBox 5"/>
+          <p:cNvSpPr txBox="1"/>
+          <p:nvPr/>
+        </p:nvSpPr>
+        <p:spPr>
+          <a:xfrm>
+            <a:off x="457200" y="1965960"/>
             <a:ext cx="11247120" cy="1828800"/>
           </a:xfrm>
           <a:prstGeom prst="rect">
             <a:avLst/>
           </a:prstGeom>
           <a:solidFill>
-            <a:srgbClr val="F0F2F7"/>
+            <a:srgbClr val="F5F5F5"/>
           </a:solidFill>
         </p:spPr>
         <p:txBody>
@@ -4929,7 +5370,7 @@
           <a:lstStyle/>
           <a:p>
             <a:pPr>
-              <a:defRPr sz="1300" b="0">
+              <a:defRPr sz="1200" b="0">
                 <a:solidFill>
                   <a:srgbClr val="333333"/>
                 </a:solidFill>
@@ -4942,7 +5383,7 @@
           </a:p>
           <a:p>
             <a:pPr>
-              <a:defRPr sz="1300">
+              <a:defRPr sz="1200" b="0">
                 <a:solidFill>
                   <a:srgbClr val="333333"/>
                 </a:solidFill>
@@ -4955,7 +5396,7 @@
           </a:p>
           <a:p>
             <a:pPr>
-              <a:defRPr sz="1300">
+              <a:defRPr sz="1200" b="0">
                 <a:solidFill>
                   <a:srgbClr val="333333"/>
                 </a:solidFill>
@@ -4968,7 +5409,7 @@
           </a:p>
           <a:p>
             <a:pPr>
-              <a:defRPr sz="1300">
+              <a:defRPr sz="1200" b="0">
                 <a:solidFill>
                   <a:srgbClr val="333333"/>
                 </a:solidFill>
@@ -4983,13 +5424,13 @@
       </p:sp>
       <p:sp>
         <p:nvSpPr>
-          <p:cNvPr id="6" name="TextBox 5"/>
+          <p:cNvPr id="7" name="TextBox 6"/>
           <p:cNvSpPr txBox="1"/>
           <p:nvPr/>
         </p:nvSpPr>
         <p:spPr>
           <a:xfrm>
-            <a:off x="457200" y="4114800"/>
+            <a:off x="457200" y="4206240"/>
             <a:ext cx="11247120" cy="914400"/>
           </a:xfrm>
           <a:prstGeom prst="rect">
@@ -5004,10 +5445,11 @@
           <a:lstStyle/>
           <a:p>
             <a:pPr>
-              <a:defRPr sz="1300" b="0">
+              <a:defRPr sz="1200" b="0">
                 <a:solidFill>
                   <a:srgbClr val="333333"/>
                 </a:solidFill>
+                <a:latin typeface="Calibri"/>
               </a:defRPr>
             </a:pPr>
             <a:r>
@@ -5018,14 +5460,14 @@
       </p:sp>
       <p:sp>
         <p:nvSpPr>
-          <p:cNvPr id="7" name="TextBox 6"/>
+          <p:cNvPr id="8" name="TextBox 7"/>
           <p:cNvSpPr txBox="1"/>
           <p:nvPr/>
         </p:nvSpPr>
         <p:spPr>
           <a:xfrm>
-            <a:off x="457200" y="5212080"/>
-            <a:ext cx="11247120" cy="1371600"/>
+            <a:off x="457200" y="5303520"/>
+            <a:ext cx="11247120" cy="1097280"/>
           </a:xfrm>
           <a:prstGeom prst="rect">
             <a:avLst/>
@@ -5039,14 +5481,51 @@
           <a:lstStyle/>
           <a:p>
             <a:pPr>
-              <a:defRPr sz="1300" b="1">
-                <a:solidFill>
-                  <a:srgbClr val="1F3A68"/>
-                </a:solidFill>
+              <a:defRPr sz="1200" b="1">
+                <a:solidFill>
+                  <a:srgbClr val="418DFF"/>
+                </a:solidFill>
+                <a:latin typeface="Calibri"/>
               </a:defRPr>
             </a:pPr>
             <a:r>
               <a:t>Recommendation: Same as above—move file transfer out of the ABAP app server OS layer and use a released connectivity/integration mechanism.</a:t>
+            </a:r>
+          </a:p>
+        </p:txBody>
+      </p:sp>
+      <p:sp>
+        <p:nvSpPr>
+          <p:cNvPr id="9" name="TextBox 8"/>
+          <p:cNvSpPr txBox="1"/>
+          <p:nvPr/>
+        </p:nvSpPr>
+        <p:spPr>
+          <a:xfrm>
+            <a:off x="457200" y="6537960"/>
+            <a:ext cx="11247120" cy="228600"/>
+          </a:xfrm>
+          <a:prstGeom prst="rect">
+            <a:avLst/>
+          </a:prstGeom>
+          <a:noFill/>
+        </p:spPr>
+        <p:txBody>
+          <a:bodyPr wrap="none">
+            <a:spAutoFit/>
+          </a:bodyPr>
+          <a:lstStyle/>
+          <a:p>
+            <a:pPr>
+              <a:defRPr sz="800" i="1">
+                <a:solidFill>
+                  <a:srgbClr val="555555"/>
+                </a:solidFill>
+                <a:latin typeface="Calibri"/>
+              </a:defRPr>
+            </a:pPr>
+            <a:r>
+              <a:t>EPAM Proprietary &amp; Confidential</a:t>
             </a:r>
           </a:p>
         </p:txBody>
@@ -5077,8 +5556,8 @@
         </p:nvSpPr>
         <p:spPr>
           <a:xfrm>
-            <a:off x="457200" y="228600"/>
-            <a:ext cx="11247120" cy="731520"/>
+            <a:off x="457200" y="274320"/>
+            <a:ext cx="11247120" cy="274320"/>
           </a:xfrm>
           <a:prstGeom prst="rect">
             <a:avLst/>
@@ -5092,14 +5571,15 @@
           <a:lstStyle/>
           <a:p>
             <a:pPr>
-              <a:defRPr sz="2600" b="1">
-                <a:solidFill>
-                  <a:srgbClr val="1F3A68"/>
-                </a:solidFill>
-              </a:defRPr>
-            </a:pPr>
-            <a:r>
-              <a:t>Top security finding — missing AUTHORITY-CHECK</a:t>
+              <a:defRPr sz="1000" b="1">
+                <a:solidFill>
+                  <a:srgbClr val="00B4C8"/>
+                </a:solidFill>
+                <a:latin typeface="Calibri"/>
+              </a:defRPr>
+            </a:pPr>
+            <a:r>
+              <a:t>SECTION 02 · SECURITY</a:t>
             </a:r>
           </a:p>
         </p:txBody>
@@ -5112,8 +5592,8 @@
         </p:nvSpPr>
         <p:spPr>
           <a:xfrm>
-            <a:off x="457200" y="1097280"/>
-            <a:ext cx="11247120" cy="457200"/>
+            <a:off x="457200" y="502920"/>
+            <a:ext cx="11247120" cy="640080"/>
           </a:xfrm>
           <a:prstGeom prst="rect">
             <a:avLst/>
@@ -5121,20 +5601,21 @@
           <a:noFill/>
         </p:spPr>
         <p:txBody>
-          <a:bodyPr wrap="square">
+          <a:bodyPr wrap="none">
             <a:spAutoFit/>
           </a:bodyPr>
           <a:lstStyle/>
           <a:p>
             <a:pPr>
-              <a:defRPr sz="1400" b="1">
-                <a:solidFill>
-                  <a:srgbClr val="C83636"/>
-                </a:solidFill>
-              </a:defRPr>
-            </a:pPr>
-            <a:r>
-              <a:t>HIGH — Missing explicit authorization check before OS command execution (SFTP GET)</a:t>
+              <a:defRPr sz="2800">
+                <a:solidFill>
+                  <a:srgbClr val="161616"/>
+                </a:solidFill>
+                <a:latin typeface="Calibri Light"/>
+              </a:defRPr>
+            </a:pPr>
+            <a:r>
+              <a:t>Top security finding — missing AUTHORITY-CHECK</a:t>
             </a:r>
           </a:p>
         </p:txBody>
@@ -5147,7 +5628,7 @@
         </p:nvSpPr>
         <p:spPr>
           <a:xfrm>
-            <a:off x="457200" y="1554480"/>
+            <a:off x="457200" y="1188720"/>
             <a:ext cx="11247120" cy="365760"/>
           </a:xfrm>
           <a:prstGeom prst="rect">
@@ -5162,14 +5643,15 @@
           <a:lstStyle/>
           <a:p>
             <a:pPr>
-              <a:defRPr sz="1200" b="0">
-                <a:solidFill>
-                  <a:srgbClr val="333333"/>
-                </a:solidFill>
-              </a:defRPr>
-            </a:pPr>
-            <a:r>
-              <a:t>Location: ZDMS_UPLOAD_FILES_F01:~250</a:t>
+              <a:defRPr sz="1400" b="1">
+                <a:solidFill>
+                  <a:srgbClr val="C83636"/>
+                </a:solidFill>
+                <a:latin typeface="Calibri"/>
+              </a:defRPr>
+            </a:pPr>
+            <a:r>
+              <a:t>HIGH — Missing explicit authorization check before OS command execution (SFTP GET)</a:t>
             </a:r>
           </a:p>
         </p:txBody>
@@ -5182,14 +5664,50 @@
         </p:nvSpPr>
         <p:spPr>
           <a:xfrm>
-            <a:off x="457200" y="2011680"/>
+            <a:off x="457200" y="1600200"/>
+            <a:ext cx="11247120" cy="274320"/>
+          </a:xfrm>
+          <a:prstGeom prst="rect">
+            <a:avLst/>
+          </a:prstGeom>
+          <a:noFill/>
+        </p:spPr>
+        <p:txBody>
+          <a:bodyPr wrap="square">
+            <a:spAutoFit/>
+          </a:bodyPr>
+          <a:lstStyle/>
+          <a:p>
+            <a:pPr>
+              <a:defRPr sz="1100" b="0">
+                <a:solidFill>
+                  <a:srgbClr val="555555"/>
+                </a:solidFill>
+                <a:latin typeface="Calibri"/>
+              </a:defRPr>
+            </a:pPr>
+            <a:r>
+              <a:t>Source: ZDMS_UPLOAD_FILES_F01:~250</a:t>
+            </a:r>
+          </a:p>
+        </p:txBody>
+      </p:sp>
+      <p:sp>
+        <p:nvSpPr>
+          <p:cNvPr id="6" name="TextBox 5"/>
+          <p:cNvSpPr txBox="1"/>
+          <p:nvPr/>
+        </p:nvSpPr>
+        <p:spPr>
+          <a:xfrm>
+            <a:off x="457200" y="1965960"/>
             <a:ext cx="11247120" cy="1828800"/>
           </a:xfrm>
           <a:prstGeom prst="rect">
             <a:avLst/>
           </a:prstGeom>
           <a:solidFill>
-            <a:srgbClr val="F0F2F7"/>
+            <a:srgbClr val="F5F5F5"/>
           </a:solidFill>
         </p:spPr>
         <p:txBody>
@@ -5199,7 +5717,7 @@
           <a:lstStyle/>
           <a:p>
             <a:pPr>
-              <a:defRPr sz="1300" b="0">
+              <a:defRPr sz="1200" b="0">
                 <a:solidFill>
                   <a:srgbClr val="333333"/>
                 </a:solidFill>
@@ -5212,7 +5730,7 @@
           </a:p>
           <a:p>
             <a:pPr>
-              <a:defRPr sz="1300">
+              <a:defRPr sz="1200" b="0">
                 <a:solidFill>
                   <a:srgbClr val="333333"/>
                 </a:solidFill>
@@ -5225,7 +5743,7 @@
           </a:p>
           <a:p>
             <a:pPr>
-              <a:defRPr sz="1300">
+              <a:defRPr sz="1200" b="0">
                 <a:solidFill>
                   <a:srgbClr val="333333"/>
                 </a:solidFill>
@@ -5238,7 +5756,7 @@
           </a:p>
           <a:p>
             <a:pPr>
-              <a:defRPr sz="1300">
+              <a:defRPr sz="1200" b="0">
                 <a:solidFill>
                   <a:srgbClr val="333333"/>
                 </a:solidFill>
@@ -5253,13 +5771,13 @@
       </p:sp>
       <p:sp>
         <p:nvSpPr>
-          <p:cNvPr id="6" name="TextBox 5"/>
+          <p:cNvPr id="7" name="TextBox 6"/>
           <p:cNvSpPr txBox="1"/>
           <p:nvPr/>
         </p:nvSpPr>
         <p:spPr>
           <a:xfrm>
-            <a:off x="457200" y="4114800"/>
+            <a:off x="457200" y="4206240"/>
             <a:ext cx="11247120" cy="914400"/>
           </a:xfrm>
           <a:prstGeom prst="rect">
@@ -5274,10 +5792,11 @@
           <a:lstStyle/>
           <a:p>
             <a:pPr>
-              <a:defRPr sz="1300" b="0">
+              <a:defRPr sz="1200" b="0">
                 <a:solidFill>
                   <a:srgbClr val="333333"/>
                 </a:solidFill>
+                <a:latin typeface="Calibri"/>
               </a:defRPr>
             </a:pPr>
             <a:r>
@@ -5288,14 +5807,14 @@
       </p:sp>
       <p:sp>
         <p:nvSpPr>
-          <p:cNvPr id="7" name="TextBox 6"/>
+          <p:cNvPr id="8" name="TextBox 7"/>
           <p:cNvSpPr txBox="1"/>
           <p:nvPr/>
         </p:nvSpPr>
         <p:spPr>
           <a:xfrm>
-            <a:off x="457200" y="5212080"/>
-            <a:ext cx="11247120" cy="1371600"/>
+            <a:off x="457200" y="5303520"/>
+            <a:ext cx="11247120" cy="1097280"/>
           </a:xfrm>
           <a:prstGeom prst="rect">
             <a:avLst/>
@@ -5309,14 +5828,51 @@
           <a:lstStyle/>
           <a:p>
             <a:pPr>
-              <a:defRPr sz="1300" b="1">
-                <a:solidFill>
-                  <a:srgbClr val="1F3A68"/>
-                </a:solidFill>
+              <a:defRPr sz="1200" b="1">
+                <a:solidFill>
+                  <a:srgbClr val="418DFF"/>
+                </a:solidFill>
+                <a:latin typeface="Calibri"/>
               </a:defRPr>
             </a:pPr>
             <a:r>
               <a:t>Recommendation: Add an explicit `AUTHORITY-CHECK` before calling `SXPG_COMMAND_EXECUTE` (and fail closed). Also restrict allowed commands in SM69 and ensure the command is defined with “Additional parameters not allowed” where possible.</a:t>
+            </a:r>
+          </a:p>
+        </p:txBody>
+      </p:sp>
+      <p:sp>
+        <p:nvSpPr>
+          <p:cNvPr id="9" name="TextBox 8"/>
+          <p:cNvSpPr txBox="1"/>
+          <p:nvPr/>
+        </p:nvSpPr>
+        <p:spPr>
+          <a:xfrm>
+            <a:off x="457200" y="6537960"/>
+            <a:ext cx="11247120" cy="228600"/>
+          </a:xfrm>
+          <a:prstGeom prst="rect">
+            <a:avLst/>
+          </a:prstGeom>
+          <a:noFill/>
+        </p:spPr>
+        <p:txBody>
+          <a:bodyPr wrap="none">
+            <a:spAutoFit/>
+          </a:bodyPr>
+          <a:lstStyle/>
+          <a:p>
+            <a:pPr>
+              <a:defRPr sz="800" i="1">
+                <a:solidFill>
+                  <a:srgbClr val="555555"/>
+                </a:solidFill>
+                <a:latin typeface="Calibri"/>
+              </a:defRPr>
+            </a:pPr>
+            <a:r>
+              <a:t>EPAM Proprietary &amp; Confidential</a:t>
             </a:r>
           </a:p>
         </p:txBody>
@@ -5347,8 +5903,8 @@
         </p:nvSpPr>
         <p:spPr>
           <a:xfrm>
-            <a:off x="457200" y="228600"/>
-            <a:ext cx="11247120" cy="731520"/>
+            <a:off x="457200" y="274320"/>
+            <a:ext cx="11247120" cy="274320"/>
           </a:xfrm>
           <a:prstGeom prst="rect">
             <a:avLst/>
@@ -5362,14 +5918,15 @@
           <a:lstStyle/>
           <a:p>
             <a:pPr>
-              <a:defRPr sz="2600" b="1">
-                <a:solidFill>
-                  <a:srgbClr val="1F3A68"/>
-                </a:solidFill>
-              </a:defRPr>
-            </a:pPr>
-            <a:r>
-              <a:t>Top performance finding — SELECT * + repeated reads</a:t>
+              <a:defRPr sz="1000" b="1">
+                <a:solidFill>
+                  <a:srgbClr val="00B4C8"/>
+                </a:solidFill>
+                <a:latin typeface="Calibri"/>
+              </a:defRPr>
+            </a:pPr>
+            <a:r>
+              <a:t>SECTION 02 · PERFORMANCE</a:t>
             </a:r>
           </a:p>
         </p:txBody>
@@ -5382,8 +5939,8 @@
         </p:nvSpPr>
         <p:spPr>
           <a:xfrm>
-            <a:off x="457200" y="1097280"/>
-            <a:ext cx="11247120" cy="457200"/>
+            <a:off x="457200" y="502920"/>
+            <a:ext cx="11247120" cy="640080"/>
           </a:xfrm>
           <a:prstGeom prst="rect">
             <a:avLst/>
@@ -5391,20 +5948,21 @@
           <a:noFill/>
         </p:spPr>
         <p:txBody>
-          <a:bodyPr wrap="square">
+          <a:bodyPr wrap="none">
             <a:spAutoFit/>
           </a:bodyPr>
           <a:lstStyle/>
           <a:p>
             <a:pPr>
-              <a:defRPr sz="1400" b="1">
-                <a:solidFill>
-                  <a:srgbClr val="C83636"/>
-                </a:solidFill>
-              </a:defRPr>
-            </a:pPr>
-            <a:r>
-              <a:t>HIGH — Repeated function/module calls inside loop (FORMAT_MESSAGE)</a:t>
+              <a:defRPr sz="2800">
+                <a:solidFill>
+                  <a:srgbClr val="161616"/>
+                </a:solidFill>
+                <a:latin typeface="Calibri Light"/>
+              </a:defRPr>
+            </a:pPr>
+            <a:r>
+              <a:t>Top performance finding — repeated SELECT in loop</a:t>
             </a:r>
           </a:p>
         </p:txBody>
@@ -5417,7 +5975,7 @@
         </p:nvSpPr>
         <p:spPr>
           <a:xfrm>
-            <a:off x="457200" y="1554480"/>
+            <a:off x="457200" y="1188720"/>
             <a:ext cx="11247120" cy="365760"/>
           </a:xfrm>
           <a:prstGeom prst="rect">
@@ -5432,14 +5990,15 @@
           <a:lstStyle/>
           <a:p>
             <a:pPr>
-              <a:defRPr sz="1200" b="0">
-                <a:solidFill>
-                  <a:srgbClr val="333333"/>
-                </a:solidFill>
-              </a:defRPr>
-            </a:pPr>
-            <a:r>
-              <a:t>Location: ZDMS_UPLOAD_FILES_F01:~235</a:t>
+              <a:defRPr sz="1400" b="1">
+                <a:solidFill>
+                  <a:srgbClr val="C83636"/>
+                </a:solidFill>
+                <a:latin typeface="Calibri"/>
+              </a:defRPr>
+            </a:pPr>
+            <a:r>
+              <a:t>HIGH — Repeated function/module calls inside loop (FORMAT_MESSAGE)</a:t>
             </a:r>
           </a:p>
         </p:txBody>
@@ -5452,14 +6011,50 @@
         </p:nvSpPr>
         <p:spPr>
           <a:xfrm>
-            <a:off x="457200" y="2011680"/>
+            <a:off x="457200" y="1600200"/>
+            <a:ext cx="11247120" cy="274320"/>
+          </a:xfrm>
+          <a:prstGeom prst="rect">
+            <a:avLst/>
+          </a:prstGeom>
+          <a:noFill/>
+        </p:spPr>
+        <p:txBody>
+          <a:bodyPr wrap="square">
+            <a:spAutoFit/>
+          </a:bodyPr>
+          <a:lstStyle/>
+          <a:p>
+            <a:pPr>
+              <a:defRPr sz="1100" b="0">
+                <a:solidFill>
+                  <a:srgbClr val="555555"/>
+                </a:solidFill>
+                <a:latin typeface="Calibri"/>
+              </a:defRPr>
+            </a:pPr>
+            <a:r>
+              <a:t>Source: ZDMS_UPLOAD_FILES_F01:~235</a:t>
+            </a:r>
+          </a:p>
+        </p:txBody>
+      </p:sp>
+      <p:sp>
+        <p:nvSpPr>
+          <p:cNvPr id="6" name="TextBox 5"/>
+          <p:cNvSpPr txBox="1"/>
+          <p:nvPr/>
+        </p:nvSpPr>
+        <p:spPr>
+          <a:xfrm>
+            <a:off x="457200" y="1965960"/>
             <a:ext cx="11247120" cy="1828800"/>
           </a:xfrm>
           <a:prstGeom prst="rect">
             <a:avLst/>
           </a:prstGeom>
           <a:solidFill>
-            <a:srgbClr val="F0F2F7"/>
+            <a:srgbClr val="F5F5F5"/>
           </a:solidFill>
         </p:spPr>
         <p:txBody>
@@ -5469,7 +6064,7 @@
           <a:lstStyle/>
           <a:p>
             <a:pPr>
-              <a:defRPr sz="1300" b="0">
+              <a:defRPr sz="1200" b="0">
                 <a:solidFill>
                   <a:srgbClr val="333333"/>
                 </a:solidFill>
@@ -5482,7 +6077,7 @@
           </a:p>
           <a:p>
             <a:pPr>
-              <a:defRPr sz="1300">
+              <a:defRPr sz="1200" b="0">
                 <a:solidFill>
                   <a:srgbClr val="333333"/>
                 </a:solidFill>
@@ -5495,7 +6090,7 @@
           </a:p>
           <a:p>
             <a:pPr>
-              <a:defRPr sz="1300">
+              <a:defRPr sz="1200" b="0">
                 <a:solidFill>
                   <a:srgbClr val="333333"/>
                 </a:solidFill>
@@ -5508,7 +6103,7 @@
           </a:p>
           <a:p>
             <a:pPr>
-              <a:defRPr sz="1300">
+              <a:defRPr sz="1200" b="0">
                 <a:solidFill>
                   <a:srgbClr val="333333"/>
                 </a:solidFill>
@@ -5521,7 +6116,7 @@
           </a:p>
           <a:p>
             <a:pPr>
-              <a:defRPr sz="1300">
+              <a:defRPr sz="1200" b="0">
                 <a:solidFill>
                   <a:srgbClr val="333333"/>
                 </a:solidFill>
@@ -5536,13 +6131,13 @@
       </p:sp>
       <p:sp>
         <p:nvSpPr>
-          <p:cNvPr id="6" name="TextBox 5"/>
+          <p:cNvPr id="7" name="TextBox 6"/>
           <p:cNvSpPr txBox="1"/>
           <p:nvPr/>
         </p:nvSpPr>
         <p:spPr>
           <a:xfrm>
-            <a:off x="457200" y="4114800"/>
+            <a:off x="457200" y="4206240"/>
             <a:ext cx="11247120" cy="914400"/>
           </a:xfrm>
           <a:prstGeom prst="rect">
@@ -5557,10 +6152,11 @@
           <a:lstStyle/>
           <a:p>
             <a:pPr>
-              <a:defRPr sz="1300" b="0">
+              <a:defRPr sz="1200" b="0">
                 <a:solidFill>
                   <a:srgbClr val="333333"/>
                 </a:solidFill>
+                <a:latin typeface="Calibri"/>
               </a:defRPr>
             </a:pPr>
             <a:r>
@@ -5571,14 +6167,14 @@
       </p:sp>
       <p:sp>
         <p:nvSpPr>
-          <p:cNvPr id="7" name="TextBox 6"/>
+          <p:cNvPr id="8" name="TextBox 7"/>
           <p:cNvSpPr txBox="1"/>
           <p:nvPr/>
         </p:nvSpPr>
         <p:spPr>
           <a:xfrm>
-            <a:off x="457200" y="5212080"/>
-            <a:ext cx="11247120" cy="1371600"/>
+            <a:off x="457200" y="5303520"/>
+            <a:ext cx="11247120" cy="1097280"/>
           </a:xfrm>
           <a:prstGeom prst="rect">
             <a:avLst/>
@@ -5592,14 +6188,51 @@
           <a:lstStyle/>
           <a:p>
             <a:pPr>
-              <a:defRPr sz="1300" b="1">
-                <a:solidFill>
-                  <a:srgbClr val="1F3A68"/>
-                </a:solidFill>
+              <a:defRPr sz="1200" b="1">
+                <a:solidFill>
+                  <a:srgbClr val="418DFF"/>
+                </a:solidFill>
+                <a:latin typeface="Calibri"/>
               </a:defRPr>
             </a:pPr>
             <a:r>
               <a:t>Recommendation: Avoid calling `FORMAT_MESSAGE` for every row when possible—e.g., use `rs_return-message` directly if already filled, or collect unique `(id, number, v1..v4)` combinations and format once per unique key (cache result in a hashed table), then reuse.</a:t>
+            </a:r>
+          </a:p>
+        </p:txBody>
+      </p:sp>
+      <p:sp>
+        <p:nvSpPr>
+          <p:cNvPr id="9" name="TextBox 8"/>
+          <p:cNvSpPr txBox="1"/>
+          <p:nvPr/>
+        </p:nvSpPr>
+        <p:spPr>
+          <a:xfrm>
+            <a:off x="457200" y="6537960"/>
+            <a:ext cx="11247120" cy="228600"/>
+          </a:xfrm>
+          <a:prstGeom prst="rect">
+            <a:avLst/>
+          </a:prstGeom>
+          <a:noFill/>
+        </p:spPr>
+        <p:txBody>
+          <a:bodyPr wrap="none">
+            <a:spAutoFit/>
+          </a:bodyPr>
+          <a:lstStyle/>
+          <a:p>
+            <a:pPr>
+              <a:defRPr sz="800" i="1">
+                <a:solidFill>
+                  <a:srgbClr val="555555"/>
+                </a:solidFill>
+                <a:latin typeface="Calibri"/>
+              </a:defRPr>
+            </a:pPr>
+            <a:r>
+              <a:t>EPAM Proprietary &amp; Confidential</a:t>
             </a:r>
           </a:p>
         </p:txBody>
@@ -5630,8 +6263,8 @@
         </p:nvSpPr>
         <p:spPr>
           <a:xfrm>
-            <a:off x="457200" y="228600"/>
-            <a:ext cx="11247120" cy="731520"/>
+            <a:off x="457200" y="274320"/>
+            <a:ext cx="11247120" cy="274320"/>
           </a:xfrm>
           <a:prstGeom prst="rect">
             <a:avLst/>
@@ -5645,14 +6278,15 @@
           <a:lstStyle/>
           <a:p>
             <a:pPr>
-              <a:defRPr sz="2600" b="1">
-                <a:solidFill>
-                  <a:srgbClr val="1F3A68"/>
-                </a:solidFill>
-              </a:defRPr>
-            </a:pPr>
-            <a:r>
-              <a:t>Maintainability — 16 LOW findings (style debt)</a:t>
+              <a:defRPr sz="1000" b="1">
+                <a:solidFill>
+                  <a:srgbClr val="00B4C8"/>
+                </a:solidFill>
+                <a:latin typeface="Calibri"/>
+              </a:defRPr>
+            </a:pPr>
+            <a:r>
+              <a:t>SECTION 02 · MAINTAINABILITY</a:t>
             </a:r>
           </a:p>
         </p:txBody>
@@ -5665,8 +6299,8 @@
         </p:nvSpPr>
         <p:spPr>
           <a:xfrm>
-            <a:off x="457200" y="1188720"/>
-            <a:ext cx="11247120" cy="5212080"/>
+            <a:off x="457200" y="502920"/>
+            <a:ext cx="11247120" cy="640080"/>
           </a:xfrm>
           <a:prstGeom prst="rect">
             <a:avLst/>
@@ -5674,16 +6308,53 @@
           <a:noFill/>
         </p:spPr>
         <p:txBody>
+          <a:bodyPr wrap="none">
+            <a:spAutoFit/>
+          </a:bodyPr>
+          <a:lstStyle/>
+          <a:p>
+            <a:pPr>
+              <a:defRPr sz="2800">
+                <a:solidFill>
+                  <a:srgbClr val="161616"/>
+                </a:solidFill>
+                <a:latin typeface="Calibri Light"/>
+              </a:defRPr>
+            </a:pPr>
+            <a:r>
+              <a:t>Maintainability — 16 LOW findings (style debt)</a:t>
+            </a:r>
+          </a:p>
+        </p:txBody>
+      </p:sp>
+      <p:sp>
+        <p:nvSpPr>
+          <p:cNvPr id="4" name="TextBox 3"/>
+          <p:cNvSpPr txBox="1"/>
+          <p:nvPr/>
+        </p:nvSpPr>
+        <p:spPr>
+          <a:xfrm>
+            <a:off x="457200" y="1188720"/>
+            <a:ext cx="11247120" cy="5212080"/>
+          </a:xfrm>
+          <a:prstGeom prst="rect">
+            <a:avLst/>
+          </a:prstGeom>
+          <a:noFill/>
+        </p:spPr>
+        <p:txBody>
           <a:bodyPr wrap="square">
             <a:spAutoFit/>
           </a:bodyPr>
           <a:lstStyle/>
           <a:p>
             <a:pPr>
-              <a:defRPr sz="1400" b="0">
+              <a:defRPr sz="1300" b="0">
                 <a:solidFill>
                   <a:srgbClr val="333333"/>
                 </a:solidFill>
+                <a:latin typeface="Calibri"/>
               </a:defRPr>
             </a:pPr>
             <a:r>
@@ -5692,19 +6363,21 @@
           </a:p>
           <a:p>
             <a:pPr>
-              <a:defRPr sz="1400" b="0">
+              <a:defRPr sz="1300" b="0">
                 <a:solidFill>
                   <a:srgbClr val="333333"/>
                 </a:solidFill>
-              </a:defRPr>
-            </a:pPr>
-          </a:p>
-          <a:p>
-            <a:pPr>
-              <a:defRPr sz="1400" b="0">
+                <a:latin typeface="Calibri"/>
+              </a:defRPr>
+            </a:pPr>
+          </a:p>
+          <a:p>
+            <a:pPr>
+              <a:defRPr sz="1300" b="0">
                 <a:solidFill>
                   <a:srgbClr val="333333"/>
                 </a:solidFill>
+                <a:latin typeface="Calibri"/>
               </a:defRPr>
             </a:pPr>
             <a:r>
@@ -5713,22 +6386,24 @@
           </a:p>
           <a:p>
             <a:pPr>
-              <a:defRPr sz="1400" b="0">
+              <a:defRPr sz="1300" b="0">
                 <a:solidFill>
                   <a:srgbClr val="333333"/>
                 </a:solidFill>
-              </a:defRPr>
-            </a:pPr>
-            <a:r>
-              <a:t>• Magic literals — separator characters (' ', ';', '@', ':') hardcoded in PERFORM calls (4 instances).</a:t>
-            </a:r>
-          </a:p>
-          <a:p>
-            <a:pPr>
-              <a:defRPr sz="1400" b="0">
+                <a:latin typeface="Calibri"/>
+              </a:defRPr>
+            </a:pPr>
+            <a:r>
+              <a:t>• Magic literals — separator characters (' ', ';', '@', ':') hardcoded in PERFORM calls.</a:t>
+            </a:r>
+          </a:p>
+          <a:p>
+            <a:pPr>
+              <a:defRPr sz="1300" b="0">
                 <a:solidFill>
                   <a:srgbClr val="333333"/>
                 </a:solidFill>
+                <a:latin typeface="Calibri"/>
               </a:defRPr>
             </a:pPr>
             <a:r>
@@ -5737,10 +6412,11 @@
           </a:p>
           <a:p>
             <a:pPr>
-              <a:defRPr sz="1400" b="0">
+              <a:defRPr sz="1300" b="0">
                 <a:solidFill>
                   <a:srgbClr val="333333"/>
                 </a:solidFill>
+                <a:latin typeface="Calibri"/>
               </a:defRPr>
             </a:pPr>
             <a:r>
@@ -5749,10 +6425,11 @@
           </a:p>
           <a:p>
             <a:pPr>
-              <a:defRPr sz="1400" b="0">
+              <a:defRPr sz="1300" b="0">
                 <a:solidFill>
                   <a:srgbClr val="333333"/>
                 </a:solidFill>
+                <a:latin typeface="Calibri"/>
               </a:defRPr>
             </a:pPr>
             <a:r>
@@ -5761,10 +6438,11 @@
           </a:p>
           <a:p>
             <a:pPr>
-              <a:defRPr sz="1400" b="0">
+              <a:defRPr sz="1300" b="0">
                 <a:solidFill>
                   <a:srgbClr val="333333"/>
                 </a:solidFill>
+                <a:latin typeface="Calibri"/>
               </a:defRPr>
             </a:pPr>
             <a:r>
@@ -5773,10 +6451,11 @@
           </a:p>
           <a:p>
             <a:pPr>
-              <a:defRPr sz="1400" b="0">
+              <a:defRPr sz="1300" b="0">
                 <a:solidFill>
                   <a:srgbClr val="333333"/>
                 </a:solidFill>
+                <a:latin typeface="Calibri"/>
               </a:defRPr>
             </a:pPr>
             <a:r>
@@ -5785,23 +6464,61 @@
           </a:p>
           <a:p>
             <a:pPr>
-              <a:defRPr sz="1400" b="0">
+              <a:defRPr sz="1300" b="0">
                 <a:solidFill>
                   <a:srgbClr val="333333"/>
                 </a:solidFill>
-              </a:defRPr>
-            </a:pPr>
-          </a:p>
-          <a:p>
-            <a:pPr>
-              <a:defRPr sz="1400" b="0">
+                <a:latin typeface="Calibri"/>
+              </a:defRPr>
+            </a:pPr>
+          </a:p>
+          <a:p>
+            <a:pPr>
+              <a:defRPr sz="1300" b="0">
                 <a:solidFill>
                   <a:srgbClr val="333333"/>
                 </a:solidFill>
+                <a:latin typeface="Calibri"/>
               </a:defRPr>
             </a:pPr>
             <a:r>
               <a:t>None of these block the object's function. They accumulate — fix during the next focused maintenance window.</a:t>
+            </a:r>
+          </a:p>
+        </p:txBody>
+      </p:sp>
+      <p:sp>
+        <p:nvSpPr>
+          <p:cNvPr id="5" name="TextBox 4"/>
+          <p:cNvSpPr txBox="1"/>
+          <p:nvPr/>
+        </p:nvSpPr>
+        <p:spPr>
+          <a:xfrm>
+            <a:off x="457200" y="6537960"/>
+            <a:ext cx="11247120" cy="228600"/>
+          </a:xfrm>
+          <a:prstGeom prst="rect">
+            <a:avLst/>
+          </a:prstGeom>
+          <a:noFill/>
+        </p:spPr>
+        <p:txBody>
+          <a:bodyPr wrap="none">
+            <a:spAutoFit/>
+          </a:bodyPr>
+          <a:lstStyle/>
+          <a:p>
+            <a:pPr>
+              <a:defRPr sz="800" i="1">
+                <a:solidFill>
+                  <a:srgbClr val="555555"/>
+                </a:solidFill>
+                <a:latin typeface="Calibri"/>
+              </a:defRPr>
+            </a:pPr>
+            <a:r>
+              <a:t>EPAM Proprietary &amp; Confidential</a:t>
             </a:r>
           </a:p>
         </p:txBody>
@@ -5832,8 +6549,8 @@
         </p:nvSpPr>
         <p:spPr>
           <a:xfrm>
-            <a:off x="457200" y="228600"/>
-            <a:ext cx="11247120" cy="731520"/>
+            <a:off x="457200" y="274320"/>
+            <a:ext cx="11247120" cy="274320"/>
           </a:xfrm>
           <a:prstGeom prst="rect">
             <a:avLst/>
@@ -5847,14 +6564,15 @@
           <a:lstStyle/>
           <a:p>
             <a:pPr>
-              <a:defRPr sz="2600" b="1">
-                <a:solidFill>
-                  <a:srgbClr val="1F3A68"/>
-                </a:solidFill>
-              </a:defRPr>
-            </a:pPr>
-            <a:r>
-              <a:t>How this review ran — methodology + cost</a:t>
+              <a:defRPr sz="1000" b="1">
+                <a:solidFill>
+                  <a:srgbClr val="00B4C8"/>
+                </a:solidFill>
+                <a:latin typeface="Calibri"/>
+              </a:defRPr>
+            </a:pPr>
+            <a:r>
+              <a:t>SECTION 03 · METHOD &amp; COST</a:t>
             </a:r>
           </a:p>
         </p:txBody>
@@ -5867,8 +6585,8 @@
         </p:nvSpPr>
         <p:spPr>
           <a:xfrm>
-            <a:off x="457200" y="1188720"/>
-            <a:ext cx="11247120" cy="5212080"/>
+            <a:off x="457200" y="502920"/>
+            <a:ext cx="11247120" cy="640080"/>
           </a:xfrm>
           <a:prstGeom prst="rect">
             <a:avLst/>
@@ -5876,16 +6594,53 @@
           <a:noFill/>
         </p:spPr>
         <p:txBody>
+          <a:bodyPr wrap="none">
+            <a:spAutoFit/>
+          </a:bodyPr>
+          <a:lstStyle/>
+          <a:p>
+            <a:pPr>
+              <a:defRPr sz="2800">
+                <a:solidFill>
+                  <a:srgbClr val="161616"/>
+                </a:solidFill>
+                <a:latin typeface="Calibri Light"/>
+              </a:defRPr>
+            </a:pPr>
+            <a:r>
+              <a:t>How this review ran</a:t>
+            </a:r>
+          </a:p>
+        </p:txBody>
+      </p:sp>
+      <p:sp>
+        <p:nvSpPr>
+          <p:cNvPr id="4" name="TextBox 3"/>
+          <p:cNvSpPr txBox="1"/>
+          <p:nvPr/>
+        </p:nvSpPr>
+        <p:spPr>
+          <a:xfrm>
+            <a:off x="457200" y="1188720"/>
+            <a:ext cx="11247120" cy="5212080"/>
+          </a:xfrm>
+          <a:prstGeom prst="rect">
+            <a:avLst/>
+          </a:prstGeom>
+          <a:noFill/>
+        </p:spPr>
+        <p:txBody>
           <a:bodyPr wrap="square">
             <a:spAutoFit/>
           </a:bodyPr>
           <a:lstStyle/>
           <a:p>
             <a:pPr>
-              <a:defRPr sz="1400" b="0">
+              <a:defRPr sz="1300" b="0">
                 <a:solidFill>
                   <a:srgbClr val="333333"/>
                 </a:solidFill>
+                <a:latin typeface="Calibri"/>
               </a:defRPr>
             </a:pPr>
             <a:r>
@@ -5894,146 +6649,182 @@
           </a:p>
           <a:p>
             <a:pPr>
-              <a:defRPr sz="1400" b="0">
+              <a:defRPr sz="1300" b="0">
                 <a:solidFill>
                   <a:srgbClr val="333333"/>
                 </a:solidFill>
-              </a:defRPr>
-            </a:pPr>
-          </a:p>
-          <a:p>
-            <a:pPr>
-              <a:defRPr sz="1400" b="0">
+                <a:latin typeface="Calibri"/>
+              </a:defRPr>
+            </a:pPr>
+          </a:p>
+          <a:p>
+            <a:pPr>
+              <a:defRPr sz="1300" b="0">
                 <a:solidFill>
                   <a:srgbClr val="333333"/>
                 </a:solidFill>
-              </a:defRPr>
-            </a:pPr>
-            <a:r>
-              <a:t>Pipeline (one target, four parallel checks, one aggregation):</a:t>
-            </a:r>
-          </a:p>
-          <a:p>
-            <a:pPr>
-              <a:defRPr sz="1400" b="0">
+                <a:latin typeface="Calibri"/>
+              </a:defRPr>
+            </a:pPr>
+            <a:r>
+              <a:t>Pipeline:</a:t>
+            </a:r>
+          </a:p>
+          <a:p>
+            <a:pPr>
+              <a:defRPr sz="1300" b="0">
                 <a:solidFill>
                   <a:srgbClr val="333333"/>
                 </a:solidFill>
-              </a:defRPr>
-            </a:pPr>
-            <a:r>
-              <a:t>    Stage 1 — formalize target (object, scope, severity scale)</a:t>
-            </a:r>
-          </a:p>
-          <a:p>
-            <a:pPr>
-              <a:defRPr sz="1400" b="0">
+                <a:latin typeface="Calibri"/>
+              </a:defRPr>
+            </a:pPr>
+            <a:r>
+              <a:t>    Stage 1 — Formalize target (object, scope, severity scale)</a:t>
+            </a:r>
+          </a:p>
+          <a:p>
+            <a:pPr>
+              <a:defRPr sz="1300" b="0">
                 <a:solidFill>
                   <a:srgbClr val="333333"/>
                 </a:solidFill>
-              </a:defRPr>
-            </a:pPr>
-            <a:r>
-              <a:t>    Stages 2-5 — independent checks: Security / Performance / CleanCore / Maintainability  (parallel, ~30-45s each)</a:t>
-            </a:r>
-          </a:p>
-          <a:p>
-            <a:pPr>
-              <a:defRPr sz="1400" b="0">
+                <a:latin typeface="Calibri"/>
+              </a:defRPr>
+            </a:pPr>
+            <a:r>
+              <a:t>    Stages 2-5 — Independent checks: Security / Performance / CleanCore / Maintainability  (parallel, ~30-45s each)</a:t>
+            </a:r>
+          </a:p>
+          <a:p>
+            <a:pPr>
+              <a:defRPr sz="1300" b="0">
                 <a:solidFill>
                   <a:srgbClr val="333333"/>
                 </a:solidFill>
-              </a:defRPr>
-            </a:pPr>
-            <a:r>
-              <a:t>    Stage 6 — aggregate findings with severity ranking and verdict</a:t>
-            </a:r>
-          </a:p>
-          <a:p>
-            <a:pPr>
-              <a:defRPr sz="1400" b="0">
+                <a:latin typeface="Calibri"/>
+              </a:defRPr>
+            </a:pPr>
+            <a:r>
+              <a:t>    Stage 6 — Aggregate findings with severity ranking and verdict</a:t>
+            </a:r>
+          </a:p>
+          <a:p>
+            <a:pPr>
+              <a:defRPr sz="1300" b="0">
                 <a:solidFill>
                   <a:srgbClr val="333333"/>
                 </a:solidFill>
-              </a:defRPr>
-            </a:pPr>
-          </a:p>
-          <a:p>
-            <a:pPr>
-              <a:defRPr sz="1400" b="0">
+                <a:latin typeface="Calibri"/>
+              </a:defRPr>
+            </a:pPr>
+          </a:p>
+          <a:p>
+            <a:pPr>
+              <a:defRPr sz="1300" b="0">
                 <a:solidFill>
                   <a:srgbClr val="333333"/>
                 </a:solidFill>
-              </a:defRPr>
-            </a:pPr>
-            <a:r>
-              <a:t>Why parallel safe: each check uses light read-only tools (ReadProgram, GetIncludesList, GetInclude).</a:t>
-            </a:r>
-          </a:p>
-          <a:p>
-            <a:pPr>
-              <a:defRPr sz="1400" b="0">
+                <a:latin typeface="Calibri"/>
+              </a:defRPr>
+            </a:pPr>
+            <a:r>
+              <a:t>Why parallel safe: each check uses light read-only tools (ReadProgram, GetIncludesList, GetInclude). No SearchSource here.</a:t>
+            </a:r>
+          </a:p>
+          <a:p>
+            <a:pPr>
+              <a:defRPr sz="1300" b="0">
                 <a:solidFill>
                   <a:srgbClr val="333333"/>
                 </a:solidFill>
-              </a:defRPr>
-            </a:pPr>
-            <a:r>
-              <a:t>No SearchSource here — that's a codebase-analysis tool, not a per-object review tool.</a:t>
-            </a:r>
-          </a:p>
-          <a:p>
-            <a:pPr>
-              <a:defRPr sz="1400" b="0">
+                <a:latin typeface="Calibri"/>
+              </a:defRPr>
+            </a:pPr>
+          </a:p>
+          <a:p>
+            <a:pPr>
+              <a:defRPr sz="1300" b="0">
                 <a:solidFill>
                   <a:srgbClr val="333333"/>
                 </a:solidFill>
-              </a:defRPr>
-            </a:pPr>
-          </a:p>
-          <a:p>
-            <a:pPr>
-              <a:defRPr sz="1400" b="0">
+                <a:latin typeface="Calibri"/>
+              </a:defRPr>
+            </a:pPr>
+            <a:r>
+              <a:t>Wall-clock end-to-end: ~5 minutes.</a:t>
+            </a:r>
+          </a:p>
+          <a:p>
+            <a:pPr>
+              <a:defRPr sz="1300" b="0">
                 <a:solidFill>
                   <a:srgbClr val="333333"/>
                 </a:solidFill>
-              </a:defRPr>
-            </a:pPr>
-            <a:r>
-              <a:t>Wall-clock end-to-end: ~5 minutes.</a:t>
-            </a:r>
-          </a:p>
-          <a:p>
-            <a:pPr>
-              <a:defRPr sz="1400" b="0">
+                <a:latin typeface="Calibri"/>
+              </a:defRPr>
+            </a:pPr>
+            <a:r>
+              <a:t>Cloud-side LLM tokens: ~381k across the four checks combined (gpt-5.2).</a:t>
+            </a:r>
+          </a:p>
+          <a:p>
+            <a:pPr>
+              <a:defRPr sz="1300" b="0">
                 <a:solidFill>
                   <a:srgbClr val="333333"/>
                 </a:solidFill>
-              </a:defRPr>
-            </a:pPr>
-            <a:r>
-              <a:t>Cloud-side LLM tokens: ~381k across the four checks combined (gpt-5.2).</a:t>
-            </a:r>
-          </a:p>
-          <a:p>
-            <a:pPr>
-              <a:defRPr sz="1400" b="0">
+                <a:latin typeface="Calibri"/>
+              </a:defRPr>
+            </a:pPr>
+          </a:p>
+          <a:p>
+            <a:pPr>
+              <a:defRPr sz="1300" b="0">
                 <a:solidFill>
                   <a:srgbClr val="333333"/>
                 </a:solidFill>
-              </a:defRPr>
-            </a:pPr>
-          </a:p>
-          <a:p>
-            <a:pPr>
-              <a:defRPr sz="1400" b="0">
-                <a:solidFill>
-                  <a:srgbClr val="333333"/>
-                </a:solidFill>
+                <a:latin typeface="Calibri"/>
               </a:defRPr>
             </a:pPr>
             <a:r>
               <a:t>Comparable manual review estimate: 1-2 hours per category × 4 = 4-8 hours by a senior ABAP reviewer.</a:t>
+            </a:r>
+          </a:p>
+        </p:txBody>
+      </p:sp>
+      <p:sp>
+        <p:nvSpPr>
+          <p:cNvPr id="5" name="TextBox 4"/>
+          <p:cNvSpPr txBox="1"/>
+          <p:nvPr/>
+        </p:nvSpPr>
+        <p:spPr>
+          <a:xfrm>
+            <a:off x="457200" y="6537960"/>
+            <a:ext cx="11247120" cy="228600"/>
+          </a:xfrm>
+          <a:prstGeom prst="rect">
+            <a:avLst/>
+          </a:prstGeom>
+          <a:noFill/>
+        </p:spPr>
+        <p:txBody>
+          <a:bodyPr wrap="none">
+            <a:spAutoFit/>
+          </a:bodyPr>
+          <a:lstStyle/>
+          <a:p>
+            <a:pPr>
+              <a:defRPr sz="800" i="1">
+                <a:solidFill>
+                  <a:srgbClr val="555555"/>
+                </a:solidFill>
+                <a:latin typeface="Calibri"/>
+              </a:defRPr>
+            </a:pPr>
+            <a:r>
+              <a:t>EPAM Proprietary &amp; Confidential</a:t>
             </a:r>
           </a:p>
         </p:txBody>

--- a/docs/tutorials/code-review/examples/ZDMS_UPLOAD_FILES/report.pptx
+++ b/docs/tutorials/code-review/examples/ZDMS_UPLOAD_FILES/report.pptx
@@ -3350,92 +3350,20 @@
       <p:grpSpPr/>
       <p:sp>
         <p:nvSpPr>
-          <p:cNvPr id="2" name="TextBox 1"/>
-          <p:cNvSpPr txBox="1"/>
-          <p:nvPr/>
-        </p:nvSpPr>
-        <p:spPr>
-          <a:xfrm>
-            <a:off x="457200" y="274320"/>
-            <a:ext cx="11247120" cy="274320"/>
-          </a:xfrm>
-          <a:prstGeom prst="rect">
-            <a:avLst/>
-          </a:prstGeom>
-          <a:noFill/>
-        </p:spPr>
-        <p:txBody>
-          <a:bodyPr wrap="none">
-            <a:spAutoFit/>
-          </a:bodyPr>
-          <a:lstStyle/>
-          <a:p>
-            <a:pPr>
-              <a:defRPr sz="1000" b="1">
-                <a:solidFill>
-                  <a:srgbClr val="00B4C8"/>
-                </a:solidFill>
-                <a:latin typeface="Calibri"/>
-              </a:defRPr>
-            </a:pPr>
-            <a:r>
-              <a:t>SECTION 01 · FINDINGS</a:t>
-            </a:r>
-          </a:p>
-        </p:txBody>
-      </p:sp>
-      <p:sp>
-        <p:nvSpPr>
-          <p:cNvPr id="3" name="TextBox 2"/>
-          <p:cNvSpPr txBox="1"/>
-          <p:nvPr/>
-        </p:nvSpPr>
-        <p:spPr>
-          <a:xfrm>
-            <a:off x="457200" y="502920"/>
-            <a:ext cx="11247120" cy="640080"/>
-          </a:xfrm>
-          <a:prstGeom prst="rect">
-            <a:avLst/>
-          </a:prstGeom>
-          <a:noFill/>
-        </p:spPr>
-        <p:txBody>
-          <a:bodyPr wrap="none">
-            <a:spAutoFit/>
-          </a:bodyPr>
-          <a:lstStyle/>
-          <a:p>
-            <a:pPr>
-              <a:defRPr sz="2800">
-                <a:solidFill>
-                  <a:srgbClr val="161616"/>
-                </a:solidFill>
-                <a:latin typeface="Calibri Light"/>
-              </a:defRPr>
-            </a:pPr>
-            <a:r>
-              <a:t>Verdict at a glance</a:t>
-            </a:r>
-          </a:p>
-        </p:txBody>
-      </p:sp>
-      <p:sp>
-        <p:nvSpPr>
-          <p:cNvPr id="4" name="Rectangle 3"/>
+          <p:cNvPr id="2" name="Rectangle 1"/>
           <p:cNvSpPr/>
           <p:nvPr/>
         </p:nvSpPr>
         <p:spPr>
           <a:xfrm>
-            <a:off x="548640" y="1554480"/>
-            <a:ext cx="3657600" cy="2194560"/>
+            <a:off x="0" y="0"/>
+            <a:ext cx="3017520" cy="6858000"/>
           </a:xfrm>
           <a:prstGeom prst="rect">
             <a:avLst/>
           </a:prstGeom>
           <a:solidFill>
-            <a:srgbClr val="161616"/>
+            <a:srgbClr val="EEEEEE"/>
           </a:solidFill>
           <a:ln>
             <a:noFill/>
@@ -3456,32 +3384,99 @@
           </a:fontRef>
         </p:style>
         <p:txBody>
-          <a:bodyPr rtlCol="0" anchor="ctr" wrap="square"/>
-          <a:lstStyle/>
-          <a:p>
-            <a:pPr algn="ctr">
-              <a:defRPr sz="6000">
-                <a:solidFill>
-                  <a:srgbClr val="FFFFFF"/>
+          <a:bodyPr rtlCol="0" anchor="ctr"/>
+          <a:lstStyle/>
+          <a:p>
+            <a:pPr algn="ctr"/>
+          </a:p>
+        </p:txBody>
+      </p:sp>
+      <p:sp>
+        <p:nvSpPr>
+          <p:cNvPr id="3" name="TextBox 2"/>
+          <p:cNvSpPr txBox="1"/>
+          <p:nvPr/>
+        </p:nvSpPr>
+        <p:spPr>
+          <a:xfrm>
+            <a:off x="274320" y="457200"/>
+            <a:ext cx="2651760" cy="365760"/>
+          </a:xfrm>
+          <a:prstGeom prst="rect">
+            <a:avLst/>
+          </a:prstGeom>
+          <a:noFill/>
+        </p:spPr>
+        <p:txBody>
+          <a:bodyPr wrap="none">
+            <a:spAutoFit/>
+          </a:bodyPr>
+          <a:lstStyle/>
+          <a:p>
+            <a:pPr>
+              <a:defRPr sz="1000" b="1">
+                <a:solidFill>
+                  <a:srgbClr val="00B4C8"/>
+                </a:solidFill>
+                <a:latin typeface="Calibri"/>
+              </a:defRPr>
+            </a:pPr>
+            <a:r>
+              <a:t>SECTION 01 · FINDINGS</a:t>
+            </a:r>
+          </a:p>
+        </p:txBody>
+      </p:sp>
+      <p:sp>
+        <p:nvSpPr>
+          <p:cNvPr id="4" name="TextBox 3"/>
+          <p:cNvSpPr txBox="1"/>
+          <p:nvPr/>
+        </p:nvSpPr>
+        <p:spPr>
+          <a:xfrm>
+            <a:off x="274320" y="914400"/>
+            <a:ext cx="2651760" cy="2011680"/>
+          </a:xfrm>
+          <a:prstGeom prst="rect">
+            <a:avLst/>
+          </a:prstGeom>
+          <a:noFill/>
+        </p:spPr>
+        <p:txBody>
+          <a:bodyPr wrap="square">
+            <a:spAutoFit/>
+          </a:bodyPr>
+          <a:lstStyle/>
+          <a:p>
+            <a:pPr>
+              <a:defRPr sz="2200">
+                <a:solidFill>
+                  <a:srgbClr val="161616"/>
                 </a:solidFill>
                 <a:latin typeface="Calibri Light"/>
               </a:defRPr>
             </a:pPr>
             <a:r>
-              <a:t>30</a:t>
-            </a:r>
-          </a:p>
-          <a:p>
-            <a:pPr algn="ctr">
-              <a:defRPr sz="1300">
-                <a:solidFill>
-                  <a:srgbClr val="FFFFFF"/>
-                </a:solidFill>
-                <a:latin typeface="Calibri"/>
-              </a:defRPr>
-            </a:pPr>
-            <a:r>
-              <a:t>total findings</a:t>
+              <a:t>Verdict at a glance</a:t>
+            </a:r>
+          </a:p>
+          <a:p>
+            <a:pPr>
+              <a:defRPr sz="400"/>
+            </a:pPr>
+          </a:p>
+          <a:p>
+            <a:pPr>
+              <a:defRPr sz="1200" i="1">
+                <a:solidFill>
+                  <a:srgbClr val="555555"/>
+                </a:solidFill>
+                <a:latin typeface="Calibri"/>
+              </a:defRPr>
+            </a:pPr>
+            <a:r>
+              <a:t>Headline counts and severity profile</a:t>
             </a:r>
           </a:p>
         </p:txBody>
@@ -3494,14 +3489,14 @@
         </p:nvSpPr>
         <p:spPr>
           <a:xfrm>
-            <a:off x="4343400" y="1554480"/>
-            <a:ext cx="3657600" cy="2194560"/>
+            <a:off x="3200400" y="640080"/>
+            <a:ext cx="2743200" cy="1737360"/>
           </a:xfrm>
           <a:prstGeom prst="rect">
             <a:avLst/>
           </a:prstGeom>
           <a:solidFill>
-            <a:srgbClr val="E67E22"/>
+            <a:srgbClr val="161616"/>
           </a:solidFill>
           <a:ln>
             <a:noFill/>
@@ -3526,7 +3521,7 @@
           <a:lstStyle/>
           <a:p>
             <a:pPr algn="ctr">
-              <a:defRPr sz="6000">
+              <a:defRPr sz="4400">
                 <a:solidFill>
                   <a:srgbClr val="FFFFFF"/>
                 </a:solidFill>
@@ -3534,12 +3529,12 @@
               </a:defRPr>
             </a:pPr>
             <a:r>
-              <a:t>10</a:t>
+              <a:t>30</a:t>
             </a:r>
           </a:p>
           <a:p>
             <a:pPr algn="ctr">
-              <a:defRPr sz="1300">
+              <a:defRPr sz="1100">
                 <a:solidFill>
                   <a:srgbClr val="FFFFFF"/>
                 </a:solidFill>
@@ -3547,7 +3542,7 @@
               </a:defRPr>
             </a:pPr>
             <a:r>
-              <a:t>HIGH severity</a:t>
+              <a:t>total findings</a:t>
             </a:r>
           </a:p>
         </p:txBody>
@@ -3560,14 +3555,14 @@
         </p:nvSpPr>
         <p:spPr>
           <a:xfrm>
-            <a:off x="8138160" y="1554480"/>
-            <a:ext cx="3657600" cy="2194560"/>
+            <a:off x="6080760" y="640080"/>
+            <a:ext cx="2743200" cy="1737360"/>
           </a:xfrm>
           <a:prstGeom prst="rect">
             <a:avLst/>
           </a:prstGeom>
           <a:solidFill>
-            <a:srgbClr val="C83636"/>
+            <a:srgbClr val="E67E22"/>
           </a:solidFill>
           <a:ln>
             <a:noFill/>
@@ -3592,7 +3587,7 @@
           <a:lstStyle/>
           <a:p>
             <a:pPr algn="ctr">
-              <a:defRPr sz="6000">
+              <a:defRPr sz="4400">
                 <a:solidFill>
                   <a:srgbClr val="FFFFFF"/>
                 </a:solidFill>
@@ -3600,12 +3595,78 @@
               </a:defRPr>
             </a:pPr>
             <a:r>
+              <a:t>10</a:t>
+            </a:r>
+          </a:p>
+          <a:p>
+            <a:pPr algn="ctr">
+              <a:defRPr sz="1100">
+                <a:solidFill>
+                  <a:srgbClr val="FFFFFF"/>
+                </a:solidFill>
+                <a:latin typeface="Calibri"/>
+              </a:defRPr>
+            </a:pPr>
+            <a:r>
+              <a:t>HIGH severity</a:t>
+            </a:r>
+          </a:p>
+        </p:txBody>
+      </p:sp>
+      <p:sp>
+        <p:nvSpPr>
+          <p:cNvPr id="7" name="Rectangle 6"/>
+          <p:cNvSpPr/>
+          <p:nvPr/>
+        </p:nvSpPr>
+        <p:spPr>
+          <a:xfrm>
+            <a:off x="8961120" y="640080"/>
+            <a:ext cx="2743200" cy="1737360"/>
+          </a:xfrm>
+          <a:prstGeom prst="rect">
+            <a:avLst/>
+          </a:prstGeom>
+          <a:solidFill>
+            <a:srgbClr val="C83636"/>
+          </a:solidFill>
+          <a:ln>
+            <a:noFill/>
+          </a:ln>
+        </p:spPr>
+        <p:style>
+          <a:lnRef idx="1">
+            <a:schemeClr val="accent1"/>
+          </a:lnRef>
+          <a:fillRef idx="3">
+            <a:schemeClr val="accent1"/>
+          </a:fillRef>
+          <a:effectRef idx="2">
+            <a:schemeClr val="accent1"/>
+          </a:effectRef>
+          <a:fontRef idx="minor">
+            <a:schemeClr val="lt1"/>
+          </a:fontRef>
+        </p:style>
+        <p:txBody>
+          <a:bodyPr rtlCol="0" anchor="ctr" wrap="square"/>
+          <a:lstStyle/>
+          <a:p>
+            <a:pPr algn="ctr">
+              <a:defRPr sz="4400">
+                <a:solidFill>
+                  <a:srgbClr val="FFFFFF"/>
+                </a:solidFill>
+                <a:latin typeface="Calibri Light"/>
+              </a:defRPr>
+            </a:pPr>
+            <a:r>
               <a:t>6</a:t>
             </a:r>
           </a:p>
           <a:p>
             <a:pPr algn="ctr">
-              <a:defRPr sz="1300">
+              <a:defRPr sz="1100">
                 <a:solidFill>
                   <a:srgbClr val="FFFFFF"/>
                 </a:solidFill>
@@ -3620,14 +3681,14 @@
       </p:sp>
       <p:sp>
         <p:nvSpPr>
-          <p:cNvPr id="7" name="TextBox 6"/>
+          <p:cNvPr id="8" name="TextBox 7"/>
           <p:cNvSpPr txBox="1"/>
           <p:nvPr/>
         </p:nvSpPr>
         <p:spPr>
           <a:xfrm>
-            <a:off x="548640" y="4023360"/>
-            <a:ext cx="10972800" cy="2286000"/>
+            <a:off x="3200400" y="2651760"/>
+            <a:ext cx="8869680" cy="3657600"/>
           </a:xfrm>
           <a:prstGeom prst="rect">
             <a:avLst/>
@@ -3641,7 +3702,7 @@
           <a:lstStyle/>
           <a:p>
             <a:pPr>
-              <a:defRPr sz="1300" b="0">
+              <a:defRPr sz="1200" b="0">
                 <a:solidFill>
                   <a:srgbClr val="333333"/>
                 </a:solidFill>
@@ -3654,7 +3715,7 @@
           </a:p>
           <a:p>
             <a:pPr>
-              <a:defRPr sz="1300" b="0">
+              <a:defRPr sz="1200" b="0">
                 <a:solidFill>
                   <a:srgbClr val="333333"/>
                 </a:solidFill>
@@ -3667,7 +3728,7 @@
           </a:p>
           <a:p>
             <a:pPr>
-              <a:defRPr sz="1300" b="0">
+              <a:defRPr sz="1200" b="0">
                 <a:solidFill>
                   <a:srgbClr val="333333"/>
                 </a:solidFill>
@@ -3680,7 +3741,7 @@
           </a:p>
           <a:p>
             <a:pPr>
-              <a:defRPr sz="1300" b="0">
+              <a:defRPr sz="1200" b="0">
                 <a:solidFill>
                   <a:srgbClr val="333333"/>
                 </a:solidFill>
@@ -3693,7 +3754,7 @@
           </a:p>
           <a:p>
             <a:pPr>
-              <a:defRPr sz="1300" b="0">
+              <a:defRPr sz="1200" b="0">
                 <a:solidFill>
                   <a:srgbClr val="333333"/>
                 </a:solidFill>
@@ -3701,21 +3762,21 @@
               </a:defRPr>
             </a:pPr>
             <a:r>
-              <a:t>• Every finding below is anchored to a verbatim ABAP snippet from the source.</a:t>
-            </a:r>
-          </a:p>
-        </p:txBody>
-      </p:sp>
-      <p:sp>
-        <p:nvSpPr>
-          <p:cNvPr id="8" name="TextBox 7"/>
+              <a:t>• Every finding below anchored to a verbatim ABAP snippet from source.</a:t>
+            </a:r>
+          </a:p>
+        </p:txBody>
+      </p:sp>
+      <p:sp>
+        <p:nvSpPr>
+          <p:cNvPr id="9" name="TextBox 8"/>
           <p:cNvSpPr txBox="1"/>
           <p:nvPr/>
         </p:nvSpPr>
         <p:spPr>
           <a:xfrm>
-            <a:off x="457200" y="6537960"/>
-            <a:ext cx="11247120" cy="228600"/>
+            <a:off x="3200400" y="6537960"/>
+            <a:ext cx="8869680" cy="228600"/>
           </a:xfrm>
           <a:prstGeom prst="rect">
             <a:avLst/>
@@ -3762,14 +3823,57 @@
       <p:grpSpPr/>
       <p:sp>
         <p:nvSpPr>
-          <p:cNvPr id="2" name="TextBox 1"/>
+          <p:cNvPr id="2" name="Rectangle 1"/>
+          <p:cNvSpPr/>
+          <p:nvPr/>
+        </p:nvSpPr>
+        <p:spPr>
+          <a:xfrm>
+            <a:off x="0" y="0"/>
+            <a:ext cx="3017520" cy="6858000"/>
+          </a:xfrm>
+          <a:prstGeom prst="rect">
+            <a:avLst/>
+          </a:prstGeom>
+          <a:solidFill>
+            <a:srgbClr val="EEEEEE"/>
+          </a:solidFill>
+          <a:ln>
+            <a:noFill/>
+          </a:ln>
+        </p:spPr>
+        <p:style>
+          <a:lnRef idx="1">
+            <a:schemeClr val="accent1"/>
+          </a:lnRef>
+          <a:fillRef idx="3">
+            <a:schemeClr val="accent1"/>
+          </a:fillRef>
+          <a:effectRef idx="2">
+            <a:schemeClr val="accent1"/>
+          </a:effectRef>
+          <a:fontRef idx="minor">
+            <a:schemeClr val="lt1"/>
+          </a:fontRef>
+        </p:style>
+        <p:txBody>
+          <a:bodyPr rtlCol="0" anchor="ctr"/>
+          <a:lstStyle/>
+          <a:p>
+            <a:pPr algn="ctr"/>
+          </a:p>
+        </p:txBody>
+      </p:sp>
+      <p:sp>
+        <p:nvSpPr>
+          <p:cNvPr id="3" name="TextBox 2"/>
           <p:cNvSpPr txBox="1"/>
           <p:nvPr/>
         </p:nvSpPr>
         <p:spPr>
           <a:xfrm>
-            <a:off x="457200" y="274320"/>
-            <a:ext cx="11247120" cy="274320"/>
+            <a:off x="274320" y="457200"/>
+            <a:ext cx="2651760" cy="365760"/>
           </a:xfrm>
           <a:prstGeom prst="rect">
             <a:avLst/>
@@ -3798,14 +3902,14 @@
       </p:sp>
       <p:sp>
         <p:nvSpPr>
-          <p:cNvPr id="3" name="TextBox 2"/>
+          <p:cNvPr id="4" name="TextBox 3"/>
           <p:cNvSpPr txBox="1"/>
           <p:nvPr/>
         </p:nvSpPr>
         <p:spPr>
           <a:xfrm>
-            <a:off x="457200" y="502920"/>
-            <a:ext cx="11247120" cy="640080"/>
+            <a:off x="274320" y="914400"/>
+            <a:ext cx="2651760" cy="2011680"/>
           </a:xfrm>
           <a:prstGeom prst="rect">
             <a:avLst/>
@@ -3813,13 +3917,13 @@
           <a:noFill/>
         </p:spPr>
         <p:txBody>
-          <a:bodyPr wrap="none">
+          <a:bodyPr wrap="square">
             <a:spAutoFit/>
           </a:bodyPr>
           <a:lstStyle/>
           <a:p>
             <a:pPr>
-              <a:defRPr sz="2800">
+              <a:defRPr sz="2200">
                 <a:solidFill>
                   <a:srgbClr val="161616"/>
                 </a:solidFill>
@@ -3827,22 +3931,40 @@
               </a:defRPr>
             </a:pPr>
             <a:r>
-              <a:t>Findings by category and severity</a:t>
+              <a:t>By category &amp; severity</a:t>
+            </a:r>
+          </a:p>
+          <a:p>
+            <a:pPr>
+              <a:defRPr sz="400"/>
+            </a:pPr>
+          </a:p>
+          <a:p>
+            <a:pPr>
+              <a:defRPr sz="1200" i="1">
+                <a:solidFill>
+                  <a:srgbClr val="555555"/>
+                </a:solidFill>
+                <a:latin typeface="Calibri"/>
+              </a:defRPr>
+            </a:pPr>
+            <a:r>
+              <a:t>where the findings concentrate</a:t>
             </a:r>
           </a:p>
         </p:txBody>
       </p:sp>
       <p:graphicFrame>
         <p:nvGraphicFramePr>
-          <p:cNvPr id="4" name="Table 3"/>
+          <p:cNvPr id="5" name="Table 4"/>
           <p:cNvGraphicFramePr>
             <a:graphicFrameLocks noGrp="1"/>
           </p:cNvGraphicFramePr>
           <p:nvPr/>
         </p:nvGraphicFramePr>
         <p:xfrm>
-          <a:off x="457200" y="1371600"/>
-          <a:ext cx="11247120" cy="3108960"/>
+          <a:off x="3200400" y="640080"/>
+          <a:ext cx="8869680" cy="3108960"/>
         </p:xfrm>
         <a:graphic>
           <a:graphicData uri="http://schemas.openxmlformats.org/drawingml/2006/table">
@@ -3851,12 +3973,12 @@
                 <a:tableStyleId>{5C22544A-7EE6-4342-B048-85BDC9FD1C3A}</a:tableStyleId>
               </a:tblPr>
               <a:tblGrid>
-                <a:gridCol w="3657600"/>
-                <a:gridCol w="1371600"/>
-                <a:gridCol w="1371600"/>
-                <a:gridCol w="1371600"/>
-                <a:gridCol w="1371600"/>
-                <a:gridCol w="2103120"/>
+                <a:gridCol w="3200400"/>
+                <a:gridCol w="1097280"/>
+                <a:gridCol w="1097280"/>
+                <a:gridCol w="1097280"/>
+                <a:gridCol w="1097280"/>
+                <a:gridCol w="1280160"/>
               </a:tblGrid>
               <a:tr h="518160">
                 <a:tc>
@@ -4740,14 +4862,14 @@
       </p:graphicFrame>
       <p:sp>
         <p:nvSpPr>
-          <p:cNvPr id="5" name="TextBox 4"/>
+          <p:cNvPr id="6" name="TextBox 5"/>
           <p:cNvSpPr txBox="1"/>
           <p:nvPr/>
         </p:nvSpPr>
         <p:spPr>
           <a:xfrm>
-            <a:off x="457200" y="4754880"/>
-            <a:ext cx="11247120" cy="1554480"/>
+            <a:off x="3200400" y="4023360"/>
+            <a:ext cx="8869680" cy="2286000"/>
           </a:xfrm>
           <a:prstGeom prst="rect">
             <a:avLst/>
@@ -4761,7 +4883,7 @@
           <a:lstStyle/>
           <a:p>
             <a:pPr>
-              <a:defRPr sz="1300" b="0">
+              <a:defRPr sz="1200" b="0">
                 <a:solidFill>
                   <a:srgbClr val="333333"/>
                 </a:solidFill>
@@ -4774,7 +4896,7 @@
           </a:p>
           <a:p>
             <a:pPr>
-              <a:defRPr sz="1300" b="0">
+              <a:defRPr sz="1200" b="0">
                 <a:solidFill>
                   <a:srgbClr val="333333"/>
                 </a:solidFill>
@@ -4787,7 +4909,7 @@
           </a:p>
           <a:p>
             <a:pPr>
-              <a:defRPr sz="1300" b="0">
+              <a:defRPr sz="1200" b="0">
                 <a:solidFill>
                   <a:srgbClr val="333333"/>
                 </a:solidFill>
@@ -4802,14 +4924,14 @@
       </p:sp>
       <p:sp>
         <p:nvSpPr>
-          <p:cNvPr id="6" name="TextBox 5"/>
+          <p:cNvPr id="7" name="TextBox 6"/>
           <p:cNvSpPr txBox="1"/>
           <p:nvPr/>
         </p:nvSpPr>
         <p:spPr>
           <a:xfrm>
-            <a:off x="457200" y="6537960"/>
-            <a:ext cx="11247120" cy="228600"/>
+            <a:off x="3200400" y="6537960"/>
+            <a:ext cx="8869680" cy="228600"/>
           </a:xfrm>
           <a:prstGeom prst="rect">
             <a:avLst/>
@@ -4856,14 +4978,57 @@
       <p:grpSpPr/>
       <p:sp>
         <p:nvSpPr>
-          <p:cNvPr id="2" name="TextBox 1"/>
+          <p:cNvPr id="2" name="Rectangle 1"/>
+          <p:cNvSpPr/>
+          <p:nvPr/>
+        </p:nvSpPr>
+        <p:spPr>
+          <a:xfrm>
+            <a:off x="0" y="0"/>
+            <a:ext cx="3017520" cy="6858000"/>
+          </a:xfrm>
+          <a:prstGeom prst="rect">
+            <a:avLst/>
+          </a:prstGeom>
+          <a:solidFill>
+            <a:srgbClr val="EEEEEE"/>
+          </a:solidFill>
+          <a:ln>
+            <a:noFill/>
+          </a:ln>
+        </p:spPr>
+        <p:style>
+          <a:lnRef idx="1">
+            <a:schemeClr val="accent1"/>
+          </a:lnRef>
+          <a:fillRef idx="3">
+            <a:schemeClr val="accent1"/>
+          </a:fillRef>
+          <a:effectRef idx="2">
+            <a:schemeClr val="accent1"/>
+          </a:effectRef>
+          <a:fontRef idx="minor">
+            <a:schemeClr val="lt1"/>
+          </a:fontRef>
+        </p:style>
+        <p:txBody>
+          <a:bodyPr rtlCol="0" anchor="ctr"/>
+          <a:lstStyle/>
+          <a:p>
+            <a:pPr algn="ctr"/>
+          </a:p>
+        </p:txBody>
+      </p:sp>
+      <p:sp>
+        <p:nvSpPr>
+          <p:cNvPr id="3" name="TextBox 2"/>
           <p:cNvSpPr txBox="1"/>
           <p:nvPr/>
         </p:nvSpPr>
         <p:spPr>
           <a:xfrm>
-            <a:off x="457200" y="274320"/>
-            <a:ext cx="11247120" cy="274320"/>
+            <a:off x="274320" y="457200"/>
+            <a:ext cx="2651760" cy="365760"/>
           </a:xfrm>
           <a:prstGeom prst="rect">
             <a:avLst/>
@@ -4892,14 +5057,14 @@
       </p:sp>
       <p:sp>
         <p:nvSpPr>
-          <p:cNvPr id="3" name="TextBox 2"/>
+          <p:cNvPr id="4" name="TextBox 3"/>
           <p:cNvSpPr txBox="1"/>
           <p:nvPr/>
         </p:nvSpPr>
         <p:spPr>
           <a:xfrm>
-            <a:off x="457200" y="502920"/>
-            <a:ext cx="11247120" cy="640080"/>
+            <a:off x="274320" y="914400"/>
+            <a:ext cx="2651760" cy="2011680"/>
           </a:xfrm>
           <a:prstGeom prst="rect">
             <a:avLst/>
@@ -4907,13 +5072,13 @@
           <a:noFill/>
         </p:spPr>
         <p:txBody>
-          <a:bodyPr wrap="none">
+          <a:bodyPr wrap="square">
             <a:spAutoFit/>
           </a:bodyPr>
           <a:lstStyle/>
           <a:p>
             <a:pPr>
-              <a:defRPr sz="2800">
+              <a:defRPr sz="2200">
                 <a:solidFill>
                   <a:srgbClr val="161616"/>
                 </a:solidFill>
@@ -4921,21 +5086,39 @@
               </a:defRPr>
             </a:pPr>
             <a:r>
-              <a:t>Top CleanCore finding — SXPG OS shell access</a:t>
-            </a:r>
-          </a:p>
-        </p:txBody>
-      </p:sp>
-      <p:sp>
-        <p:nvSpPr>
-          <p:cNvPr id="4" name="TextBox 3"/>
+              <a:t>SXPG OS shell access</a:t>
+            </a:r>
+          </a:p>
+          <a:p>
+            <a:pPr>
+              <a:defRPr sz="400"/>
+            </a:pPr>
+          </a:p>
+          <a:p>
+            <a:pPr>
+              <a:defRPr sz="1200" i="1">
+                <a:solidFill>
+                  <a:srgbClr val="555555"/>
+                </a:solidFill>
+                <a:latin typeface="Calibri"/>
+              </a:defRPr>
+            </a:pPr>
+            <a:r>
+              <a:t>Top CleanCore finding</a:t>
+            </a:r>
+          </a:p>
+        </p:txBody>
+      </p:sp>
+      <p:sp>
+        <p:nvSpPr>
+          <p:cNvPr id="5" name="TextBox 4"/>
           <p:cNvSpPr txBox="1"/>
           <p:nvPr/>
         </p:nvSpPr>
         <p:spPr>
           <a:xfrm>
-            <a:off x="457200" y="1188720"/>
-            <a:ext cx="11247120" cy="365760"/>
+            <a:off x="3200400" y="457200"/>
+            <a:ext cx="8869680" cy="365760"/>
           </a:xfrm>
           <a:prstGeom prst="rect">
             <a:avLst/>
@@ -4964,14 +5147,14 @@
       </p:sp>
       <p:sp>
         <p:nvSpPr>
-          <p:cNvPr id="5" name="TextBox 4"/>
+          <p:cNvPr id="6" name="TextBox 5"/>
           <p:cNvSpPr txBox="1"/>
           <p:nvPr/>
         </p:nvSpPr>
         <p:spPr>
           <a:xfrm>
-            <a:off x="457200" y="1600200"/>
-            <a:ext cx="11247120" cy="274320"/>
+            <a:off x="3200400" y="868680"/>
+            <a:ext cx="8869680" cy="274320"/>
           </a:xfrm>
           <a:prstGeom prst="rect">
             <a:avLst/>
@@ -4985,7 +5168,7 @@
           <a:lstStyle/>
           <a:p>
             <a:pPr>
-              <a:defRPr sz="1100" b="0">
+              <a:defRPr sz="1000" b="0">
                 <a:solidFill>
                   <a:srgbClr val="555555"/>
                 </a:solidFill>
@@ -5000,14 +5183,14 @@
       </p:sp>
       <p:sp>
         <p:nvSpPr>
-          <p:cNvPr id="6" name="TextBox 5"/>
+          <p:cNvPr id="7" name="TextBox 6"/>
           <p:cNvSpPr txBox="1"/>
           <p:nvPr/>
         </p:nvSpPr>
         <p:spPr>
           <a:xfrm>
-            <a:off x="457200" y="1965960"/>
-            <a:ext cx="11247120" cy="1828800"/>
+            <a:off x="3200400" y="1280160"/>
+            <a:ext cx="8869680" cy="2286000"/>
           </a:xfrm>
           <a:prstGeom prst="rect">
             <a:avLst/>
@@ -5077,14 +5260,14 @@
       </p:sp>
       <p:sp>
         <p:nvSpPr>
-          <p:cNvPr id="7" name="TextBox 6"/>
+          <p:cNvPr id="8" name="TextBox 7"/>
           <p:cNvSpPr txBox="1"/>
           <p:nvPr/>
         </p:nvSpPr>
         <p:spPr>
           <a:xfrm>
-            <a:off x="457200" y="4206240"/>
-            <a:ext cx="11247120" cy="914400"/>
+            <a:off x="3200400" y="4023360"/>
+            <a:ext cx="8869680" cy="914400"/>
           </a:xfrm>
           <a:prstGeom prst="rect">
             <a:avLst/>
@@ -5098,7 +5281,7 @@
           <a:lstStyle/>
           <a:p>
             <a:pPr>
-              <a:defRPr sz="1200" b="0">
+              <a:defRPr sz="1100" b="0">
                 <a:solidFill>
                   <a:srgbClr val="333333"/>
                 </a:solidFill>
@@ -5113,14 +5296,14 @@
       </p:sp>
       <p:sp>
         <p:nvSpPr>
-          <p:cNvPr id="8" name="TextBox 7"/>
+          <p:cNvPr id="9" name="TextBox 8"/>
           <p:cNvSpPr txBox="1"/>
           <p:nvPr/>
         </p:nvSpPr>
         <p:spPr>
           <a:xfrm>
-            <a:off x="457200" y="5303520"/>
-            <a:ext cx="11247120" cy="1097280"/>
+            <a:off x="3200400" y="5303520"/>
+            <a:ext cx="8869680" cy="1097280"/>
           </a:xfrm>
           <a:prstGeom prst="rect">
             <a:avLst/>
@@ -5134,7 +5317,7 @@
           <a:lstStyle/>
           <a:p>
             <a:pPr>
-              <a:defRPr sz="1200" b="1">
+              <a:defRPr sz="1100" b="1">
                 <a:solidFill>
                   <a:srgbClr val="418DFF"/>
                 </a:solidFill>
@@ -5149,14 +5332,14 @@
       </p:sp>
       <p:sp>
         <p:nvSpPr>
-          <p:cNvPr id="9" name="TextBox 8"/>
+          <p:cNvPr id="10" name="TextBox 9"/>
           <p:cNvSpPr txBox="1"/>
           <p:nvPr/>
         </p:nvSpPr>
         <p:spPr>
           <a:xfrm>
-            <a:off x="457200" y="6537960"/>
-            <a:ext cx="11247120" cy="228600"/>
+            <a:off x="3200400" y="6537960"/>
+            <a:ext cx="8869680" cy="228600"/>
           </a:xfrm>
           <a:prstGeom prst="rect">
             <a:avLst/>
@@ -5203,14 +5386,57 @@
       <p:grpSpPr/>
       <p:sp>
         <p:nvSpPr>
-          <p:cNvPr id="2" name="TextBox 1"/>
+          <p:cNvPr id="2" name="Rectangle 1"/>
+          <p:cNvSpPr/>
+          <p:nvPr/>
+        </p:nvSpPr>
+        <p:spPr>
+          <a:xfrm>
+            <a:off x="0" y="0"/>
+            <a:ext cx="3017520" cy="6858000"/>
+          </a:xfrm>
+          <a:prstGeom prst="rect">
+            <a:avLst/>
+          </a:prstGeom>
+          <a:solidFill>
+            <a:srgbClr val="EEEEEE"/>
+          </a:solidFill>
+          <a:ln>
+            <a:noFill/>
+          </a:ln>
+        </p:spPr>
+        <p:style>
+          <a:lnRef idx="1">
+            <a:schemeClr val="accent1"/>
+          </a:lnRef>
+          <a:fillRef idx="3">
+            <a:schemeClr val="accent1"/>
+          </a:fillRef>
+          <a:effectRef idx="2">
+            <a:schemeClr val="accent1"/>
+          </a:effectRef>
+          <a:fontRef idx="minor">
+            <a:schemeClr val="lt1"/>
+          </a:fontRef>
+        </p:style>
+        <p:txBody>
+          <a:bodyPr rtlCol="0" anchor="ctr"/>
+          <a:lstStyle/>
+          <a:p>
+            <a:pPr algn="ctr"/>
+          </a:p>
+        </p:txBody>
+      </p:sp>
+      <p:sp>
+        <p:nvSpPr>
+          <p:cNvPr id="3" name="TextBox 2"/>
           <p:cNvSpPr txBox="1"/>
           <p:nvPr/>
         </p:nvSpPr>
         <p:spPr>
           <a:xfrm>
-            <a:off x="457200" y="274320"/>
-            <a:ext cx="11247120" cy="274320"/>
+            <a:off x="274320" y="457200"/>
+            <a:ext cx="2651760" cy="365760"/>
           </a:xfrm>
           <a:prstGeom prst="rect">
             <a:avLst/>
@@ -5239,14 +5465,14 @@
       </p:sp>
       <p:sp>
         <p:nvSpPr>
-          <p:cNvPr id="3" name="TextBox 2"/>
+          <p:cNvPr id="4" name="TextBox 3"/>
           <p:cNvSpPr txBox="1"/>
           <p:nvPr/>
         </p:nvSpPr>
         <p:spPr>
           <a:xfrm>
-            <a:off x="457200" y="502920"/>
-            <a:ext cx="11247120" cy="640080"/>
+            <a:off x="274320" y="914400"/>
+            <a:ext cx="2651760" cy="2011680"/>
           </a:xfrm>
           <a:prstGeom prst="rect">
             <a:avLst/>
@@ -5254,13 +5480,13 @@
           <a:noFill/>
         </p:spPr>
         <p:txBody>
-          <a:bodyPr wrap="none">
+          <a:bodyPr wrap="square">
             <a:spAutoFit/>
           </a:bodyPr>
           <a:lstStyle/>
           <a:p>
             <a:pPr>
-              <a:defRPr sz="2800">
+              <a:defRPr sz="2200">
                 <a:solidFill>
                   <a:srgbClr val="161616"/>
                 </a:solidFill>
@@ -5268,21 +5494,39 @@
               </a:defRPr>
             </a:pPr>
             <a:r>
-              <a:t>Top CleanCore finding — AL11 file I/O</a:t>
-            </a:r>
-          </a:p>
-        </p:txBody>
-      </p:sp>
-      <p:sp>
-        <p:nvSpPr>
-          <p:cNvPr id="4" name="TextBox 3"/>
+              <a:t>AL11 file I/O</a:t>
+            </a:r>
+          </a:p>
+          <a:p>
+            <a:pPr>
+              <a:defRPr sz="400"/>
+            </a:pPr>
+          </a:p>
+          <a:p>
+            <a:pPr>
+              <a:defRPr sz="1200" i="1">
+                <a:solidFill>
+                  <a:srgbClr val="555555"/>
+                </a:solidFill>
+                <a:latin typeface="Calibri"/>
+              </a:defRPr>
+            </a:pPr>
+            <a:r>
+              <a:t>Second CleanCore finding</a:t>
+            </a:r>
+          </a:p>
+        </p:txBody>
+      </p:sp>
+      <p:sp>
+        <p:nvSpPr>
+          <p:cNvPr id="5" name="TextBox 4"/>
           <p:cNvSpPr txBox="1"/>
           <p:nvPr/>
         </p:nvSpPr>
         <p:spPr>
           <a:xfrm>
-            <a:off x="457200" y="1188720"/>
-            <a:ext cx="11247120" cy="365760"/>
+            <a:off x="3200400" y="457200"/>
+            <a:ext cx="8869680" cy="365760"/>
           </a:xfrm>
           <a:prstGeom prst="rect">
             <a:avLst/>
@@ -5311,14 +5555,14 @@
       </p:sp>
       <p:sp>
         <p:nvSpPr>
-          <p:cNvPr id="5" name="TextBox 4"/>
+          <p:cNvPr id="6" name="TextBox 5"/>
           <p:cNvSpPr txBox="1"/>
           <p:nvPr/>
         </p:nvSpPr>
         <p:spPr>
           <a:xfrm>
-            <a:off x="457200" y="1600200"/>
-            <a:ext cx="11247120" cy="274320"/>
+            <a:off x="3200400" y="868680"/>
+            <a:ext cx="8869680" cy="274320"/>
           </a:xfrm>
           <a:prstGeom prst="rect">
             <a:avLst/>
@@ -5332,7 +5576,7 @@
           <a:lstStyle/>
           <a:p>
             <a:pPr>
-              <a:defRPr sz="1100" b="0">
+              <a:defRPr sz="1000" b="0">
                 <a:solidFill>
                   <a:srgbClr val="555555"/>
                 </a:solidFill>
@@ -5347,14 +5591,14 @@
       </p:sp>
       <p:sp>
         <p:nvSpPr>
-          <p:cNvPr id="6" name="TextBox 5"/>
+          <p:cNvPr id="7" name="TextBox 6"/>
           <p:cNvSpPr txBox="1"/>
           <p:nvPr/>
         </p:nvSpPr>
         <p:spPr>
           <a:xfrm>
-            <a:off x="457200" y="1965960"/>
-            <a:ext cx="11247120" cy="1828800"/>
+            <a:off x="3200400" y="1280160"/>
+            <a:ext cx="8869680" cy="2286000"/>
           </a:xfrm>
           <a:prstGeom prst="rect">
             <a:avLst/>
@@ -5424,14 +5668,14 @@
       </p:sp>
       <p:sp>
         <p:nvSpPr>
-          <p:cNvPr id="7" name="TextBox 6"/>
+          <p:cNvPr id="8" name="TextBox 7"/>
           <p:cNvSpPr txBox="1"/>
           <p:nvPr/>
         </p:nvSpPr>
         <p:spPr>
           <a:xfrm>
-            <a:off x="457200" y="4206240"/>
-            <a:ext cx="11247120" cy="914400"/>
+            <a:off x="3200400" y="4023360"/>
+            <a:ext cx="8869680" cy="914400"/>
           </a:xfrm>
           <a:prstGeom prst="rect">
             <a:avLst/>
@@ -5445,7 +5689,7 @@
           <a:lstStyle/>
           <a:p>
             <a:pPr>
-              <a:defRPr sz="1200" b="0">
+              <a:defRPr sz="1100" b="0">
                 <a:solidFill>
                   <a:srgbClr val="333333"/>
                 </a:solidFill>
@@ -5460,14 +5704,14 @@
       </p:sp>
       <p:sp>
         <p:nvSpPr>
-          <p:cNvPr id="8" name="TextBox 7"/>
+          <p:cNvPr id="9" name="TextBox 8"/>
           <p:cNvSpPr txBox="1"/>
           <p:nvPr/>
         </p:nvSpPr>
         <p:spPr>
           <a:xfrm>
-            <a:off x="457200" y="5303520"/>
-            <a:ext cx="11247120" cy="1097280"/>
+            <a:off x="3200400" y="5303520"/>
+            <a:ext cx="8869680" cy="1097280"/>
           </a:xfrm>
           <a:prstGeom prst="rect">
             <a:avLst/>
@@ -5481,7 +5725,7 @@
           <a:lstStyle/>
           <a:p>
             <a:pPr>
-              <a:defRPr sz="1200" b="1">
+              <a:defRPr sz="1100" b="1">
                 <a:solidFill>
                   <a:srgbClr val="418DFF"/>
                 </a:solidFill>
@@ -5496,14 +5740,14 @@
       </p:sp>
       <p:sp>
         <p:nvSpPr>
-          <p:cNvPr id="9" name="TextBox 8"/>
+          <p:cNvPr id="10" name="TextBox 9"/>
           <p:cNvSpPr txBox="1"/>
           <p:nvPr/>
         </p:nvSpPr>
         <p:spPr>
           <a:xfrm>
-            <a:off x="457200" y="6537960"/>
-            <a:ext cx="11247120" cy="228600"/>
+            <a:off x="3200400" y="6537960"/>
+            <a:ext cx="8869680" cy="228600"/>
           </a:xfrm>
           <a:prstGeom prst="rect">
             <a:avLst/>
@@ -5550,14 +5794,57 @@
       <p:grpSpPr/>
       <p:sp>
         <p:nvSpPr>
-          <p:cNvPr id="2" name="TextBox 1"/>
+          <p:cNvPr id="2" name="Rectangle 1"/>
+          <p:cNvSpPr/>
+          <p:nvPr/>
+        </p:nvSpPr>
+        <p:spPr>
+          <a:xfrm>
+            <a:off x="0" y="0"/>
+            <a:ext cx="3017520" cy="6858000"/>
+          </a:xfrm>
+          <a:prstGeom prst="rect">
+            <a:avLst/>
+          </a:prstGeom>
+          <a:solidFill>
+            <a:srgbClr val="EEEEEE"/>
+          </a:solidFill>
+          <a:ln>
+            <a:noFill/>
+          </a:ln>
+        </p:spPr>
+        <p:style>
+          <a:lnRef idx="1">
+            <a:schemeClr val="accent1"/>
+          </a:lnRef>
+          <a:fillRef idx="3">
+            <a:schemeClr val="accent1"/>
+          </a:fillRef>
+          <a:effectRef idx="2">
+            <a:schemeClr val="accent1"/>
+          </a:effectRef>
+          <a:fontRef idx="minor">
+            <a:schemeClr val="lt1"/>
+          </a:fontRef>
+        </p:style>
+        <p:txBody>
+          <a:bodyPr rtlCol="0" anchor="ctr"/>
+          <a:lstStyle/>
+          <a:p>
+            <a:pPr algn="ctr"/>
+          </a:p>
+        </p:txBody>
+      </p:sp>
+      <p:sp>
+        <p:nvSpPr>
+          <p:cNvPr id="3" name="TextBox 2"/>
           <p:cNvSpPr txBox="1"/>
           <p:nvPr/>
         </p:nvSpPr>
         <p:spPr>
           <a:xfrm>
-            <a:off x="457200" y="274320"/>
-            <a:ext cx="11247120" cy="274320"/>
+            <a:off x="274320" y="457200"/>
+            <a:ext cx="2651760" cy="365760"/>
           </a:xfrm>
           <a:prstGeom prst="rect">
             <a:avLst/>
@@ -5586,14 +5873,14 @@
       </p:sp>
       <p:sp>
         <p:nvSpPr>
-          <p:cNvPr id="3" name="TextBox 2"/>
+          <p:cNvPr id="4" name="TextBox 3"/>
           <p:cNvSpPr txBox="1"/>
           <p:nvPr/>
         </p:nvSpPr>
         <p:spPr>
           <a:xfrm>
-            <a:off x="457200" y="502920"/>
-            <a:ext cx="11247120" cy="640080"/>
+            <a:off x="274320" y="914400"/>
+            <a:ext cx="2651760" cy="2011680"/>
           </a:xfrm>
           <a:prstGeom prst="rect">
             <a:avLst/>
@@ -5601,13 +5888,13 @@
           <a:noFill/>
         </p:spPr>
         <p:txBody>
-          <a:bodyPr wrap="none">
+          <a:bodyPr wrap="square">
             <a:spAutoFit/>
           </a:bodyPr>
           <a:lstStyle/>
           <a:p>
             <a:pPr>
-              <a:defRPr sz="2800">
+              <a:defRPr sz="2200">
                 <a:solidFill>
                   <a:srgbClr val="161616"/>
                 </a:solidFill>
@@ -5615,21 +5902,39 @@
               </a:defRPr>
             </a:pPr>
             <a:r>
-              <a:t>Top security finding — missing AUTHORITY-CHECK</a:t>
-            </a:r>
-          </a:p>
-        </p:txBody>
-      </p:sp>
-      <p:sp>
-        <p:nvSpPr>
-          <p:cNvPr id="4" name="TextBox 3"/>
+              <a:t>Missing AUTHORITY-CHECK</a:t>
+            </a:r>
+          </a:p>
+          <a:p>
+            <a:pPr>
+              <a:defRPr sz="400"/>
+            </a:pPr>
+          </a:p>
+          <a:p>
+            <a:pPr>
+              <a:defRPr sz="1200" i="1">
+                <a:solidFill>
+                  <a:srgbClr val="555555"/>
+                </a:solidFill>
+                <a:latin typeface="Calibri"/>
+              </a:defRPr>
+            </a:pPr>
+            <a:r>
+              <a:t>Top security finding</a:t>
+            </a:r>
+          </a:p>
+        </p:txBody>
+      </p:sp>
+      <p:sp>
+        <p:nvSpPr>
+          <p:cNvPr id="5" name="TextBox 4"/>
           <p:cNvSpPr txBox="1"/>
           <p:nvPr/>
         </p:nvSpPr>
         <p:spPr>
           <a:xfrm>
-            <a:off x="457200" y="1188720"/>
-            <a:ext cx="11247120" cy="365760"/>
+            <a:off x="3200400" y="457200"/>
+            <a:ext cx="8869680" cy="365760"/>
           </a:xfrm>
           <a:prstGeom prst="rect">
             <a:avLst/>
@@ -5658,14 +5963,14 @@
       </p:sp>
       <p:sp>
         <p:nvSpPr>
-          <p:cNvPr id="5" name="TextBox 4"/>
+          <p:cNvPr id="6" name="TextBox 5"/>
           <p:cNvSpPr txBox="1"/>
           <p:nvPr/>
         </p:nvSpPr>
         <p:spPr>
           <a:xfrm>
-            <a:off x="457200" y="1600200"/>
-            <a:ext cx="11247120" cy="274320"/>
+            <a:off x="3200400" y="868680"/>
+            <a:ext cx="8869680" cy="274320"/>
           </a:xfrm>
           <a:prstGeom prst="rect">
             <a:avLst/>
@@ -5679,7 +5984,7 @@
           <a:lstStyle/>
           <a:p>
             <a:pPr>
-              <a:defRPr sz="1100" b="0">
+              <a:defRPr sz="1000" b="0">
                 <a:solidFill>
                   <a:srgbClr val="555555"/>
                 </a:solidFill>
@@ -5694,14 +5999,14 @@
       </p:sp>
       <p:sp>
         <p:nvSpPr>
-          <p:cNvPr id="6" name="TextBox 5"/>
+          <p:cNvPr id="7" name="TextBox 6"/>
           <p:cNvSpPr txBox="1"/>
           <p:nvPr/>
         </p:nvSpPr>
         <p:spPr>
           <a:xfrm>
-            <a:off x="457200" y="1965960"/>
-            <a:ext cx="11247120" cy="1828800"/>
+            <a:off x="3200400" y="1280160"/>
+            <a:ext cx="8869680" cy="2286000"/>
           </a:xfrm>
           <a:prstGeom prst="rect">
             <a:avLst/>
@@ -5771,14 +6076,14 @@
       </p:sp>
       <p:sp>
         <p:nvSpPr>
-          <p:cNvPr id="7" name="TextBox 6"/>
+          <p:cNvPr id="8" name="TextBox 7"/>
           <p:cNvSpPr txBox="1"/>
           <p:nvPr/>
         </p:nvSpPr>
         <p:spPr>
           <a:xfrm>
-            <a:off x="457200" y="4206240"/>
-            <a:ext cx="11247120" cy="914400"/>
+            <a:off x="3200400" y="4023360"/>
+            <a:ext cx="8869680" cy="914400"/>
           </a:xfrm>
           <a:prstGeom prst="rect">
             <a:avLst/>
@@ -5792,7 +6097,7 @@
           <a:lstStyle/>
           <a:p>
             <a:pPr>
-              <a:defRPr sz="1200" b="0">
+              <a:defRPr sz="1100" b="0">
                 <a:solidFill>
                   <a:srgbClr val="333333"/>
                 </a:solidFill>
@@ -5807,14 +6112,14 @@
       </p:sp>
       <p:sp>
         <p:nvSpPr>
-          <p:cNvPr id="8" name="TextBox 7"/>
+          <p:cNvPr id="9" name="TextBox 8"/>
           <p:cNvSpPr txBox="1"/>
           <p:nvPr/>
         </p:nvSpPr>
         <p:spPr>
           <a:xfrm>
-            <a:off x="457200" y="5303520"/>
-            <a:ext cx="11247120" cy="1097280"/>
+            <a:off x="3200400" y="5303520"/>
+            <a:ext cx="8869680" cy="1097280"/>
           </a:xfrm>
           <a:prstGeom prst="rect">
             <a:avLst/>
@@ -5828,7 +6133,7 @@
           <a:lstStyle/>
           <a:p>
             <a:pPr>
-              <a:defRPr sz="1200" b="1">
+              <a:defRPr sz="1100" b="1">
                 <a:solidFill>
                   <a:srgbClr val="418DFF"/>
                 </a:solidFill>
@@ -5843,14 +6148,14 @@
       </p:sp>
       <p:sp>
         <p:nvSpPr>
-          <p:cNvPr id="9" name="TextBox 8"/>
+          <p:cNvPr id="10" name="TextBox 9"/>
           <p:cNvSpPr txBox="1"/>
           <p:nvPr/>
         </p:nvSpPr>
         <p:spPr>
           <a:xfrm>
-            <a:off x="457200" y="6537960"/>
-            <a:ext cx="11247120" cy="228600"/>
+            <a:off x="3200400" y="6537960"/>
+            <a:ext cx="8869680" cy="228600"/>
           </a:xfrm>
           <a:prstGeom prst="rect">
             <a:avLst/>
@@ -5897,14 +6202,57 @@
       <p:grpSpPr/>
       <p:sp>
         <p:nvSpPr>
-          <p:cNvPr id="2" name="TextBox 1"/>
+          <p:cNvPr id="2" name="Rectangle 1"/>
+          <p:cNvSpPr/>
+          <p:nvPr/>
+        </p:nvSpPr>
+        <p:spPr>
+          <a:xfrm>
+            <a:off x="0" y="0"/>
+            <a:ext cx="3017520" cy="6858000"/>
+          </a:xfrm>
+          <a:prstGeom prst="rect">
+            <a:avLst/>
+          </a:prstGeom>
+          <a:solidFill>
+            <a:srgbClr val="EEEEEE"/>
+          </a:solidFill>
+          <a:ln>
+            <a:noFill/>
+          </a:ln>
+        </p:spPr>
+        <p:style>
+          <a:lnRef idx="1">
+            <a:schemeClr val="accent1"/>
+          </a:lnRef>
+          <a:fillRef idx="3">
+            <a:schemeClr val="accent1"/>
+          </a:fillRef>
+          <a:effectRef idx="2">
+            <a:schemeClr val="accent1"/>
+          </a:effectRef>
+          <a:fontRef idx="minor">
+            <a:schemeClr val="lt1"/>
+          </a:fontRef>
+        </p:style>
+        <p:txBody>
+          <a:bodyPr rtlCol="0" anchor="ctr"/>
+          <a:lstStyle/>
+          <a:p>
+            <a:pPr algn="ctr"/>
+          </a:p>
+        </p:txBody>
+      </p:sp>
+      <p:sp>
+        <p:nvSpPr>
+          <p:cNvPr id="3" name="TextBox 2"/>
           <p:cNvSpPr txBox="1"/>
           <p:nvPr/>
         </p:nvSpPr>
         <p:spPr>
           <a:xfrm>
-            <a:off x="457200" y="274320"/>
-            <a:ext cx="11247120" cy="274320"/>
+            <a:off x="274320" y="457200"/>
+            <a:ext cx="2651760" cy="365760"/>
           </a:xfrm>
           <a:prstGeom prst="rect">
             <a:avLst/>
@@ -5933,14 +6281,14 @@
       </p:sp>
       <p:sp>
         <p:nvSpPr>
-          <p:cNvPr id="3" name="TextBox 2"/>
+          <p:cNvPr id="4" name="TextBox 3"/>
           <p:cNvSpPr txBox="1"/>
           <p:nvPr/>
         </p:nvSpPr>
         <p:spPr>
           <a:xfrm>
-            <a:off x="457200" y="502920"/>
-            <a:ext cx="11247120" cy="640080"/>
+            <a:off x="274320" y="914400"/>
+            <a:ext cx="2651760" cy="2011680"/>
           </a:xfrm>
           <a:prstGeom prst="rect">
             <a:avLst/>
@@ -5948,13 +6296,13 @@
           <a:noFill/>
         </p:spPr>
         <p:txBody>
-          <a:bodyPr wrap="none">
+          <a:bodyPr wrap="square">
             <a:spAutoFit/>
           </a:bodyPr>
           <a:lstStyle/>
           <a:p>
             <a:pPr>
-              <a:defRPr sz="2800">
+              <a:defRPr sz="2200">
                 <a:solidFill>
                   <a:srgbClr val="161616"/>
                 </a:solidFill>
@@ -5962,21 +6310,39 @@
               </a:defRPr>
             </a:pPr>
             <a:r>
-              <a:t>Top performance finding — repeated SELECT in loop</a:t>
-            </a:r>
-          </a:p>
-        </p:txBody>
-      </p:sp>
-      <p:sp>
-        <p:nvSpPr>
-          <p:cNvPr id="4" name="TextBox 3"/>
+              <a:t>Repeated SELECT in loop</a:t>
+            </a:r>
+          </a:p>
+          <a:p>
+            <a:pPr>
+              <a:defRPr sz="400"/>
+            </a:pPr>
+          </a:p>
+          <a:p>
+            <a:pPr>
+              <a:defRPr sz="1200" i="1">
+                <a:solidFill>
+                  <a:srgbClr val="555555"/>
+                </a:solidFill>
+                <a:latin typeface="Calibri"/>
+              </a:defRPr>
+            </a:pPr>
+            <a:r>
+              <a:t>Top performance finding</a:t>
+            </a:r>
+          </a:p>
+        </p:txBody>
+      </p:sp>
+      <p:sp>
+        <p:nvSpPr>
+          <p:cNvPr id="5" name="TextBox 4"/>
           <p:cNvSpPr txBox="1"/>
           <p:nvPr/>
         </p:nvSpPr>
         <p:spPr>
           <a:xfrm>
-            <a:off x="457200" y="1188720"/>
-            <a:ext cx="11247120" cy="365760"/>
+            <a:off x="3200400" y="457200"/>
+            <a:ext cx="8869680" cy="365760"/>
           </a:xfrm>
           <a:prstGeom prst="rect">
             <a:avLst/>
@@ -6005,14 +6371,14 @@
       </p:sp>
       <p:sp>
         <p:nvSpPr>
-          <p:cNvPr id="5" name="TextBox 4"/>
+          <p:cNvPr id="6" name="TextBox 5"/>
           <p:cNvSpPr txBox="1"/>
           <p:nvPr/>
         </p:nvSpPr>
         <p:spPr>
           <a:xfrm>
-            <a:off x="457200" y="1600200"/>
-            <a:ext cx="11247120" cy="274320"/>
+            <a:off x="3200400" y="868680"/>
+            <a:ext cx="8869680" cy="274320"/>
           </a:xfrm>
           <a:prstGeom prst="rect">
             <a:avLst/>
@@ -6026,7 +6392,7 @@
           <a:lstStyle/>
           <a:p>
             <a:pPr>
-              <a:defRPr sz="1100" b="0">
+              <a:defRPr sz="1000" b="0">
                 <a:solidFill>
                   <a:srgbClr val="555555"/>
                 </a:solidFill>
@@ -6041,14 +6407,14 @@
       </p:sp>
       <p:sp>
         <p:nvSpPr>
-          <p:cNvPr id="6" name="TextBox 5"/>
+          <p:cNvPr id="7" name="TextBox 6"/>
           <p:cNvSpPr txBox="1"/>
           <p:nvPr/>
         </p:nvSpPr>
         <p:spPr>
           <a:xfrm>
-            <a:off x="457200" y="1965960"/>
-            <a:ext cx="11247120" cy="1828800"/>
+            <a:off x="3200400" y="1280160"/>
+            <a:ext cx="8869680" cy="2286000"/>
           </a:xfrm>
           <a:prstGeom prst="rect">
             <a:avLst/>
@@ -6131,14 +6497,14 @@
       </p:sp>
       <p:sp>
         <p:nvSpPr>
-          <p:cNvPr id="7" name="TextBox 6"/>
+          <p:cNvPr id="8" name="TextBox 7"/>
           <p:cNvSpPr txBox="1"/>
           <p:nvPr/>
         </p:nvSpPr>
         <p:spPr>
           <a:xfrm>
-            <a:off x="457200" y="4206240"/>
-            <a:ext cx="11247120" cy="914400"/>
+            <a:off x="3200400" y="4023360"/>
+            <a:ext cx="8869680" cy="914400"/>
           </a:xfrm>
           <a:prstGeom prst="rect">
             <a:avLst/>
@@ -6152,7 +6518,7 @@
           <a:lstStyle/>
           <a:p>
             <a:pPr>
-              <a:defRPr sz="1200" b="0">
+              <a:defRPr sz="1100" b="0">
                 <a:solidFill>
                   <a:srgbClr val="333333"/>
                 </a:solidFill>
@@ -6167,14 +6533,14 @@
       </p:sp>
       <p:sp>
         <p:nvSpPr>
-          <p:cNvPr id="8" name="TextBox 7"/>
+          <p:cNvPr id="9" name="TextBox 8"/>
           <p:cNvSpPr txBox="1"/>
           <p:nvPr/>
         </p:nvSpPr>
         <p:spPr>
           <a:xfrm>
-            <a:off x="457200" y="5303520"/>
-            <a:ext cx="11247120" cy="1097280"/>
+            <a:off x="3200400" y="5303520"/>
+            <a:ext cx="8869680" cy="1097280"/>
           </a:xfrm>
           <a:prstGeom prst="rect">
             <a:avLst/>
@@ -6188,7 +6554,7 @@
           <a:lstStyle/>
           <a:p>
             <a:pPr>
-              <a:defRPr sz="1200" b="1">
+              <a:defRPr sz="1100" b="1">
                 <a:solidFill>
                   <a:srgbClr val="418DFF"/>
                 </a:solidFill>
@@ -6203,14 +6569,14 @@
       </p:sp>
       <p:sp>
         <p:nvSpPr>
-          <p:cNvPr id="9" name="TextBox 8"/>
+          <p:cNvPr id="10" name="TextBox 9"/>
           <p:cNvSpPr txBox="1"/>
           <p:nvPr/>
         </p:nvSpPr>
         <p:spPr>
           <a:xfrm>
-            <a:off x="457200" y="6537960"/>
-            <a:ext cx="11247120" cy="228600"/>
+            <a:off x="3200400" y="6537960"/>
+            <a:ext cx="8869680" cy="228600"/>
           </a:xfrm>
           <a:prstGeom prst="rect">
             <a:avLst/>
@@ -6257,14 +6623,57 @@
       <p:grpSpPr/>
       <p:sp>
         <p:nvSpPr>
-          <p:cNvPr id="2" name="TextBox 1"/>
+          <p:cNvPr id="2" name="Rectangle 1"/>
+          <p:cNvSpPr/>
+          <p:nvPr/>
+        </p:nvSpPr>
+        <p:spPr>
+          <a:xfrm>
+            <a:off x="0" y="0"/>
+            <a:ext cx="3017520" cy="6858000"/>
+          </a:xfrm>
+          <a:prstGeom prst="rect">
+            <a:avLst/>
+          </a:prstGeom>
+          <a:solidFill>
+            <a:srgbClr val="EEEEEE"/>
+          </a:solidFill>
+          <a:ln>
+            <a:noFill/>
+          </a:ln>
+        </p:spPr>
+        <p:style>
+          <a:lnRef idx="1">
+            <a:schemeClr val="accent1"/>
+          </a:lnRef>
+          <a:fillRef idx="3">
+            <a:schemeClr val="accent1"/>
+          </a:fillRef>
+          <a:effectRef idx="2">
+            <a:schemeClr val="accent1"/>
+          </a:effectRef>
+          <a:fontRef idx="minor">
+            <a:schemeClr val="lt1"/>
+          </a:fontRef>
+        </p:style>
+        <p:txBody>
+          <a:bodyPr rtlCol="0" anchor="ctr"/>
+          <a:lstStyle/>
+          <a:p>
+            <a:pPr algn="ctr"/>
+          </a:p>
+        </p:txBody>
+      </p:sp>
+      <p:sp>
+        <p:nvSpPr>
+          <p:cNvPr id="3" name="TextBox 2"/>
           <p:cNvSpPr txBox="1"/>
           <p:nvPr/>
         </p:nvSpPr>
         <p:spPr>
           <a:xfrm>
-            <a:off x="457200" y="274320"/>
-            <a:ext cx="11247120" cy="274320"/>
+            <a:off x="274320" y="457200"/>
+            <a:ext cx="2651760" cy="365760"/>
           </a:xfrm>
           <a:prstGeom prst="rect">
             <a:avLst/>
@@ -6293,14 +6702,14 @@
       </p:sp>
       <p:sp>
         <p:nvSpPr>
-          <p:cNvPr id="3" name="TextBox 2"/>
+          <p:cNvPr id="4" name="TextBox 3"/>
           <p:cNvSpPr txBox="1"/>
           <p:nvPr/>
         </p:nvSpPr>
         <p:spPr>
           <a:xfrm>
-            <a:off x="457200" y="502920"/>
-            <a:ext cx="11247120" cy="640080"/>
+            <a:off x="274320" y="914400"/>
+            <a:ext cx="2651760" cy="2011680"/>
           </a:xfrm>
           <a:prstGeom prst="rect">
             <a:avLst/>
@@ -6308,13 +6717,13 @@
           <a:noFill/>
         </p:spPr>
         <p:txBody>
-          <a:bodyPr wrap="none">
+          <a:bodyPr wrap="square">
             <a:spAutoFit/>
           </a:bodyPr>
           <a:lstStyle/>
           <a:p>
             <a:pPr>
-              <a:defRPr sz="2800">
+              <a:defRPr sz="2200">
                 <a:solidFill>
                   <a:srgbClr val="161616"/>
                 </a:solidFill>
@@ -6322,21 +6731,39 @@
               </a:defRPr>
             </a:pPr>
             <a:r>
-              <a:t>Maintainability — 16 LOW findings (style debt)</a:t>
-            </a:r>
-          </a:p>
-        </p:txBody>
-      </p:sp>
-      <p:sp>
-        <p:nvSpPr>
-          <p:cNvPr id="4" name="TextBox 3"/>
+              <a:t>Style debt</a:t>
+            </a:r>
+          </a:p>
+          <a:p>
+            <a:pPr>
+              <a:defRPr sz="400"/>
+            </a:pPr>
+          </a:p>
+          <a:p>
+            <a:pPr>
+              <a:defRPr sz="1200" i="1">
+                <a:solidFill>
+                  <a:srgbClr val="555555"/>
+                </a:solidFill>
+                <a:latin typeface="Calibri"/>
+              </a:defRPr>
+            </a:pPr>
+            <a:r>
+              <a:t>16 LOW findings, deferrable</a:t>
+            </a:r>
+          </a:p>
+        </p:txBody>
+      </p:sp>
+      <p:sp>
+        <p:nvSpPr>
+          <p:cNvPr id="5" name="TextBox 4"/>
           <p:cNvSpPr txBox="1"/>
           <p:nvPr/>
         </p:nvSpPr>
         <p:spPr>
           <a:xfrm>
-            <a:off x="457200" y="1188720"/>
-            <a:ext cx="11247120" cy="5212080"/>
+            <a:off x="3200400" y="640080"/>
+            <a:ext cx="8869680" cy="5669280"/>
           </a:xfrm>
           <a:prstGeom prst="rect">
             <a:avLst/>
@@ -6350,7 +6777,7 @@
           <a:lstStyle/>
           <a:p>
             <a:pPr>
-              <a:defRPr sz="1300" b="0">
+              <a:defRPr sz="1200" b="0">
                 <a:solidFill>
                   <a:srgbClr val="333333"/>
                 </a:solidFill>
@@ -6363,7 +6790,7 @@
           </a:p>
           <a:p>
             <a:pPr>
-              <a:defRPr sz="1300" b="0">
+              <a:defRPr sz="1200" b="0">
                 <a:solidFill>
                   <a:srgbClr val="333333"/>
                 </a:solidFill>
@@ -6373,7 +6800,7 @@
           </a:p>
           <a:p>
             <a:pPr>
-              <a:defRPr sz="1300" b="0">
+              <a:defRPr sz="1200" b="0">
                 <a:solidFill>
                   <a:srgbClr val="333333"/>
                 </a:solidFill>
@@ -6386,7 +6813,7 @@
           </a:p>
           <a:p>
             <a:pPr>
-              <a:defRPr sz="1300" b="0">
+              <a:defRPr sz="1200" b="0">
                 <a:solidFill>
                   <a:srgbClr val="333333"/>
                 </a:solidFill>
@@ -6399,7 +6826,7 @@
           </a:p>
           <a:p>
             <a:pPr>
-              <a:defRPr sz="1300" b="0">
+              <a:defRPr sz="1200" b="0">
                 <a:solidFill>
                   <a:srgbClr val="333333"/>
                 </a:solidFill>
@@ -6412,7 +6839,7 @@
           </a:p>
           <a:p>
             <a:pPr>
-              <a:defRPr sz="1300" b="0">
+              <a:defRPr sz="1200" b="0">
                 <a:solidFill>
                   <a:srgbClr val="333333"/>
                 </a:solidFill>
@@ -6425,7 +6852,7 @@
           </a:p>
           <a:p>
             <a:pPr>
-              <a:defRPr sz="1300" b="0">
+              <a:defRPr sz="1200" b="0">
                 <a:solidFill>
                   <a:srgbClr val="333333"/>
                 </a:solidFill>
@@ -6438,7 +6865,7 @@
           </a:p>
           <a:p>
             <a:pPr>
-              <a:defRPr sz="1300" b="0">
+              <a:defRPr sz="1200" b="0">
                 <a:solidFill>
                   <a:srgbClr val="333333"/>
                 </a:solidFill>
@@ -6451,7 +6878,7 @@
           </a:p>
           <a:p>
             <a:pPr>
-              <a:defRPr sz="1300" b="0">
+              <a:defRPr sz="1200" b="0">
                 <a:solidFill>
                   <a:srgbClr val="333333"/>
                 </a:solidFill>
@@ -6464,7 +6891,7 @@
           </a:p>
           <a:p>
             <a:pPr>
-              <a:defRPr sz="1300" b="0">
+              <a:defRPr sz="1200" b="0">
                 <a:solidFill>
                   <a:srgbClr val="333333"/>
                 </a:solidFill>
@@ -6474,7 +6901,7 @@
           </a:p>
           <a:p>
             <a:pPr>
-              <a:defRPr sz="1300" b="0">
+              <a:defRPr sz="1200" b="0">
                 <a:solidFill>
                   <a:srgbClr val="333333"/>
                 </a:solidFill>
@@ -6482,21 +6909,21 @@
               </a:defRPr>
             </a:pPr>
             <a:r>
-              <a:t>None of these block the object's function. They accumulate — fix during the next focused maintenance window.</a:t>
-            </a:r>
-          </a:p>
-        </p:txBody>
-      </p:sp>
-      <p:sp>
-        <p:nvSpPr>
-          <p:cNvPr id="5" name="TextBox 4"/>
+              <a:t>None block the object's function. Accumulate over time — fix during the next focused maintenance window.</a:t>
+            </a:r>
+          </a:p>
+        </p:txBody>
+      </p:sp>
+      <p:sp>
+        <p:nvSpPr>
+          <p:cNvPr id="6" name="TextBox 5"/>
           <p:cNvSpPr txBox="1"/>
           <p:nvPr/>
         </p:nvSpPr>
         <p:spPr>
           <a:xfrm>
-            <a:off x="457200" y="6537960"/>
-            <a:ext cx="11247120" cy="228600"/>
+            <a:off x="3200400" y="6537960"/>
+            <a:ext cx="8869680" cy="228600"/>
           </a:xfrm>
           <a:prstGeom prst="rect">
             <a:avLst/>
@@ -6543,14 +6970,57 @@
       <p:grpSpPr/>
       <p:sp>
         <p:nvSpPr>
-          <p:cNvPr id="2" name="TextBox 1"/>
+          <p:cNvPr id="2" name="Rectangle 1"/>
+          <p:cNvSpPr/>
+          <p:nvPr/>
+        </p:nvSpPr>
+        <p:spPr>
+          <a:xfrm>
+            <a:off x="0" y="0"/>
+            <a:ext cx="3017520" cy="6858000"/>
+          </a:xfrm>
+          <a:prstGeom prst="rect">
+            <a:avLst/>
+          </a:prstGeom>
+          <a:solidFill>
+            <a:srgbClr val="EEEEEE"/>
+          </a:solidFill>
+          <a:ln>
+            <a:noFill/>
+          </a:ln>
+        </p:spPr>
+        <p:style>
+          <a:lnRef idx="1">
+            <a:schemeClr val="accent1"/>
+          </a:lnRef>
+          <a:fillRef idx="3">
+            <a:schemeClr val="accent1"/>
+          </a:fillRef>
+          <a:effectRef idx="2">
+            <a:schemeClr val="accent1"/>
+          </a:effectRef>
+          <a:fontRef idx="minor">
+            <a:schemeClr val="lt1"/>
+          </a:fontRef>
+        </p:style>
+        <p:txBody>
+          <a:bodyPr rtlCol="0" anchor="ctr"/>
+          <a:lstStyle/>
+          <a:p>
+            <a:pPr algn="ctr"/>
+          </a:p>
+        </p:txBody>
+      </p:sp>
+      <p:sp>
+        <p:nvSpPr>
+          <p:cNvPr id="3" name="TextBox 2"/>
           <p:cNvSpPr txBox="1"/>
           <p:nvPr/>
         </p:nvSpPr>
         <p:spPr>
           <a:xfrm>
-            <a:off x="457200" y="274320"/>
-            <a:ext cx="11247120" cy="274320"/>
+            <a:off x="274320" y="457200"/>
+            <a:ext cx="2651760" cy="365760"/>
           </a:xfrm>
           <a:prstGeom prst="rect">
             <a:avLst/>
@@ -6572,21 +7042,21 @@
               </a:defRPr>
             </a:pPr>
             <a:r>
-              <a:t>SECTION 03 · METHOD &amp; COST</a:t>
-            </a:r>
-          </a:p>
-        </p:txBody>
-      </p:sp>
-      <p:sp>
-        <p:nvSpPr>
-          <p:cNvPr id="3" name="TextBox 2"/>
+              <a:t>SECTION 03 · METHOD</a:t>
+            </a:r>
+          </a:p>
+        </p:txBody>
+      </p:sp>
+      <p:sp>
+        <p:nvSpPr>
+          <p:cNvPr id="4" name="TextBox 3"/>
           <p:cNvSpPr txBox="1"/>
           <p:nvPr/>
         </p:nvSpPr>
         <p:spPr>
           <a:xfrm>
-            <a:off x="457200" y="502920"/>
-            <a:ext cx="11247120" cy="640080"/>
+            <a:off x="274320" y="914400"/>
+            <a:ext cx="2651760" cy="2011680"/>
           </a:xfrm>
           <a:prstGeom prst="rect">
             <a:avLst/>
@@ -6594,13 +7064,13 @@
           <a:noFill/>
         </p:spPr>
         <p:txBody>
-          <a:bodyPr wrap="none">
+          <a:bodyPr wrap="square">
             <a:spAutoFit/>
           </a:bodyPr>
           <a:lstStyle/>
           <a:p>
             <a:pPr>
-              <a:defRPr sz="2800">
+              <a:defRPr sz="2200">
                 <a:solidFill>
                   <a:srgbClr val="161616"/>
                 </a:solidFill>
@@ -6608,21 +7078,39 @@
               </a:defRPr>
             </a:pPr>
             <a:r>
-              <a:t>How this review ran</a:t>
-            </a:r>
-          </a:p>
-        </p:txBody>
-      </p:sp>
-      <p:sp>
-        <p:nvSpPr>
-          <p:cNvPr id="4" name="TextBox 3"/>
+              <a:t>How this ran</a:t>
+            </a:r>
+          </a:p>
+          <a:p>
+            <a:pPr>
+              <a:defRPr sz="400"/>
+            </a:pPr>
+          </a:p>
+          <a:p>
+            <a:pPr>
+              <a:defRPr sz="1200" i="1">
+                <a:solidFill>
+                  <a:srgbClr val="555555"/>
+                </a:solidFill>
+                <a:latin typeface="Calibri"/>
+              </a:defRPr>
+            </a:pPr>
+            <a:r>
+              <a:t>~5 min, ~381k tokens — vs 4-8 h manual</a:t>
+            </a:r>
+          </a:p>
+        </p:txBody>
+      </p:sp>
+      <p:sp>
+        <p:nvSpPr>
+          <p:cNvPr id="5" name="TextBox 4"/>
           <p:cNvSpPr txBox="1"/>
           <p:nvPr/>
         </p:nvSpPr>
         <p:spPr>
           <a:xfrm>
-            <a:off x="457200" y="1188720"/>
-            <a:ext cx="11247120" cy="5212080"/>
+            <a:off x="3200400" y="640080"/>
+            <a:ext cx="8869680" cy="5760720"/>
           </a:xfrm>
           <a:prstGeom prst="rect">
             <a:avLst/>
@@ -6636,7 +7124,7 @@
           <a:lstStyle/>
           <a:p>
             <a:pPr>
-              <a:defRPr sz="1300" b="0">
+              <a:defRPr sz="1200" b="0">
                 <a:solidFill>
                   <a:srgbClr val="333333"/>
                 </a:solidFill>
@@ -6649,7 +7137,7 @@
           </a:p>
           <a:p>
             <a:pPr>
-              <a:defRPr sz="1300" b="0">
+              <a:defRPr sz="1200" b="0">
                 <a:solidFill>
                   <a:srgbClr val="333333"/>
                 </a:solidFill>
@@ -6659,7 +7147,7 @@
           </a:p>
           <a:p>
             <a:pPr>
-              <a:defRPr sz="1300" b="0">
+              <a:defRPr sz="1200" b="0">
                 <a:solidFill>
                   <a:srgbClr val="333333"/>
                 </a:solidFill>
@@ -6672,7 +7160,7 @@
           </a:p>
           <a:p>
             <a:pPr>
-              <a:defRPr sz="1300" b="0">
+              <a:defRPr sz="1200" b="0">
                 <a:solidFill>
                   <a:srgbClr val="333333"/>
                 </a:solidFill>
@@ -6685,7 +7173,7 @@
           </a:p>
           <a:p>
             <a:pPr>
-              <a:defRPr sz="1300" b="0">
+              <a:defRPr sz="1200" b="0">
                 <a:solidFill>
                   <a:srgbClr val="333333"/>
                 </a:solidFill>
@@ -6693,12 +7181,12 @@
               </a:defRPr>
             </a:pPr>
             <a:r>
-              <a:t>    Stages 2-5 — Independent checks: Security / Performance / CleanCore / Maintainability  (parallel, ~30-45s each)</a:t>
-            </a:r>
-          </a:p>
-          <a:p>
-            <a:pPr>
-              <a:defRPr sz="1300" b="0">
+              <a:t>    Stages 2-5 — Independent checks: Security / Performance / CleanCore / Maintainability (parallel, ~30-45s each)</a:t>
+            </a:r>
+          </a:p>
+          <a:p>
+            <a:pPr>
+              <a:defRPr sz="1200" b="0">
                 <a:solidFill>
                   <a:srgbClr val="333333"/>
                 </a:solidFill>
@@ -6711,7 +7199,7 @@
           </a:p>
           <a:p>
             <a:pPr>
-              <a:defRPr sz="1300" b="0">
+              <a:defRPr sz="1200" b="0">
                 <a:solidFill>
                   <a:srgbClr val="333333"/>
                 </a:solidFill>
@@ -6721,7 +7209,7 @@
           </a:p>
           <a:p>
             <a:pPr>
-              <a:defRPr sz="1300" b="0">
+              <a:defRPr sz="1200" b="0">
                 <a:solidFill>
                   <a:srgbClr val="333333"/>
                 </a:solidFill>
@@ -6729,35 +7217,48 @@
               </a:defRPr>
             </a:pPr>
             <a:r>
-              <a:t>Why parallel safe: each check uses light read-only tools (ReadProgram, GetIncludesList, GetInclude). No SearchSource here.</a:t>
-            </a:r>
-          </a:p>
-          <a:p>
-            <a:pPr>
-              <a:defRPr sz="1300" b="0">
+              <a:t>Why parallel safe: each check uses light read-only tools (ReadProgram, GetIncludesList, GetInclude).</a:t>
+            </a:r>
+          </a:p>
+          <a:p>
+            <a:pPr>
+              <a:defRPr sz="1200" b="0">
                 <a:solidFill>
                   <a:srgbClr val="333333"/>
                 </a:solidFill>
                 <a:latin typeface="Calibri"/>
               </a:defRPr>
             </a:pPr>
-          </a:p>
-          <a:p>
-            <a:pPr>
-              <a:defRPr sz="1300" b="0">
+            <a:r>
+              <a:t>No SearchSource here — that's a codebase-analysis tool, not a per-object review tool.</a:t>
+            </a:r>
+          </a:p>
+          <a:p>
+            <a:pPr>
+              <a:defRPr sz="1200" b="0">
                 <a:solidFill>
                   <a:srgbClr val="333333"/>
                 </a:solidFill>
                 <a:latin typeface="Calibri"/>
               </a:defRPr>
             </a:pPr>
+          </a:p>
+          <a:p>
+            <a:pPr>
+              <a:defRPr sz="1200" b="0">
+                <a:solidFill>
+                  <a:srgbClr val="333333"/>
+                </a:solidFill>
+                <a:latin typeface="Calibri"/>
+              </a:defRPr>
+            </a:pPr>
             <a:r>
               <a:t>Wall-clock end-to-end: ~5 minutes.</a:t>
             </a:r>
           </a:p>
           <a:p>
             <a:pPr>
-              <a:defRPr sz="1300" b="0">
+              <a:defRPr sz="1200" b="0">
                 <a:solidFill>
                   <a:srgbClr val="333333"/>
                 </a:solidFill>
@@ -6765,12 +7266,12 @@
               </a:defRPr>
             </a:pPr>
             <a:r>
-              <a:t>Cloud-side LLM tokens: ~381k across the four checks combined (gpt-5.2).</a:t>
-            </a:r>
-          </a:p>
-          <a:p>
-            <a:pPr>
-              <a:defRPr sz="1300" b="0">
+              <a:t>Cloud-side LLM tokens: ~381k across four checks combined (gpt-5.2).</a:t>
+            </a:r>
+          </a:p>
+          <a:p>
+            <a:pPr>
+              <a:defRPr sz="1200" b="0">
                 <a:solidFill>
                   <a:srgbClr val="333333"/>
                 </a:solidFill>
@@ -6780,7 +7281,7 @@
           </a:p>
           <a:p>
             <a:pPr>
-              <a:defRPr sz="1300" b="0">
+              <a:defRPr sz="1200" b="0">
                 <a:solidFill>
                   <a:srgbClr val="333333"/>
                 </a:solidFill>
@@ -6788,21 +7289,21 @@
               </a:defRPr>
             </a:pPr>
             <a:r>
-              <a:t>Comparable manual review estimate: 1-2 hours per category × 4 = 4-8 hours by a senior ABAP reviewer.</a:t>
-            </a:r>
-          </a:p>
-        </p:txBody>
-      </p:sp>
-      <p:sp>
-        <p:nvSpPr>
-          <p:cNvPr id="5" name="TextBox 4"/>
+              <a:t>Comparable manual review estimate: 1-2 hours per category × 4 = 4-8 hours by senior ABAP reviewer.</a:t>
+            </a:r>
+          </a:p>
+        </p:txBody>
+      </p:sp>
+      <p:sp>
+        <p:nvSpPr>
+          <p:cNvPr id="6" name="TextBox 5"/>
           <p:cNvSpPr txBox="1"/>
           <p:nvPr/>
         </p:nvSpPr>
         <p:spPr>
           <a:xfrm>
-            <a:off x="457200" y="6537960"/>
-            <a:ext cx="11247120" cy="228600"/>
+            <a:off x="3200400" y="6537960"/>
+            <a:ext cx="8869680" cy="228600"/>
           </a:xfrm>
           <a:prstGeom prst="rect">
             <a:avLst/>

--- a/docs/tutorials/code-review/examples/ZDMS_UPLOAD_FILES/report.pptx
+++ b/docs/tutorials/code-review/examples/ZDMS_UPLOAD_FILES/report.pptx
@@ -13,7 +13,6 @@
     <p:sldId id="261" r:id="rId12"/>
     <p:sldId id="262" r:id="rId13"/>
     <p:sldId id="263" r:id="rId14"/>
-    <p:sldId id="264" r:id="rId15"/>
   </p:sldIdLst>
   <p:sldSz cx="12188952" cy="6858000" type="screen4x3"/>
   <p:notesSz cx="6858000" cy="9144000"/>
@@ -3285,7 +3284,7 @@
               </a:defRPr>
             </a:pPr>
             <a:r>
-              <a:t>Package Z001 · destination DS4_CLH · 4 parallel category checks</a:t>
+              <a:t>Package Z001 · destination DS4_CLH · 4 parallel category checks · 30 findings, all listed</a:t>
             </a:r>
           </a:p>
         </p:txBody>
@@ -3476,7 +3475,7 @@
               </a:defRPr>
             </a:pPr>
             <a:r>
-              <a:t>Headline counts and severity profile</a:t>
+              <a:t>Headline counts + severity profile</a:t>
             </a:r>
           </a:p>
         </p:txBody>
@@ -3762,7 +3761,7 @@
               </a:defRPr>
             </a:pPr>
             <a:r>
-              <a:t>• Every finding below anchored to a verbatim ABAP snippet from source.</a:t>
+              <a:t>• All 30 findings listed by category on the following slides — nothing hidden.</a:t>
             </a:r>
           </a:p>
         </p:txBody>
@@ -4891,7 +4890,7 @@
               </a:defRPr>
             </a:pPr>
             <a:r>
-              <a:t>Highest-impact for migration: CleanCore — 100% HIGH severity, blocks S/4HANA Cloud.</a:t>
+              <a:t>Highest-impact: CleanCore — 100% HIGH severity, blocks S/4HANA Cloud.</a:t>
             </a:r>
           </a:p>
           <a:p>
@@ -4918,6 +4917,29 @@
             </a:pPr>
             <a:r>
               <a:t>0 CRITICAL: legacy code has no immediate data-loss / breach risk, just compliance and perf drift.</a:t>
+            </a:r>
+          </a:p>
+          <a:p>
+            <a:pPr>
+              <a:defRPr sz="1200" b="0">
+                <a:solidFill>
+                  <a:srgbClr val="333333"/>
+                </a:solidFill>
+                <a:latin typeface="Calibri"/>
+              </a:defRPr>
+            </a:pPr>
+          </a:p>
+          <a:p>
+            <a:pPr>
+              <a:defRPr sz="1200" b="0">
+                <a:solidFill>
+                  <a:srgbClr val="333333"/>
+                </a:solidFill>
+                <a:latin typeface="Calibri"/>
+              </a:defRPr>
+            </a:pPr>
+            <a:r>
+              <a:t>Next slides — every finding listed by category, with location and severity tag.</a:t>
             </a:r>
           </a:p>
         </p:txBody>
@@ -5086,7 +5108,7 @@
               </a:defRPr>
             </a:pPr>
             <a:r>
-              <a:t>SXPG OS shell access</a:t>
+              <a:t>All CleanCore findings</a:t>
             </a:r>
           </a:p>
           <a:p>
@@ -5104,47 +5126,725 @@
               </a:defRPr>
             </a:pPr>
             <a:r>
-              <a:t>Top CleanCore finding</a:t>
-            </a:r>
-          </a:p>
-        </p:txBody>
-      </p:sp>
-      <p:sp>
-        <p:nvSpPr>
-          <p:cNvPr id="5" name="TextBox 4"/>
-          <p:cNvSpPr txBox="1"/>
+              <a:t>6 findings — all HIGH, all blockers</a:t>
+            </a:r>
+          </a:p>
+        </p:txBody>
+      </p:sp>
+      <p:graphicFrame>
+        <p:nvGraphicFramePr>
+          <p:cNvPr id="5" name="Table 4"/>
+          <p:cNvGraphicFramePr>
+            <a:graphicFrameLocks noGrp="1"/>
+          </p:cNvGraphicFramePr>
           <p:nvPr/>
-        </p:nvSpPr>
-        <p:spPr>
-          <a:xfrm>
-            <a:off x="3200400" y="457200"/>
-            <a:ext cx="8869680" cy="365760"/>
-          </a:xfrm>
-          <a:prstGeom prst="rect">
-            <a:avLst/>
-          </a:prstGeom>
-          <a:noFill/>
-        </p:spPr>
-        <p:txBody>
-          <a:bodyPr wrap="square">
-            <a:spAutoFit/>
-          </a:bodyPr>
-          <a:lstStyle/>
-          <a:p>
-            <a:pPr>
-              <a:defRPr sz="1400" b="1">
-                <a:solidFill>
-                  <a:srgbClr val="C83636"/>
-                </a:solidFill>
-                <a:latin typeface="Calibri"/>
-              </a:defRPr>
-            </a:pPr>
-            <a:r>
-              <a:t>HIGH — OS command execution via `SXPG_COMMAND_EXECUTE` (shell access)</a:t>
-            </a:r>
-          </a:p>
-        </p:txBody>
-      </p:sp>
+        </p:nvGraphicFramePr>
+        <p:xfrm>
+          <a:off x="3200400" y="640080"/>
+          <a:ext cx="8869680" cy="4114800"/>
+        </p:xfrm>
+        <a:graphic>
+          <a:graphicData uri="http://schemas.openxmlformats.org/drawingml/2006/table">
+            <a:tbl>
+              <a:tblPr firstRow="1" bandRow="1">
+                <a:tableStyleId>{5C22544A-7EE6-4342-B048-85BDC9FD1C3A}</a:tableStyleId>
+              </a:tblPr>
+              <a:tblGrid>
+                <a:gridCol w="365760"/>
+                <a:gridCol w="640080"/>
+                <a:gridCol w="5029200"/>
+                <a:gridCol w="2834640"/>
+              </a:tblGrid>
+              <a:tr h="587828">
+                <a:tc>
+                  <a:txBody>
+                    <a:bodyPr/>
+                    <a:lstStyle/>
+                    <a:p>
+                      <a:pPr>
+                        <a:defRPr sz="1000" b="1">
+                          <a:solidFill>
+                            <a:srgbClr val="FFFFFF"/>
+                          </a:solidFill>
+                          <a:latin typeface="Calibri"/>
+                        </a:defRPr>
+                      </a:pPr>
+                      <a:r>
+                        <a:t>#</a:t>
+                      </a:r>
+                    </a:p>
+                  </a:txBody>
+                  <a:tcPr>
+                    <a:solidFill>
+                      <a:srgbClr val="161616"/>
+                    </a:solidFill>
+                  </a:tcPr>
+                </a:tc>
+                <a:tc>
+                  <a:txBody>
+                    <a:bodyPr/>
+                    <a:lstStyle/>
+                    <a:p>
+                      <a:pPr>
+                        <a:defRPr sz="1000" b="1">
+                          <a:solidFill>
+                            <a:srgbClr val="FFFFFF"/>
+                          </a:solidFill>
+                          <a:latin typeface="Calibri"/>
+                        </a:defRPr>
+                      </a:pPr>
+                      <a:r>
+                        <a:t>Sev</a:t>
+                      </a:r>
+                    </a:p>
+                  </a:txBody>
+                  <a:tcPr>
+                    <a:solidFill>
+                      <a:srgbClr val="161616"/>
+                    </a:solidFill>
+                  </a:tcPr>
+                </a:tc>
+                <a:tc>
+                  <a:txBody>
+                    <a:bodyPr/>
+                    <a:lstStyle/>
+                    <a:p>
+                      <a:pPr>
+                        <a:defRPr sz="1000" b="1">
+                          <a:solidFill>
+                            <a:srgbClr val="FFFFFF"/>
+                          </a:solidFill>
+                          <a:latin typeface="Calibri"/>
+                        </a:defRPr>
+                      </a:pPr>
+                      <a:r>
+                        <a:t>Finding title</a:t>
+                      </a:r>
+                    </a:p>
+                  </a:txBody>
+                  <a:tcPr>
+                    <a:solidFill>
+                      <a:srgbClr val="161616"/>
+                    </a:solidFill>
+                  </a:tcPr>
+                </a:tc>
+                <a:tc>
+                  <a:txBody>
+                    <a:bodyPr/>
+                    <a:lstStyle/>
+                    <a:p>
+                      <a:pPr>
+                        <a:defRPr sz="1000" b="1">
+                          <a:solidFill>
+                            <a:srgbClr val="FFFFFF"/>
+                          </a:solidFill>
+                          <a:latin typeface="Calibri"/>
+                        </a:defRPr>
+                      </a:pPr>
+                      <a:r>
+                        <a:t>Location</a:t>
+                      </a:r>
+                    </a:p>
+                  </a:txBody>
+                  <a:tcPr>
+                    <a:solidFill>
+                      <a:srgbClr val="161616"/>
+                    </a:solidFill>
+                  </a:tcPr>
+                </a:tc>
+              </a:tr>
+              <a:tr h="587828">
+                <a:tc>
+                  <a:txBody>
+                    <a:bodyPr/>
+                    <a:lstStyle/>
+                    <a:p>
+                      <a:pPr>
+                        <a:defRPr sz="900">
+                          <a:solidFill>
+                            <a:srgbClr val="333333"/>
+                          </a:solidFill>
+                          <a:latin typeface="Calibri"/>
+                        </a:defRPr>
+                      </a:pPr>
+                      <a:r>
+                        <a:t>1</a:t>
+                      </a:r>
+                    </a:p>
+                  </a:txBody>
+                  <a:tcPr>
+                    <a:solidFill>
+                      <a:srgbClr val="FFFFFF"/>
+                    </a:solidFill>
+                  </a:tcPr>
+                </a:tc>
+                <a:tc>
+                  <a:txBody>
+                    <a:bodyPr/>
+                    <a:lstStyle/>
+                    <a:p>
+                      <a:pPr>
+                        <a:defRPr sz="900" b="1">
+                          <a:solidFill>
+                            <a:srgbClr val="E67E22"/>
+                          </a:solidFill>
+                          <a:latin typeface="Calibri"/>
+                        </a:defRPr>
+                      </a:pPr>
+                      <a:r>
+                        <a:t>HIGH</a:t>
+                      </a:r>
+                    </a:p>
+                  </a:txBody>
+                  <a:tcPr>
+                    <a:solidFill>
+                      <a:srgbClr val="FFFFFF"/>
+                    </a:solidFill>
+                  </a:tcPr>
+                </a:tc>
+                <a:tc>
+                  <a:txBody>
+                    <a:bodyPr/>
+                    <a:lstStyle/>
+                    <a:p>
+                      <a:pPr>
+                        <a:defRPr sz="900">
+                          <a:solidFill>
+                            <a:srgbClr val="333333"/>
+                          </a:solidFill>
+                          <a:latin typeface="Calibri"/>
+                        </a:defRPr>
+                      </a:pPr>
+                      <a:r>
+                        <a:t>OS command execution via `SXPG_COMMAND_EXECUTE` (shell access)</a:t>
+                      </a:r>
+                    </a:p>
+                  </a:txBody>
+                  <a:tcPr>
+                    <a:solidFill>
+                      <a:srgbClr val="FFFFFF"/>
+                    </a:solidFill>
+                  </a:tcPr>
+                </a:tc>
+                <a:tc>
+                  <a:txBody>
+                    <a:bodyPr/>
+                    <a:lstStyle/>
+                    <a:p>
+                      <a:pPr>
+                        <a:defRPr sz="900">
+                          <a:solidFill>
+                            <a:srgbClr val="333333"/>
+                          </a:solidFill>
+                          <a:latin typeface="Consolas"/>
+                        </a:defRPr>
+                      </a:pPr>
+                      <a:r>
+                        <a:t>ZDMS_UPLOAD_FILES_F01:~325</a:t>
+                      </a:r>
+                    </a:p>
+                  </a:txBody>
+                  <a:tcPr>
+                    <a:solidFill>
+                      <a:srgbClr val="FFFFFF"/>
+                    </a:solidFill>
+                  </a:tcPr>
+                </a:tc>
+              </a:tr>
+              <a:tr h="587828">
+                <a:tc>
+                  <a:txBody>
+                    <a:bodyPr/>
+                    <a:lstStyle/>
+                    <a:p>
+                      <a:pPr>
+                        <a:defRPr sz="900">
+                          <a:solidFill>
+                            <a:srgbClr val="333333"/>
+                          </a:solidFill>
+                          <a:latin typeface="Calibri"/>
+                        </a:defRPr>
+                      </a:pPr>
+                      <a:r>
+                        <a:t>2</a:t>
+                      </a:r>
+                    </a:p>
+                  </a:txBody>
+                  <a:tcPr>
+                    <a:solidFill>
+                      <a:srgbClr val="F5F5F5"/>
+                    </a:solidFill>
+                  </a:tcPr>
+                </a:tc>
+                <a:tc>
+                  <a:txBody>
+                    <a:bodyPr/>
+                    <a:lstStyle/>
+                    <a:p>
+                      <a:pPr>
+                        <a:defRPr sz="900" b="1">
+                          <a:solidFill>
+                            <a:srgbClr val="E67E22"/>
+                          </a:solidFill>
+                          <a:latin typeface="Calibri"/>
+                        </a:defRPr>
+                      </a:pPr>
+                      <a:r>
+                        <a:t>HIGH</a:t>
+                      </a:r>
+                    </a:p>
+                  </a:txBody>
+                  <a:tcPr>
+                    <a:solidFill>
+                      <a:srgbClr val="F5F5F5"/>
+                    </a:solidFill>
+                  </a:tcPr>
+                </a:tc>
+                <a:tc>
+                  <a:txBody>
+                    <a:bodyPr/>
+                    <a:lstStyle/>
+                    <a:p>
+                      <a:pPr>
+                        <a:defRPr sz="900">
+                          <a:solidFill>
+                            <a:srgbClr val="333333"/>
+                          </a:solidFill>
+                          <a:latin typeface="Calibri"/>
+                        </a:defRPr>
+                      </a:pPr>
+                      <a:r>
+                        <a:t>OS command execution via `SXPG_COMMAND_EXECUTE` (shell access)</a:t>
+                      </a:r>
+                    </a:p>
+                  </a:txBody>
+                  <a:tcPr>
+                    <a:solidFill>
+                      <a:srgbClr val="F5F5F5"/>
+                    </a:solidFill>
+                  </a:tcPr>
+                </a:tc>
+                <a:tc>
+                  <a:txBody>
+                    <a:bodyPr/>
+                    <a:lstStyle/>
+                    <a:p>
+                      <a:pPr>
+                        <a:defRPr sz="900">
+                          <a:solidFill>
+                            <a:srgbClr val="333333"/>
+                          </a:solidFill>
+                          <a:latin typeface="Consolas"/>
+                        </a:defRPr>
+                      </a:pPr>
+                      <a:r>
+                        <a:t>ZDMS_UPLOAD_FILES_F01:~388</a:t>
+                      </a:r>
+                    </a:p>
+                  </a:txBody>
+                  <a:tcPr>
+                    <a:solidFill>
+                      <a:srgbClr val="F5F5F5"/>
+                    </a:solidFill>
+                  </a:tcPr>
+                </a:tc>
+              </a:tr>
+              <a:tr h="587828">
+                <a:tc>
+                  <a:txBody>
+                    <a:bodyPr/>
+                    <a:lstStyle/>
+                    <a:p>
+                      <a:pPr>
+                        <a:defRPr sz="900">
+                          <a:solidFill>
+                            <a:srgbClr val="333333"/>
+                          </a:solidFill>
+                          <a:latin typeface="Calibri"/>
+                        </a:defRPr>
+                      </a:pPr>
+                      <a:r>
+                        <a:t>3</a:t>
+                      </a:r>
+                    </a:p>
+                  </a:txBody>
+                  <a:tcPr>
+                    <a:solidFill>
+                      <a:srgbClr val="FFFFFF"/>
+                    </a:solidFill>
+                  </a:tcPr>
+                </a:tc>
+                <a:tc>
+                  <a:txBody>
+                    <a:bodyPr/>
+                    <a:lstStyle/>
+                    <a:p>
+                      <a:pPr>
+                        <a:defRPr sz="900" b="1">
+                          <a:solidFill>
+                            <a:srgbClr val="E67E22"/>
+                          </a:solidFill>
+                          <a:latin typeface="Calibri"/>
+                        </a:defRPr>
+                      </a:pPr>
+                      <a:r>
+                        <a:t>HIGH</a:t>
+                      </a:r>
+                    </a:p>
+                  </a:txBody>
+                  <a:tcPr>
+                    <a:solidFill>
+                      <a:srgbClr val="FFFFFF"/>
+                    </a:solidFill>
+                  </a:tcPr>
+                </a:tc>
+                <a:tc>
+                  <a:txBody>
+                    <a:bodyPr/>
+                    <a:lstStyle/>
+                    <a:p>
+                      <a:pPr>
+                        <a:defRPr sz="900">
+                          <a:solidFill>
+                            <a:srgbClr val="333333"/>
+                          </a:solidFill>
+                          <a:latin typeface="Calibri"/>
+                        </a:defRPr>
+                      </a:pPr>
+                      <a:r>
+                        <a:t>File operations on application server via `OPEN DATASET` / `READ DATASET` / `TRANSFER` / `DELETE DATASET` (AL11-style)</a:t>
+                      </a:r>
+                    </a:p>
+                  </a:txBody>
+                  <a:tcPr>
+                    <a:solidFill>
+                      <a:srgbClr val="FFFFFF"/>
+                    </a:solidFill>
+                  </a:tcPr>
+                </a:tc>
+                <a:tc>
+                  <a:txBody>
+                    <a:bodyPr/>
+                    <a:lstStyle/>
+                    <a:p>
+                      <a:pPr>
+                        <a:defRPr sz="900">
+                          <a:solidFill>
+                            <a:srgbClr val="333333"/>
+                          </a:solidFill>
+                          <a:latin typeface="Consolas"/>
+                        </a:defRPr>
+                      </a:pPr>
+                      <a:r>
+                        <a:t>ZDMS_UPLOAD_FILES_F01:~468</a:t>
+                      </a:r>
+                    </a:p>
+                  </a:txBody>
+                  <a:tcPr>
+                    <a:solidFill>
+                      <a:srgbClr val="FFFFFF"/>
+                    </a:solidFill>
+                  </a:tcPr>
+                </a:tc>
+              </a:tr>
+              <a:tr h="587828">
+                <a:tc>
+                  <a:txBody>
+                    <a:bodyPr/>
+                    <a:lstStyle/>
+                    <a:p>
+                      <a:pPr>
+                        <a:defRPr sz="900">
+                          <a:solidFill>
+                            <a:srgbClr val="333333"/>
+                          </a:solidFill>
+                          <a:latin typeface="Calibri"/>
+                        </a:defRPr>
+                      </a:pPr>
+                      <a:r>
+                        <a:t>4</a:t>
+                      </a:r>
+                    </a:p>
+                  </a:txBody>
+                  <a:tcPr>
+                    <a:solidFill>
+                      <a:srgbClr val="F5F5F5"/>
+                    </a:solidFill>
+                  </a:tcPr>
+                </a:tc>
+                <a:tc>
+                  <a:txBody>
+                    <a:bodyPr/>
+                    <a:lstStyle/>
+                    <a:p>
+                      <a:pPr>
+                        <a:defRPr sz="900" b="1">
+                          <a:solidFill>
+                            <a:srgbClr val="E67E22"/>
+                          </a:solidFill>
+                          <a:latin typeface="Calibri"/>
+                        </a:defRPr>
+                      </a:pPr>
+                      <a:r>
+                        <a:t>HIGH</a:t>
+                      </a:r>
+                    </a:p>
+                  </a:txBody>
+                  <a:tcPr>
+                    <a:solidFill>
+                      <a:srgbClr val="F5F5F5"/>
+                    </a:solidFill>
+                  </a:tcPr>
+                </a:tc>
+                <a:tc>
+                  <a:txBody>
+                    <a:bodyPr/>
+                    <a:lstStyle/>
+                    <a:p>
+                      <a:pPr>
+                        <a:defRPr sz="900">
+                          <a:solidFill>
+                            <a:srgbClr val="333333"/>
+                          </a:solidFill>
+                          <a:latin typeface="Calibri"/>
+                        </a:defRPr>
+                      </a:pPr>
+                      <a:r>
+                        <a:t>File deletion on application server via `DELETE DATASET` (AL11-style)</a:t>
+                      </a:r>
+                    </a:p>
+                  </a:txBody>
+                  <a:tcPr>
+                    <a:solidFill>
+                      <a:srgbClr val="F5F5F5"/>
+                    </a:solidFill>
+                  </a:tcPr>
+                </a:tc>
+                <a:tc>
+                  <a:txBody>
+                    <a:bodyPr/>
+                    <a:lstStyle/>
+                    <a:p>
+                      <a:pPr>
+                        <a:defRPr sz="900">
+                          <a:solidFill>
+                            <a:srgbClr val="333333"/>
+                          </a:solidFill>
+                          <a:latin typeface="Consolas"/>
+                        </a:defRPr>
+                      </a:pPr>
+                      <a:r>
+                        <a:t>ZDMS_UPLOAD_FILES_F01:~494</a:t>
+                      </a:r>
+                    </a:p>
+                  </a:txBody>
+                  <a:tcPr>
+                    <a:solidFill>
+                      <a:srgbClr val="F5F5F5"/>
+                    </a:solidFill>
+                  </a:tcPr>
+                </a:tc>
+              </a:tr>
+              <a:tr h="587828">
+                <a:tc>
+                  <a:txBody>
+                    <a:bodyPr/>
+                    <a:lstStyle/>
+                    <a:p>
+                      <a:pPr>
+                        <a:defRPr sz="900">
+                          <a:solidFill>
+                            <a:srgbClr val="333333"/>
+                          </a:solidFill>
+                          <a:latin typeface="Calibri"/>
+                        </a:defRPr>
+                      </a:pPr>
+                      <a:r>
+                        <a:t>5</a:t>
+                      </a:r>
+                    </a:p>
+                  </a:txBody>
+                  <a:tcPr>
+                    <a:solidFill>
+                      <a:srgbClr val="FFFFFF"/>
+                    </a:solidFill>
+                  </a:tcPr>
+                </a:tc>
+                <a:tc>
+                  <a:txBody>
+                    <a:bodyPr/>
+                    <a:lstStyle/>
+                    <a:p>
+                      <a:pPr>
+                        <a:defRPr sz="900" b="1">
+                          <a:solidFill>
+                            <a:srgbClr val="E67E22"/>
+                          </a:solidFill>
+                          <a:latin typeface="Calibri"/>
+                        </a:defRPr>
+                      </a:pPr>
+                      <a:r>
+                        <a:t>HIGH</a:t>
+                      </a:r>
+                    </a:p>
+                  </a:txBody>
+                  <a:tcPr>
+                    <a:solidFill>
+                      <a:srgbClr val="FFFFFF"/>
+                    </a:solidFill>
+                  </a:tcPr>
+                </a:tc>
+                <a:tc>
+                  <a:txBody>
+                    <a:bodyPr/>
+                    <a:lstStyle/>
+                    <a:p>
+                      <a:pPr>
+                        <a:defRPr sz="900">
+                          <a:solidFill>
+                            <a:srgbClr val="333333"/>
+                          </a:solidFill>
+                          <a:latin typeface="Calibri"/>
+                        </a:defRPr>
+                      </a:pPr>
+                      <a:r>
+                        <a:t>File deletion on application server via `DELETE DATASET` (AL11-style)</a:t>
+                      </a:r>
+                    </a:p>
+                  </a:txBody>
+                  <a:tcPr>
+                    <a:solidFill>
+                      <a:srgbClr val="FFFFFF"/>
+                    </a:solidFill>
+                  </a:tcPr>
+                </a:tc>
+                <a:tc>
+                  <a:txBody>
+                    <a:bodyPr/>
+                    <a:lstStyle/>
+                    <a:p>
+                      <a:pPr>
+                        <a:defRPr sz="900">
+                          <a:solidFill>
+                            <a:srgbClr val="333333"/>
+                          </a:solidFill>
+                          <a:latin typeface="Consolas"/>
+                        </a:defRPr>
+                      </a:pPr>
+                      <a:r>
+                        <a:t>ZDMS_UPLOAD_FILES_F01:~656</a:t>
+                      </a:r>
+                    </a:p>
+                  </a:txBody>
+                  <a:tcPr>
+                    <a:solidFill>
+                      <a:srgbClr val="FFFFFF"/>
+                    </a:solidFill>
+                  </a:tcPr>
+                </a:tc>
+              </a:tr>
+              <a:tr h="587832">
+                <a:tc>
+                  <a:txBody>
+                    <a:bodyPr/>
+                    <a:lstStyle/>
+                    <a:p>
+                      <a:pPr>
+                        <a:defRPr sz="900">
+                          <a:solidFill>
+                            <a:srgbClr val="333333"/>
+                          </a:solidFill>
+                          <a:latin typeface="Calibri"/>
+                        </a:defRPr>
+                      </a:pPr>
+                      <a:r>
+                        <a:t>6</a:t>
+                      </a:r>
+                    </a:p>
+                  </a:txBody>
+                  <a:tcPr>
+                    <a:solidFill>
+                      <a:srgbClr val="F5F5F5"/>
+                    </a:solidFill>
+                  </a:tcPr>
+                </a:tc>
+                <a:tc>
+                  <a:txBody>
+                    <a:bodyPr/>
+                    <a:lstStyle/>
+                    <a:p>
+                      <a:pPr>
+                        <a:defRPr sz="900" b="1">
+                          <a:solidFill>
+                            <a:srgbClr val="E67E22"/>
+                          </a:solidFill>
+                          <a:latin typeface="Calibri"/>
+                        </a:defRPr>
+                      </a:pPr>
+                      <a:r>
+                        <a:t>HIGH</a:t>
+                      </a:r>
+                    </a:p>
+                  </a:txBody>
+                  <a:tcPr>
+                    <a:solidFill>
+                      <a:srgbClr val="F5F5F5"/>
+                    </a:solidFill>
+                  </a:tcPr>
+                </a:tc>
+                <a:tc>
+                  <a:txBody>
+                    <a:bodyPr/>
+                    <a:lstStyle/>
+                    <a:p>
+                      <a:pPr>
+                        <a:defRPr sz="900">
+                          <a:solidFill>
+                            <a:srgbClr val="333333"/>
+                          </a:solidFill>
+                          <a:latin typeface="Calibri"/>
+                        </a:defRPr>
+                      </a:pPr>
+                      <a:r>
+                        <a:t>Direct read of standard table `TVARVC` (released API alternative expected)</a:t>
+                      </a:r>
+                    </a:p>
+                  </a:txBody>
+                  <a:tcPr>
+                    <a:solidFill>
+                      <a:srgbClr val="F5F5F5"/>
+                    </a:solidFill>
+                  </a:tcPr>
+                </a:tc>
+                <a:tc>
+                  <a:txBody>
+                    <a:bodyPr/>
+                    <a:lstStyle/>
+                    <a:p>
+                      <a:pPr>
+                        <a:defRPr sz="900">
+                          <a:solidFill>
+                            <a:srgbClr val="333333"/>
+                          </a:solidFill>
+                          <a:latin typeface="Consolas"/>
+                        </a:defRPr>
+                      </a:pPr>
+                      <a:r>
+                        <a:t>ZDMS_UPLOAD_FILES_F01:~164</a:t>
+                      </a:r>
+                    </a:p>
+                  </a:txBody>
+                  <a:tcPr>
+                    <a:solidFill>
+                      <a:srgbClr val="F5F5F5"/>
+                    </a:solidFill>
+                  </a:tcPr>
+                </a:tc>
+              </a:tr>
+            </a:tbl>
+          </a:graphicData>
+        </a:graphic>
+      </p:graphicFrame>
       <p:sp>
         <p:nvSpPr>
           <p:cNvPr id="6" name="TextBox 5"/>
@@ -5153,7 +5853,7 @@
         </p:nvSpPr>
         <p:spPr>
           <a:xfrm>
-            <a:off x="3200400" y="868680"/>
+            <a:off x="3200400" y="5029200"/>
             <a:ext cx="8869680" cy="274320"/>
           </a:xfrm>
           <a:prstGeom prst="rect">
@@ -5168,15 +5868,15 @@
           <a:lstStyle/>
           <a:p>
             <a:pPr>
-              <a:defRPr sz="1000" b="0">
-                <a:solidFill>
-                  <a:srgbClr val="555555"/>
+              <a:defRPr sz="1000" b="1">
+                <a:solidFill>
+                  <a:srgbClr val="C83636"/>
                 </a:solidFill>
                 <a:latin typeface="Calibri"/>
               </a:defRPr>
             </a:pPr>
             <a:r>
-              <a:t>Source: ZDMS_UPLOAD_FILES_F01:~325</a:t>
+              <a:t>Representative #1: OS command execution via `SXPG_COMMAND_EXECUTE` (shell access)</a:t>
             </a:r>
           </a:p>
         </p:txBody>
@@ -5189,8 +5889,8 @@
         </p:nvSpPr>
         <p:spPr>
           <a:xfrm>
-            <a:off x="3200400" y="1280160"/>
-            <a:ext cx="8869680" cy="2286000"/>
+            <a:off x="3200400" y="5394960"/>
+            <a:ext cx="8869680" cy="1097280"/>
           </a:xfrm>
           <a:prstGeom prst="rect">
             <a:avLst/>
@@ -5206,7 +5906,7 @@
           <a:lstStyle/>
           <a:p>
             <a:pPr>
-              <a:defRPr sz="1200" b="0">
+              <a:defRPr sz="1000" b="0">
                 <a:solidFill>
                   <a:srgbClr val="333333"/>
                 </a:solidFill>
@@ -5219,7 +5919,7 @@
           </a:p>
           <a:p>
             <a:pPr>
-              <a:defRPr sz="1200" b="0">
+              <a:defRPr sz="1000" b="0">
                 <a:solidFill>
                   <a:srgbClr val="333333"/>
                 </a:solidFill>
@@ -5232,7 +5932,7 @@
           </a:p>
           <a:p>
             <a:pPr>
-              <a:defRPr sz="1200" b="0">
+              <a:defRPr sz="1000" b="0">
                 <a:solidFill>
                   <a:srgbClr val="333333"/>
                 </a:solidFill>
@@ -5245,7 +5945,7 @@
           </a:p>
           <a:p>
             <a:pPr>
-              <a:defRPr sz="1200" b="0">
+              <a:defRPr sz="1000" b="0">
                 <a:solidFill>
                   <a:srgbClr val="333333"/>
                 </a:solidFill>
@@ -5261,78 +5961,6 @@
       <p:sp>
         <p:nvSpPr>
           <p:cNvPr id="8" name="TextBox 7"/>
-          <p:cNvSpPr txBox="1"/>
-          <p:nvPr/>
-        </p:nvSpPr>
-        <p:spPr>
-          <a:xfrm>
-            <a:off x="3200400" y="4023360"/>
-            <a:ext cx="8869680" cy="914400"/>
-          </a:xfrm>
-          <a:prstGeom prst="rect">
-            <a:avLst/>
-          </a:prstGeom>
-          <a:noFill/>
-        </p:spPr>
-        <p:txBody>
-          <a:bodyPr wrap="square">
-            <a:spAutoFit/>
-          </a:bodyPr>
-          <a:lstStyle/>
-          <a:p>
-            <a:pPr>
-              <a:defRPr sz="1100" b="0">
-                <a:solidFill>
-                  <a:srgbClr val="333333"/>
-                </a:solidFill>
-                <a:latin typeface="Calibri"/>
-              </a:defRPr>
-            </a:pPr>
-            <a:r>
-              <a:t>Why: Executing external OS commands is not allowed for S/4HANA Clean Core / Cloud (shell access via SM69 commands).</a:t>
-            </a:r>
-          </a:p>
-        </p:txBody>
-      </p:sp>
-      <p:sp>
-        <p:nvSpPr>
-          <p:cNvPr id="9" name="TextBox 8"/>
-          <p:cNvSpPr txBox="1"/>
-          <p:nvPr/>
-        </p:nvSpPr>
-        <p:spPr>
-          <a:xfrm>
-            <a:off x="3200400" y="5303520"/>
-            <a:ext cx="8869680" cy="1097280"/>
-          </a:xfrm>
-          <a:prstGeom prst="rect">
-            <a:avLst/>
-          </a:prstGeom>
-          <a:noFill/>
-        </p:spPr>
-        <p:txBody>
-          <a:bodyPr wrap="square">
-            <a:spAutoFit/>
-          </a:bodyPr>
-          <a:lstStyle/>
-          <a:p>
-            <a:pPr>
-              <a:defRPr sz="1100" b="1">
-                <a:solidFill>
-                  <a:srgbClr val="418DFF"/>
-                </a:solidFill>
-                <a:latin typeface="Calibri"/>
-              </a:defRPr>
-            </a:pPr>
-            <a:r>
-              <a:t>Recommendation: Replace OS-command-based SFTP with a released integration approach (e.g., SAP Integration Suite / Cloud Connector, or an HTTP-based API using released ABAP HTTP clients to a managed endpoint). Avoid SM69/SXPG completely.</a:t>
-            </a:r>
-          </a:p>
-        </p:txBody>
-      </p:sp>
-      <p:sp>
-        <p:nvSpPr>
-          <p:cNvPr id="10" name="TextBox 9"/>
           <p:cNvSpPr txBox="1"/>
           <p:nvPr/>
         </p:nvSpPr>
@@ -5458,7 +6086,7 @@
               </a:defRPr>
             </a:pPr>
             <a:r>
-              <a:t>SECTION 02 · CLEANCORE</a:t>
+              <a:t>SECTION 02 · SECURITY</a:t>
             </a:r>
           </a:p>
         </p:txBody>
@@ -5494,7 +6122,7 @@
               </a:defRPr>
             </a:pPr>
             <a:r>
-              <a:t>AL11 file I/O</a:t>
+              <a:t>All Security findings</a:t>
             </a:r>
           </a:p>
           <a:p>
@@ -5512,47 +6140,529 @@
               </a:defRPr>
             </a:pPr>
             <a:r>
-              <a:t>Second CleanCore finding</a:t>
-            </a:r>
-          </a:p>
-        </p:txBody>
-      </p:sp>
-      <p:sp>
-        <p:nvSpPr>
-          <p:cNvPr id="5" name="TextBox 4"/>
-          <p:cNvSpPr txBox="1"/>
+              <a:t>4 findings (2 HIGH, 1 MEDIUM, 1 LOW)</a:t>
+            </a:r>
+          </a:p>
+        </p:txBody>
+      </p:sp>
+      <p:graphicFrame>
+        <p:nvGraphicFramePr>
+          <p:cNvPr id="5" name="Table 4"/>
+          <p:cNvGraphicFramePr>
+            <a:graphicFrameLocks noGrp="1"/>
+          </p:cNvGraphicFramePr>
           <p:nvPr/>
-        </p:nvSpPr>
-        <p:spPr>
-          <a:xfrm>
-            <a:off x="3200400" y="457200"/>
-            <a:ext cx="8869680" cy="365760"/>
-          </a:xfrm>
-          <a:prstGeom prst="rect">
-            <a:avLst/>
-          </a:prstGeom>
-          <a:noFill/>
-        </p:spPr>
-        <p:txBody>
-          <a:bodyPr wrap="square">
-            <a:spAutoFit/>
-          </a:bodyPr>
-          <a:lstStyle/>
-          <a:p>
-            <a:pPr>
-              <a:defRPr sz="1400" b="1">
-                <a:solidFill>
-                  <a:srgbClr val="C83636"/>
-                </a:solidFill>
-                <a:latin typeface="Calibri"/>
-              </a:defRPr>
-            </a:pPr>
-            <a:r>
-              <a:t>HIGH — OS command execution via `SXPG_COMMAND_EXECUTE` (shell access)</a:t>
-            </a:r>
-          </a:p>
-        </p:txBody>
-      </p:sp>
+        </p:nvGraphicFramePr>
+        <p:xfrm>
+          <a:off x="3200400" y="640080"/>
+          <a:ext cx="8869680" cy="2743200"/>
+        </p:xfrm>
+        <a:graphic>
+          <a:graphicData uri="http://schemas.openxmlformats.org/drawingml/2006/table">
+            <a:tbl>
+              <a:tblPr firstRow="1" bandRow="1">
+                <a:tableStyleId>{5C22544A-7EE6-4342-B048-85BDC9FD1C3A}</a:tableStyleId>
+              </a:tblPr>
+              <a:tblGrid>
+                <a:gridCol w="365760"/>
+                <a:gridCol w="640080"/>
+                <a:gridCol w="5029200"/>
+                <a:gridCol w="2834640"/>
+              </a:tblGrid>
+              <a:tr h="548640">
+                <a:tc>
+                  <a:txBody>
+                    <a:bodyPr/>
+                    <a:lstStyle/>
+                    <a:p>
+                      <a:pPr>
+                        <a:defRPr sz="1000" b="1">
+                          <a:solidFill>
+                            <a:srgbClr val="FFFFFF"/>
+                          </a:solidFill>
+                          <a:latin typeface="Calibri"/>
+                        </a:defRPr>
+                      </a:pPr>
+                      <a:r>
+                        <a:t>#</a:t>
+                      </a:r>
+                    </a:p>
+                  </a:txBody>
+                  <a:tcPr>
+                    <a:solidFill>
+                      <a:srgbClr val="161616"/>
+                    </a:solidFill>
+                  </a:tcPr>
+                </a:tc>
+                <a:tc>
+                  <a:txBody>
+                    <a:bodyPr/>
+                    <a:lstStyle/>
+                    <a:p>
+                      <a:pPr>
+                        <a:defRPr sz="1000" b="1">
+                          <a:solidFill>
+                            <a:srgbClr val="FFFFFF"/>
+                          </a:solidFill>
+                          <a:latin typeface="Calibri"/>
+                        </a:defRPr>
+                      </a:pPr>
+                      <a:r>
+                        <a:t>Sev</a:t>
+                      </a:r>
+                    </a:p>
+                  </a:txBody>
+                  <a:tcPr>
+                    <a:solidFill>
+                      <a:srgbClr val="161616"/>
+                    </a:solidFill>
+                  </a:tcPr>
+                </a:tc>
+                <a:tc>
+                  <a:txBody>
+                    <a:bodyPr/>
+                    <a:lstStyle/>
+                    <a:p>
+                      <a:pPr>
+                        <a:defRPr sz="1000" b="1">
+                          <a:solidFill>
+                            <a:srgbClr val="FFFFFF"/>
+                          </a:solidFill>
+                          <a:latin typeface="Calibri"/>
+                        </a:defRPr>
+                      </a:pPr>
+                      <a:r>
+                        <a:t>Finding title</a:t>
+                      </a:r>
+                    </a:p>
+                  </a:txBody>
+                  <a:tcPr>
+                    <a:solidFill>
+                      <a:srgbClr val="161616"/>
+                    </a:solidFill>
+                  </a:tcPr>
+                </a:tc>
+                <a:tc>
+                  <a:txBody>
+                    <a:bodyPr/>
+                    <a:lstStyle/>
+                    <a:p>
+                      <a:pPr>
+                        <a:defRPr sz="1000" b="1">
+                          <a:solidFill>
+                            <a:srgbClr val="FFFFFF"/>
+                          </a:solidFill>
+                          <a:latin typeface="Calibri"/>
+                        </a:defRPr>
+                      </a:pPr>
+                      <a:r>
+                        <a:t>Location</a:t>
+                      </a:r>
+                    </a:p>
+                  </a:txBody>
+                  <a:tcPr>
+                    <a:solidFill>
+                      <a:srgbClr val="161616"/>
+                    </a:solidFill>
+                  </a:tcPr>
+                </a:tc>
+              </a:tr>
+              <a:tr h="548640">
+                <a:tc>
+                  <a:txBody>
+                    <a:bodyPr/>
+                    <a:lstStyle/>
+                    <a:p>
+                      <a:pPr>
+                        <a:defRPr sz="900">
+                          <a:solidFill>
+                            <a:srgbClr val="333333"/>
+                          </a:solidFill>
+                          <a:latin typeface="Calibri"/>
+                        </a:defRPr>
+                      </a:pPr>
+                      <a:r>
+                        <a:t>1</a:t>
+                      </a:r>
+                    </a:p>
+                  </a:txBody>
+                  <a:tcPr>
+                    <a:solidFill>
+                      <a:srgbClr val="FFFFFF"/>
+                    </a:solidFill>
+                  </a:tcPr>
+                </a:tc>
+                <a:tc>
+                  <a:txBody>
+                    <a:bodyPr/>
+                    <a:lstStyle/>
+                    <a:p>
+                      <a:pPr>
+                        <a:defRPr sz="900" b="1">
+                          <a:solidFill>
+                            <a:srgbClr val="E67E22"/>
+                          </a:solidFill>
+                          <a:latin typeface="Calibri"/>
+                        </a:defRPr>
+                      </a:pPr>
+                      <a:r>
+                        <a:t>HIGH</a:t>
+                      </a:r>
+                    </a:p>
+                  </a:txBody>
+                  <a:tcPr>
+                    <a:solidFill>
+                      <a:srgbClr val="FFFFFF"/>
+                    </a:solidFill>
+                  </a:tcPr>
+                </a:tc>
+                <a:tc>
+                  <a:txBody>
+                    <a:bodyPr/>
+                    <a:lstStyle/>
+                    <a:p>
+                      <a:pPr>
+                        <a:defRPr sz="900">
+                          <a:solidFill>
+                            <a:srgbClr val="333333"/>
+                          </a:solidFill>
+                          <a:latin typeface="Calibri"/>
+                        </a:defRPr>
+                      </a:pPr>
+                      <a:r>
+                        <a:t>Missing explicit authorization check before OS command execution (SFTP GET)</a:t>
+                      </a:r>
+                    </a:p>
+                  </a:txBody>
+                  <a:tcPr>
+                    <a:solidFill>
+                      <a:srgbClr val="FFFFFF"/>
+                    </a:solidFill>
+                  </a:tcPr>
+                </a:tc>
+                <a:tc>
+                  <a:txBody>
+                    <a:bodyPr/>
+                    <a:lstStyle/>
+                    <a:p>
+                      <a:pPr>
+                        <a:defRPr sz="900">
+                          <a:solidFill>
+                            <a:srgbClr val="333333"/>
+                          </a:solidFill>
+                          <a:latin typeface="Consolas"/>
+                        </a:defRPr>
+                      </a:pPr>
+                      <a:r>
+                        <a:t>ZDMS_UPLOAD_FILES_F01:~250</a:t>
+                      </a:r>
+                    </a:p>
+                  </a:txBody>
+                  <a:tcPr>
+                    <a:solidFill>
+                      <a:srgbClr val="FFFFFF"/>
+                    </a:solidFill>
+                  </a:tcPr>
+                </a:tc>
+              </a:tr>
+              <a:tr h="548640">
+                <a:tc>
+                  <a:txBody>
+                    <a:bodyPr/>
+                    <a:lstStyle/>
+                    <a:p>
+                      <a:pPr>
+                        <a:defRPr sz="900">
+                          <a:solidFill>
+                            <a:srgbClr val="333333"/>
+                          </a:solidFill>
+                          <a:latin typeface="Calibri"/>
+                        </a:defRPr>
+                      </a:pPr>
+                      <a:r>
+                        <a:t>2</a:t>
+                      </a:r>
+                    </a:p>
+                  </a:txBody>
+                  <a:tcPr>
+                    <a:solidFill>
+                      <a:srgbClr val="F5F5F5"/>
+                    </a:solidFill>
+                  </a:tcPr>
+                </a:tc>
+                <a:tc>
+                  <a:txBody>
+                    <a:bodyPr/>
+                    <a:lstStyle/>
+                    <a:p>
+                      <a:pPr>
+                        <a:defRPr sz="900" b="1">
+                          <a:solidFill>
+                            <a:srgbClr val="E67E22"/>
+                          </a:solidFill>
+                          <a:latin typeface="Calibri"/>
+                        </a:defRPr>
+                      </a:pPr>
+                      <a:r>
+                        <a:t>HIGH</a:t>
+                      </a:r>
+                    </a:p>
+                  </a:txBody>
+                  <a:tcPr>
+                    <a:solidFill>
+                      <a:srgbClr val="F5F5F5"/>
+                    </a:solidFill>
+                  </a:tcPr>
+                </a:tc>
+                <a:tc>
+                  <a:txBody>
+                    <a:bodyPr/>
+                    <a:lstStyle/>
+                    <a:p>
+                      <a:pPr>
+                        <a:defRPr sz="900">
+                          <a:solidFill>
+                            <a:srgbClr val="333333"/>
+                          </a:solidFill>
+                          <a:latin typeface="Calibri"/>
+                        </a:defRPr>
+                      </a:pPr>
+                      <a:r>
+                        <a:t>Missing explicit authorization check before OS command execution (SFTP PUT)</a:t>
+                      </a:r>
+                    </a:p>
+                  </a:txBody>
+                  <a:tcPr>
+                    <a:solidFill>
+                      <a:srgbClr val="F5F5F5"/>
+                    </a:solidFill>
+                  </a:tcPr>
+                </a:tc>
+                <a:tc>
+                  <a:txBody>
+                    <a:bodyPr/>
+                    <a:lstStyle/>
+                    <a:p>
+                      <a:pPr>
+                        <a:defRPr sz="900">
+                          <a:solidFill>
+                            <a:srgbClr val="333333"/>
+                          </a:solidFill>
+                          <a:latin typeface="Consolas"/>
+                        </a:defRPr>
+                      </a:pPr>
+                      <a:r>
+                        <a:t>ZDMS_UPLOAD_FILES_F01:~320</a:t>
+                      </a:r>
+                    </a:p>
+                  </a:txBody>
+                  <a:tcPr>
+                    <a:solidFill>
+                      <a:srgbClr val="F5F5F5"/>
+                    </a:solidFill>
+                  </a:tcPr>
+                </a:tc>
+              </a:tr>
+              <a:tr h="548640">
+                <a:tc>
+                  <a:txBody>
+                    <a:bodyPr/>
+                    <a:lstStyle/>
+                    <a:p>
+                      <a:pPr>
+                        <a:defRPr sz="900">
+                          <a:solidFill>
+                            <a:srgbClr val="333333"/>
+                          </a:solidFill>
+                          <a:latin typeface="Calibri"/>
+                        </a:defRPr>
+                      </a:pPr>
+                      <a:r>
+                        <a:t>3</a:t>
+                      </a:r>
+                    </a:p>
+                  </a:txBody>
+                  <a:tcPr>
+                    <a:solidFill>
+                      <a:srgbClr val="FFFFFF"/>
+                    </a:solidFill>
+                  </a:tcPr>
+                </a:tc>
+                <a:tc>
+                  <a:txBody>
+                    <a:bodyPr/>
+                    <a:lstStyle/>
+                    <a:p>
+                      <a:pPr>
+                        <a:defRPr sz="900" b="1">
+                          <a:solidFill>
+                            <a:srgbClr val="CC9900"/>
+                          </a:solidFill>
+                          <a:latin typeface="Calibri"/>
+                        </a:defRPr>
+                      </a:pPr>
+                      <a:r>
+                        <a:t>MEDIUM</a:t>
+                      </a:r>
+                    </a:p>
+                  </a:txBody>
+                  <a:tcPr>
+                    <a:solidFill>
+                      <a:srgbClr val="FFFFFF"/>
+                    </a:solidFill>
+                  </a:tcPr>
+                </a:tc>
+                <a:tc>
+                  <a:txBody>
+                    <a:bodyPr/>
+                    <a:lstStyle/>
+                    <a:p>
+                      <a:pPr>
+                        <a:defRPr sz="900">
+                          <a:solidFill>
+                            <a:srgbClr val="333333"/>
+                          </a:solidFill>
+                          <a:latin typeface="Calibri"/>
+                        </a:defRPr>
+                      </a:pPr>
+                      <a:r>
+                        <a:t>Shell-injection risk: building `additional_parameters` via concatenation of configurable values</a:t>
+                      </a:r>
+                    </a:p>
+                  </a:txBody>
+                  <a:tcPr>
+                    <a:solidFill>
+                      <a:srgbClr val="FFFFFF"/>
+                    </a:solidFill>
+                  </a:tcPr>
+                </a:tc>
+                <a:tc>
+                  <a:txBody>
+                    <a:bodyPr/>
+                    <a:lstStyle/>
+                    <a:p>
+                      <a:pPr>
+                        <a:defRPr sz="900">
+                          <a:solidFill>
+                            <a:srgbClr val="333333"/>
+                          </a:solidFill>
+                          <a:latin typeface="Consolas"/>
+                        </a:defRPr>
+                      </a:pPr>
+                      <a:r>
+                        <a:t>ZDMS_UPLOAD_FILES_F01:~420</a:t>
+                      </a:r>
+                    </a:p>
+                  </a:txBody>
+                  <a:tcPr>
+                    <a:solidFill>
+                      <a:srgbClr val="FFFFFF"/>
+                    </a:solidFill>
+                  </a:tcPr>
+                </a:tc>
+              </a:tr>
+              <a:tr h="548640">
+                <a:tc>
+                  <a:txBody>
+                    <a:bodyPr/>
+                    <a:lstStyle/>
+                    <a:p>
+                      <a:pPr>
+                        <a:defRPr sz="900">
+                          <a:solidFill>
+                            <a:srgbClr val="333333"/>
+                          </a:solidFill>
+                          <a:latin typeface="Calibri"/>
+                        </a:defRPr>
+                      </a:pPr>
+                      <a:r>
+                        <a:t>4</a:t>
+                      </a:r>
+                    </a:p>
+                  </a:txBody>
+                  <a:tcPr>
+                    <a:solidFill>
+                      <a:srgbClr val="F5F5F5"/>
+                    </a:solidFill>
+                  </a:tcPr>
+                </a:tc>
+                <a:tc>
+                  <a:txBody>
+                    <a:bodyPr/>
+                    <a:lstStyle/>
+                    <a:p>
+                      <a:pPr>
+                        <a:defRPr sz="900" b="1">
+                          <a:solidFill>
+                            <a:srgbClr val="707070"/>
+                          </a:solidFill>
+                          <a:latin typeface="Calibri"/>
+                        </a:defRPr>
+                      </a:pPr>
+                      <a:r>
+                        <a:t>LOW</a:t>
+                      </a:r>
+                    </a:p>
+                  </a:txBody>
+                  <a:tcPr>
+                    <a:solidFill>
+                      <a:srgbClr val="F5F5F5"/>
+                    </a:solidFill>
+                  </a:tcPr>
+                </a:tc>
+                <a:tc>
+                  <a:txBody>
+                    <a:bodyPr/>
+                    <a:lstStyle/>
+                    <a:p>
+                      <a:pPr>
+                        <a:defRPr sz="900">
+                          <a:solidFill>
+                            <a:srgbClr val="333333"/>
+                          </a:solidFill>
+                          <a:latin typeface="Calibri"/>
+                        </a:defRPr>
+                      </a:pPr>
+                      <a:r>
+                        <a:t>Sensitive operational details may be exposed via plain report output</a:t>
+                      </a:r>
+                    </a:p>
+                  </a:txBody>
+                  <a:tcPr>
+                    <a:solidFill>
+                      <a:srgbClr val="F5F5F5"/>
+                    </a:solidFill>
+                  </a:tcPr>
+                </a:tc>
+                <a:tc>
+                  <a:txBody>
+                    <a:bodyPr/>
+                    <a:lstStyle/>
+                    <a:p>
+                      <a:pPr>
+                        <a:defRPr sz="900">
+                          <a:solidFill>
+                            <a:srgbClr val="333333"/>
+                          </a:solidFill>
+                          <a:latin typeface="Consolas"/>
+                        </a:defRPr>
+                      </a:pPr>
+                      <a:r>
+                        <a:t>ZDMS_UPLOAD_FILES_F01:~385</a:t>
+                      </a:r>
+                    </a:p>
+                  </a:txBody>
+                  <a:tcPr>
+                    <a:solidFill>
+                      <a:srgbClr val="F5F5F5"/>
+                    </a:solidFill>
+                  </a:tcPr>
+                </a:tc>
+              </a:tr>
+            </a:tbl>
+          </a:graphicData>
+        </a:graphic>
+      </p:graphicFrame>
       <p:sp>
         <p:nvSpPr>
           <p:cNvPr id="6" name="TextBox 5"/>
@@ -5561,7 +6671,7 @@
         </p:nvSpPr>
         <p:spPr>
           <a:xfrm>
-            <a:off x="3200400" y="868680"/>
+            <a:off x="3200400" y="3657600"/>
             <a:ext cx="8869680" cy="274320"/>
           </a:xfrm>
           <a:prstGeom prst="rect">
@@ -5576,15 +6686,15 @@
           <a:lstStyle/>
           <a:p>
             <a:pPr>
-              <a:defRPr sz="1000" b="0">
-                <a:solidFill>
-                  <a:srgbClr val="555555"/>
+              <a:defRPr sz="1000" b="1">
+                <a:solidFill>
+                  <a:srgbClr val="E67E22"/>
                 </a:solidFill>
                 <a:latin typeface="Calibri"/>
               </a:defRPr>
             </a:pPr>
             <a:r>
-              <a:t>Source: ZDMS_UPLOAD_FILES_F01:~388</a:t>
+              <a:t>Representative #1: Missing explicit authorization check before OS command execution (SFTP GET)</a:t>
             </a:r>
           </a:p>
         </p:txBody>
@@ -5597,8 +6707,8 @@
         </p:nvSpPr>
         <p:spPr>
           <a:xfrm>
-            <a:off x="3200400" y="1280160"/>
-            <a:ext cx="8869680" cy="2286000"/>
+            <a:off x="3200400" y="4023360"/>
+            <a:ext cx="8869680" cy="1280160"/>
           </a:xfrm>
           <a:prstGeom prst="rect">
             <a:avLst/>
@@ -5614,7 +6724,7 @@
           <a:lstStyle/>
           <a:p>
             <a:pPr>
-              <a:defRPr sz="1200" b="0">
+              <a:defRPr sz="1000" b="0">
                 <a:solidFill>
                   <a:srgbClr val="333333"/>
                 </a:solidFill>
@@ -5627,7 +6737,7 @@
           </a:p>
           <a:p>
             <a:pPr>
-              <a:defRPr sz="1200" b="0">
+              <a:defRPr sz="1000" b="0">
                 <a:solidFill>
                   <a:srgbClr val="333333"/>
                 </a:solidFill>
@@ -5640,7 +6750,7 @@
           </a:p>
           <a:p>
             <a:pPr>
-              <a:defRPr sz="1200" b="0">
+              <a:defRPr sz="1000" b="0">
                 <a:solidFill>
                   <a:srgbClr val="333333"/>
                 </a:solidFill>
@@ -5648,12 +6758,12 @@
               </a:defRPr>
             </a:pPr>
             <a:r>
-              <a:t>    commandname                   = lv_comm</a:t>
+              <a:t>    commandname           = lv_comm</a:t>
             </a:r>
           </a:p>
           <a:p>
             <a:pPr>
-              <a:defRPr sz="1200" b="0">
+              <a:defRPr sz="1000" b="0">
                 <a:solidFill>
                   <a:srgbClr val="333333"/>
                 </a:solidFill>
@@ -5661,7 +6771,7 @@
               </a:defRPr>
             </a:pPr>
             <a:r>
-              <a:t>    additional_parameters         = gv_param</a:t>
+              <a:t>    additional_parameters = gv_param</a:t>
             </a:r>
           </a:p>
         </p:txBody>
@@ -5674,8 +6784,8 @@
         </p:nvSpPr>
         <p:spPr>
           <a:xfrm>
-            <a:off x="3200400" y="4023360"/>
-            <a:ext cx="8869680" cy="914400"/>
+            <a:off x="3200400" y="5486400"/>
+            <a:ext cx="8869680" cy="822960"/>
           </a:xfrm>
           <a:prstGeom prst="rect">
             <a:avLst/>
@@ -5689,7 +6799,7 @@
           <a:lstStyle/>
           <a:p>
             <a:pPr>
-              <a:defRPr sz="1100" b="0">
+              <a:defRPr sz="1000" b="0">
                 <a:solidFill>
                   <a:srgbClr val="333333"/>
                 </a:solidFill>
@@ -5697,7 +6807,30 @@
               </a:defRPr>
             </a:pPr>
             <a:r>
-              <a:t>Why: Executing external OS commands is not allowed for S/4HANA Clean Core / Cloud (shell access via SM69 commands).</a:t>
+              <a:t>Why: `SXPG_COMMAND_EXECUTE` triggers execution of an external OS command; there is no explicit `AUTHORITY-CHECK` (e.g., `S_LOG_COM` / `S_RZL_ADM` depending on setup) before this sensitive operation.</a:t>
+            </a:r>
+          </a:p>
+          <a:p>
+            <a:pPr>
+              <a:defRPr sz="1000" b="0">
+                <a:solidFill>
+                  <a:srgbClr val="333333"/>
+                </a:solidFill>
+                <a:latin typeface="Calibri"/>
+              </a:defRPr>
+            </a:pPr>
+          </a:p>
+          <a:p>
+            <a:pPr>
+              <a:defRPr sz="1000" b="0">
+                <a:solidFill>
+                  <a:srgbClr val="333333"/>
+                </a:solidFill>
+                <a:latin typeface="Calibri"/>
+              </a:defRPr>
+            </a:pPr>
+            <a:r>
+              <a:t>Recommendation: Add an explicit `AUTHORITY-CHECK` before calling `SXPG_COMMAND_EXECUTE` (and fail closed). Also restrict allowed commands in SM69 and ensure the command is defined with “Additional parameters not allowed” where possible.</a:t>
             </a:r>
           </a:p>
         </p:txBody>
@@ -5705,42 +6838,6 @@
       <p:sp>
         <p:nvSpPr>
           <p:cNvPr id="9" name="TextBox 8"/>
-          <p:cNvSpPr txBox="1"/>
-          <p:nvPr/>
-        </p:nvSpPr>
-        <p:spPr>
-          <a:xfrm>
-            <a:off x="3200400" y="5303520"/>
-            <a:ext cx="8869680" cy="1097280"/>
-          </a:xfrm>
-          <a:prstGeom prst="rect">
-            <a:avLst/>
-          </a:prstGeom>
-          <a:noFill/>
-        </p:spPr>
-        <p:txBody>
-          <a:bodyPr wrap="square">
-            <a:spAutoFit/>
-          </a:bodyPr>
-          <a:lstStyle/>
-          <a:p>
-            <a:pPr>
-              <a:defRPr sz="1100" b="1">
-                <a:solidFill>
-                  <a:srgbClr val="418DFF"/>
-                </a:solidFill>
-                <a:latin typeface="Calibri"/>
-              </a:defRPr>
-            </a:pPr>
-            <a:r>
-              <a:t>Recommendation: Same as above—move file transfer out of the ABAP app server OS layer and use a released connectivity/integration mechanism.</a:t>
-            </a:r>
-          </a:p>
-        </p:txBody>
-      </p:sp>
-      <p:sp>
-        <p:nvSpPr>
-          <p:cNvPr id="10" name="TextBox 9"/>
           <p:cNvSpPr txBox="1"/>
           <p:nvPr/>
         </p:nvSpPr>
@@ -5866,7 +6963,7 @@
               </a:defRPr>
             </a:pPr>
             <a:r>
-              <a:t>SECTION 02 · SECURITY</a:t>
+              <a:t>SECTION 02 · PERFORMANCE</a:t>
             </a:r>
           </a:p>
         </p:txBody>
@@ -5902,7 +6999,7 @@
               </a:defRPr>
             </a:pPr>
             <a:r>
-              <a:t>Missing AUTHORITY-CHECK</a:t>
+              <a:t>All Performance findings</a:t>
             </a:r>
           </a:p>
           <a:p>
@@ -5920,47 +7017,529 @@
               </a:defRPr>
             </a:pPr>
             <a:r>
-              <a:t>Top security finding</a:t>
-            </a:r>
-          </a:p>
-        </p:txBody>
-      </p:sp>
-      <p:sp>
-        <p:nvSpPr>
-          <p:cNvPr id="5" name="TextBox 4"/>
-          <p:cNvSpPr txBox="1"/>
+              <a:t>4 findings (2 HIGH, 2 MEDIUM)</a:t>
+            </a:r>
+          </a:p>
+        </p:txBody>
+      </p:sp>
+      <p:graphicFrame>
+        <p:nvGraphicFramePr>
+          <p:cNvPr id="5" name="Table 4"/>
+          <p:cNvGraphicFramePr>
+            <a:graphicFrameLocks noGrp="1"/>
+          </p:cNvGraphicFramePr>
           <p:nvPr/>
-        </p:nvSpPr>
-        <p:spPr>
-          <a:xfrm>
-            <a:off x="3200400" y="457200"/>
-            <a:ext cx="8869680" cy="365760"/>
-          </a:xfrm>
-          <a:prstGeom prst="rect">
-            <a:avLst/>
-          </a:prstGeom>
-          <a:noFill/>
-        </p:spPr>
-        <p:txBody>
-          <a:bodyPr wrap="square">
-            <a:spAutoFit/>
-          </a:bodyPr>
-          <a:lstStyle/>
-          <a:p>
-            <a:pPr>
-              <a:defRPr sz="1400" b="1">
-                <a:solidFill>
-                  <a:srgbClr val="C83636"/>
-                </a:solidFill>
-                <a:latin typeface="Calibri"/>
-              </a:defRPr>
-            </a:pPr>
-            <a:r>
-              <a:t>HIGH — Missing explicit authorization check before OS command execution (SFTP GET)</a:t>
-            </a:r>
-          </a:p>
-        </p:txBody>
-      </p:sp>
+        </p:nvGraphicFramePr>
+        <p:xfrm>
+          <a:off x="3200400" y="640080"/>
+          <a:ext cx="8869680" cy="2743200"/>
+        </p:xfrm>
+        <a:graphic>
+          <a:graphicData uri="http://schemas.openxmlformats.org/drawingml/2006/table">
+            <a:tbl>
+              <a:tblPr firstRow="1" bandRow="1">
+                <a:tableStyleId>{5C22544A-7EE6-4342-B048-85BDC9FD1C3A}</a:tableStyleId>
+              </a:tblPr>
+              <a:tblGrid>
+                <a:gridCol w="365760"/>
+                <a:gridCol w="640080"/>
+                <a:gridCol w="5029200"/>
+                <a:gridCol w="2834640"/>
+              </a:tblGrid>
+              <a:tr h="548640">
+                <a:tc>
+                  <a:txBody>
+                    <a:bodyPr/>
+                    <a:lstStyle/>
+                    <a:p>
+                      <a:pPr>
+                        <a:defRPr sz="1000" b="1">
+                          <a:solidFill>
+                            <a:srgbClr val="FFFFFF"/>
+                          </a:solidFill>
+                          <a:latin typeface="Calibri"/>
+                        </a:defRPr>
+                      </a:pPr>
+                      <a:r>
+                        <a:t>#</a:t>
+                      </a:r>
+                    </a:p>
+                  </a:txBody>
+                  <a:tcPr>
+                    <a:solidFill>
+                      <a:srgbClr val="161616"/>
+                    </a:solidFill>
+                  </a:tcPr>
+                </a:tc>
+                <a:tc>
+                  <a:txBody>
+                    <a:bodyPr/>
+                    <a:lstStyle/>
+                    <a:p>
+                      <a:pPr>
+                        <a:defRPr sz="1000" b="1">
+                          <a:solidFill>
+                            <a:srgbClr val="FFFFFF"/>
+                          </a:solidFill>
+                          <a:latin typeface="Calibri"/>
+                        </a:defRPr>
+                      </a:pPr>
+                      <a:r>
+                        <a:t>Sev</a:t>
+                      </a:r>
+                    </a:p>
+                  </a:txBody>
+                  <a:tcPr>
+                    <a:solidFill>
+                      <a:srgbClr val="161616"/>
+                    </a:solidFill>
+                  </a:tcPr>
+                </a:tc>
+                <a:tc>
+                  <a:txBody>
+                    <a:bodyPr/>
+                    <a:lstStyle/>
+                    <a:p>
+                      <a:pPr>
+                        <a:defRPr sz="1000" b="1">
+                          <a:solidFill>
+                            <a:srgbClr val="FFFFFF"/>
+                          </a:solidFill>
+                          <a:latin typeface="Calibri"/>
+                        </a:defRPr>
+                      </a:pPr>
+                      <a:r>
+                        <a:t>Finding title</a:t>
+                      </a:r>
+                    </a:p>
+                  </a:txBody>
+                  <a:tcPr>
+                    <a:solidFill>
+                      <a:srgbClr val="161616"/>
+                    </a:solidFill>
+                  </a:tcPr>
+                </a:tc>
+                <a:tc>
+                  <a:txBody>
+                    <a:bodyPr/>
+                    <a:lstStyle/>
+                    <a:p>
+                      <a:pPr>
+                        <a:defRPr sz="1000" b="1">
+                          <a:solidFill>
+                            <a:srgbClr val="FFFFFF"/>
+                          </a:solidFill>
+                          <a:latin typeface="Calibri"/>
+                        </a:defRPr>
+                      </a:pPr>
+                      <a:r>
+                        <a:t>Location</a:t>
+                      </a:r>
+                    </a:p>
+                  </a:txBody>
+                  <a:tcPr>
+                    <a:solidFill>
+                      <a:srgbClr val="161616"/>
+                    </a:solidFill>
+                  </a:tcPr>
+                </a:tc>
+              </a:tr>
+              <a:tr h="548640">
+                <a:tc>
+                  <a:txBody>
+                    <a:bodyPr/>
+                    <a:lstStyle/>
+                    <a:p>
+                      <a:pPr>
+                        <a:defRPr sz="900">
+                          <a:solidFill>
+                            <a:srgbClr val="333333"/>
+                          </a:solidFill>
+                          <a:latin typeface="Calibri"/>
+                        </a:defRPr>
+                      </a:pPr>
+                      <a:r>
+                        <a:t>1</a:t>
+                      </a:r>
+                    </a:p>
+                  </a:txBody>
+                  <a:tcPr>
+                    <a:solidFill>
+                      <a:srgbClr val="FFFFFF"/>
+                    </a:solidFill>
+                  </a:tcPr>
+                </a:tc>
+                <a:tc>
+                  <a:txBody>
+                    <a:bodyPr/>
+                    <a:lstStyle/>
+                    <a:p>
+                      <a:pPr>
+                        <a:defRPr sz="900" b="1">
+                          <a:solidFill>
+                            <a:srgbClr val="CC9900"/>
+                          </a:solidFill>
+                          <a:latin typeface="Calibri"/>
+                        </a:defRPr>
+                      </a:pPr>
+                      <a:r>
+                        <a:t>MEDIUM</a:t>
+                      </a:r>
+                    </a:p>
+                  </a:txBody>
+                  <a:tcPr>
+                    <a:solidFill>
+                      <a:srgbClr val="FFFFFF"/>
+                    </a:solidFill>
+                  </a:tcPr>
+                </a:tc>
+                <a:tc>
+                  <a:txBody>
+                    <a:bodyPr/>
+                    <a:lstStyle/>
+                    <a:p>
+                      <a:pPr>
+                        <a:defRPr sz="900">
+                          <a:solidFill>
+                            <a:srgbClr val="333333"/>
+                          </a:solidFill>
+                          <a:latin typeface="Calibri"/>
+                        </a:defRPr>
+                      </a:pPr>
+                      <a:r>
+                        <a:t>`SELECT *` from TVARVC (unnecessary wide fetch)</a:t>
+                      </a:r>
+                    </a:p>
+                  </a:txBody>
+                  <a:tcPr>
+                    <a:solidFill>
+                      <a:srgbClr val="FFFFFF"/>
+                    </a:solidFill>
+                  </a:tcPr>
+                </a:tc>
+                <a:tc>
+                  <a:txBody>
+                    <a:bodyPr/>
+                    <a:lstStyle/>
+                    <a:p>
+                      <a:pPr>
+                        <a:defRPr sz="900">
+                          <a:solidFill>
+                            <a:srgbClr val="333333"/>
+                          </a:solidFill>
+                          <a:latin typeface="Consolas"/>
+                        </a:defRPr>
+                      </a:pPr>
+                      <a:r>
+                        <a:t>ZDMS_UPLOAD_FILES_F01:~120</a:t>
+                      </a:r>
+                    </a:p>
+                  </a:txBody>
+                  <a:tcPr>
+                    <a:solidFill>
+                      <a:srgbClr val="FFFFFF"/>
+                    </a:solidFill>
+                  </a:tcPr>
+                </a:tc>
+              </a:tr>
+              <a:tr h="548640">
+                <a:tc>
+                  <a:txBody>
+                    <a:bodyPr/>
+                    <a:lstStyle/>
+                    <a:p>
+                      <a:pPr>
+                        <a:defRPr sz="900">
+                          <a:solidFill>
+                            <a:srgbClr val="333333"/>
+                          </a:solidFill>
+                          <a:latin typeface="Calibri"/>
+                        </a:defRPr>
+                      </a:pPr>
+                      <a:r>
+                        <a:t>2</a:t>
+                      </a:r>
+                    </a:p>
+                  </a:txBody>
+                  <a:tcPr>
+                    <a:solidFill>
+                      <a:srgbClr val="F5F5F5"/>
+                    </a:solidFill>
+                  </a:tcPr>
+                </a:tc>
+                <a:tc>
+                  <a:txBody>
+                    <a:bodyPr/>
+                    <a:lstStyle/>
+                    <a:p>
+                      <a:pPr>
+                        <a:defRPr sz="900" b="1">
+                          <a:solidFill>
+                            <a:srgbClr val="CC9900"/>
+                          </a:solidFill>
+                          <a:latin typeface="Calibri"/>
+                        </a:defRPr>
+                      </a:pPr>
+                      <a:r>
+                        <a:t>MEDIUM</a:t>
+                      </a:r>
+                    </a:p>
+                  </a:txBody>
+                  <a:tcPr>
+                    <a:solidFill>
+                      <a:srgbClr val="F5F5F5"/>
+                    </a:solidFill>
+                  </a:tcPr>
+                </a:tc>
+                <a:tc>
+                  <a:txBody>
+                    <a:bodyPr/>
+                    <a:lstStyle/>
+                    <a:p>
+                      <a:pPr>
+                        <a:defRPr sz="900">
+                          <a:solidFill>
+                            <a:srgbClr val="333333"/>
+                          </a:solidFill>
+                          <a:latin typeface="Calibri"/>
+                        </a:defRPr>
+                      </a:pPr>
+                      <a:r>
+                        <a:t>`SELECT *` from DMS_DOC_FILES (potentially wide table)</a:t>
+                      </a:r>
+                    </a:p>
+                  </a:txBody>
+                  <a:tcPr>
+                    <a:solidFill>
+                      <a:srgbClr val="F5F5F5"/>
+                    </a:solidFill>
+                  </a:tcPr>
+                </a:tc>
+                <a:tc>
+                  <a:txBody>
+                    <a:bodyPr/>
+                    <a:lstStyle/>
+                    <a:p>
+                      <a:pPr>
+                        <a:defRPr sz="900">
+                          <a:solidFill>
+                            <a:srgbClr val="333333"/>
+                          </a:solidFill>
+                          <a:latin typeface="Consolas"/>
+                        </a:defRPr>
+                      </a:pPr>
+                      <a:r>
+                        <a:t>ZDMS_UPLOAD_FILES_F01:~150</a:t>
+                      </a:r>
+                    </a:p>
+                  </a:txBody>
+                  <a:tcPr>
+                    <a:solidFill>
+                      <a:srgbClr val="F5F5F5"/>
+                    </a:solidFill>
+                  </a:tcPr>
+                </a:tc>
+              </a:tr>
+              <a:tr h="548640">
+                <a:tc>
+                  <a:txBody>
+                    <a:bodyPr/>
+                    <a:lstStyle/>
+                    <a:p>
+                      <a:pPr>
+                        <a:defRPr sz="900">
+                          <a:solidFill>
+                            <a:srgbClr val="333333"/>
+                          </a:solidFill>
+                          <a:latin typeface="Calibri"/>
+                        </a:defRPr>
+                      </a:pPr>
+                      <a:r>
+                        <a:t>3</a:t>
+                      </a:r>
+                    </a:p>
+                  </a:txBody>
+                  <a:tcPr>
+                    <a:solidFill>
+                      <a:srgbClr val="FFFFFF"/>
+                    </a:solidFill>
+                  </a:tcPr>
+                </a:tc>
+                <a:tc>
+                  <a:txBody>
+                    <a:bodyPr/>
+                    <a:lstStyle/>
+                    <a:p>
+                      <a:pPr>
+                        <a:defRPr sz="900" b="1">
+                          <a:solidFill>
+                            <a:srgbClr val="E67E22"/>
+                          </a:solidFill>
+                          <a:latin typeface="Calibri"/>
+                        </a:defRPr>
+                      </a:pPr>
+                      <a:r>
+                        <a:t>HIGH</a:t>
+                      </a:r>
+                    </a:p>
+                  </a:txBody>
+                  <a:tcPr>
+                    <a:solidFill>
+                      <a:srgbClr val="FFFFFF"/>
+                    </a:solidFill>
+                  </a:tcPr>
+                </a:tc>
+                <a:tc>
+                  <a:txBody>
+                    <a:bodyPr/>
+                    <a:lstStyle/>
+                    <a:p>
+                      <a:pPr>
+                        <a:defRPr sz="900">
+                          <a:solidFill>
+                            <a:srgbClr val="333333"/>
+                          </a:solidFill>
+                          <a:latin typeface="Calibri"/>
+                        </a:defRPr>
+                      </a:pPr>
+                      <a:r>
+                        <a:t>Repeated function/module calls inside loop (FORMAT_MESSAGE)</a:t>
+                      </a:r>
+                    </a:p>
+                  </a:txBody>
+                  <a:tcPr>
+                    <a:solidFill>
+                      <a:srgbClr val="FFFFFF"/>
+                    </a:solidFill>
+                  </a:tcPr>
+                </a:tc>
+                <a:tc>
+                  <a:txBody>
+                    <a:bodyPr/>
+                    <a:lstStyle/>
+                    <a:p>
+                      <a:pPr>
+                        <a:defRPr sz="900">
+                          <a:solidFill>
+                            <a:srgbClr val="333333"/>
+                          </a:solidFill>
+                          <a:latin typeface="Consolas"/>
+                        </a:defRPr>
+                      </a:pPr>
+                      <a:r>
+                        <a:t>ZDMS_UPLOAD_FILES_F01:~235</a:t>
+                      </a:r>
+                    </a:p>
+                  </a:txBody>
+                  <a:tcPr>
+                    <a:solidFill>
+                      <a:srgbClr val="FFFFFF"/>
+                    </a:solidFill>
+                  </a:tcPr>
+                </a:tc>
+              </a:tr>
+              <a:tr h="548640">
+                <a:tc>
+                  <a:txBody>
+                    <a:bodyPr/>
+                    <a:lstStyle/>
+                    <a:p>
+                      <a:pPr>
+                        <a:defRPr sz="900">
+                          <a:solidFill>
+                            <a:srgbClr val="333333"/>
+                          </a:solidFill>
+                          <a:latin typeface="Calibri"/>
+                        </a:defRPr>
+                      </a:pPr>
+                      <a:r>
+                        <a:t>4</a:t>
+                      </a:r>
+                    </a:p>
+                  </a:txBody>
+                  <a:tcPr>
+                    <a:solidFill>
+                      <a:srgbClr val="F5F5F5"/>
+                    </a:solidFill>
+                  </a:tcPr>
+                </a:tc>
+                <a:tc>
+                  <a:txBody>
+                    <a:bodyPr/>
+                    <a:lstStyle/>
+                    <a:p>
+                      <a:pPr>
+                        <a:defRPr sz="900" b="1">
+                          <a:solidFill>
+                            <a:srgbClr val="E67E22"/>
+                          </a:solidFill>
+                          <a:latin typeface="Calibri"/>
+                        </a:defRPr>
+                      </a:pPr>
+                      <a:r>
+                        <a:t>HIGH</a:t>
+                      </a:r>
+                    </a:p>
+                  </a:txBody>
+                  <a:tcPr>
+                    <a:solidFill>
+                      <a:srgbClr val="F5F5F5"/>
+                    </a:solidFill>
+                  </a:tcPr>
+                </a:tc>
+                <a:tc>
+                  <a:txBody>
+                    <a:bodyPr/>
+                    <a:lstStyle/>
+                    <a:p>
+                      <a:pPr>
+                        <a:defRPr sz="900">
+                          <a:solidFill>
+                            <a:srgbClr val="333333"/>
+                          </a:solidFill>
+                          <a:latin typeface="Calibri"/>
+                        </a:defRPr>
+                      </a:pPr>
+                      <a:r>
+                        <a:t>Repeated function/module calls inside loop (ZDMS_UPLOAD_DOCUMENTS)</a:t>
+                      </a:r>
+                    </a:p>
+                  </a:txBody>
+                  <a:tcPr>
+                    <a:solidFill>
+                      <a:srgbClr val="F5F5F5"/>
+                    </a:solidFill>
+                  </a:tcPr>
+                </a:tc>
+                <a:tc>
+                  <a:txBody>
+                    <a:bodyPr/>
+                    <a:lstStyle/>
+                    <a:p>
+                      <a:pPr>
+                        <a:defRPr sz="900">
+                          <a:solidFill>
+                            <a:srgbClr val="333333"/>
+                          </a:solidFill>
+                          <a:latin typeface="Consolas"/>
+                        </a:defRPr>
+                      </a:pPr>
+                      <a:r>
+                        <a:t>ZDMS_UPLOAD_FILES_F01:~205</a:t>
+                      </a:r>
+                    </a:p>
+                  </a:txBody>
+                  <a:tcPr>
+                    <a:solidFill>
+                      <a:srgbClr val="F5F5F5"/>
+                    </a:solidFill>
+                  </a:tcPr>
+                </a:tc>
+              </a:tr>
+            </a:tbl>
+          </a:graphicData>
+        </a:graphic>
+      </p:graphicFrame>
       <p:sp>
         <p:nvSpPr>
           <p:cNvPr id="6" name="TextBox 5"/>
@@ -5969,7 +7548,7 @@
         </p:nvSpPr>
         <p:spPr>
           <a:xfrm>
-            <a:off x="3200400" y="868680"/>
+            <a:off x="3200400" y="3657600"/>
             <a:ext cx="8869680" cy="274320"/>
           </a:xfrm>
           <a:prstGeom prst="rect">
@@ -5984,15 +7563,15 @@
           <a:lstStyle/>
           <a:p>
             <a:pPr>
-              <a:defRPr sz="1000" b="0">
-                <a:solidFill>
-                  <a:srgbClr val="555555"/>
+              <a:defRPr sz="1000" b="1">
+                <a:solidFill>
+                  <a:srgbClr val="E67E22"/>
                 </a:solidFill>
                 <a:latin typeface="Calibri"/>
               </a:defRPr>
             </a:pPr>
             <a:r>
-              <a:t>Source: ZDMS_UPLOAD_FILES_F01:~250</a:t>
+              <a:t>Representative #3 (HIGH): Repeated function/module calls inside loop (FORMAT_MESSAGE)</a:t>
             </a:r>
           </a:p>
         </p:txBody>
@@ -6005,8 +7584,8 @@
         </p:nvSpPr>
         <p:spPr>
           <a:xfrm>
-            <a:off x="3200400" y="1280160"/>
-            <a:ext cx="8869680" cy="2286000"/>
+            <a:off x="3200400" y="4023360"/>
+            <a:ext cx="8869680" cy="1280160"/>
           </a:xfrm>
           <a:prstGeom prst="rect">
             <a:avLst/>
@@ -6022,7 +7601,7 @@
           <a:lstStyle/>
           <a:p>
             <a:pPr>
-              <a:defRPr sz="1200" b="0">
+              <a:defRPr sz="1000" b="0">
                 <a:solidFill>
                   <a:srgbClr val="333333"/>
                 </a:solidFill>
@@ -6030,12 +7609,12 @@
               </a:defRPr>
             </a:pPr>
             <a:r>
-              <a:t>CALL FUNCTION 'SXPG_COMMAND_EXECUTE'</a:t>
+              <a:t>LOOP AT pt_data ASSIGNING FIELD-SYMBOL(&lt;fs_data&gt;).</a:t>
             </a:r>
           </a:p>
           <a:p>
             <a:pPr>
-              <a:defRPr sz="1200" b="0">
+              <a:defRPr sz="1000" b="0">
                 <a:solidFill>
                   <a:srgbClr val="333333"/>
                 </a:solidFill>
@@ -6043,12 +7622,12 @@
               </a:defRPr>
             </a:pPr>
             <a:r>
-              <a:t>  EXPORTING</a:t>
+              <a:t>  ...</a:t>
             </a:r>
           </a:p>
           <a:p>
             <a:pPr>
-              <a:defRPr sz="1200" b="0">
+              <a:defRPr sz="1000" b="0">
                 <a:solidFill>
                   <a:srgbClr val="333333"/>
                 </a:solidFill>
@@ -6056,12 +7635,12 @@
               </a:defRPr>
             </a:pPr>
             <a:r>
-              <a:t>    commandname           = lv_comm</a:t>
+              <a:t>  CALL FUNCTION 'FORMAT_MESSAGE'</a:t>
             </a:r>
           </a:p>
           <a:p>
             <a:pPr>
-              <a:defRPr sz="1200" b="0">
+              <a:defRPr sz="1000" b="0">
                 <a:solidFill>
                   <a:srgbClr val="333333"/>
                 </a:solidFill>
@@ -6069,7 +7648,20 @@
               </a:defRPr>
             </a:pPr>
             <a:r>
-              <a:t>    additional_parameters = gv_param</a:t>
+              <a:t>    EXPORTING</a:t>
+            </a:r>
+          </a:p>
+          <a:p>
+            <a:pPr>
+              <a:defRPr sz="1000" b="0">
+                <a:solidFill>
+                  <a:srgbClr val="333333"/>
+                </a:solidFill>
+                <a:latin typeface="Consolas"/>
+              </a:defRPr>
+            </a:pPr>
+            <a:r>
+              <a:t>      id        = rs_return-id</a:t>
             </a:r>
           </a:p>
         </p:txBody>
@@ -6082,8 +7674,8 @@
         </p:nvSpPr>
         <p:spPr>
           <a:xfrm>
-            <a:off x="3200400" y="4023360"/>
-            <a:ext cx="8869680" cy="914400"/>
+            <a:off x="3200400" y="5486400"/>
+            <a:ext cx="8869680" cy="822960"/>
           </a:xfrm>
           <a:prstGeom prst="rect">
             <a:avLst/>
@@ -6097,7 +7689,7 @@
           <a:lstStyle/>
           <a:p>
             <a:pPr>
-              <a:defRPr sz="1100" b="0">
+              <a:defRPr sz="1000" b="0">
                 <a:solidFill>
                   <a:srgbClr val="333333"/>
                 </a:solidFill>
@@ -6105,7 +7697,30 @@
               </a:defRPr>
             </a:pPr>
             <a:r>
-              <a:t>Why: `SXPG_COMMAND_EXECUTE` triggers execution of an external OS command; there is no explicit `AUTHORITY-CHECK` (e.g., `S_LOG_COM` / `S_RZL_ADM` depending on setup) before this sensitive operation.</a:t>
+              <a:t>Why: Repeated calls to the same function inside a loop can add significant runtime overhead (rule: repeated calls to the same DB / function inside a loop).</a:t>
+            </a:r>
+          </a:p>
+          <a:p>
+            <a:pPr>
+              <a:defRPr sz="1000" b="0">
+                <a:solidFill>
+                  <a:srgbClr val="333333"/>
+                </a:solidFill>
+                <a:latin typeface="Calibri"/>
+              </a:defRPr>
+            </a:pPr>
+          </a:p>
+          <a:p>
+            <a:pPr>
+              <a:defRPr sz="1000" b="0">
+                <a:solidFill>
+                  <a:srgbClr val="333333"/>
+                </a:solidFill>
+                <a:latin typeface="Calibri"/>
+              </a:defRPr>
+            </a:pPr>
+            <a:r>
+              <a:t>Recommendation: Avoid calling `FORMAT_MESSAGE` for every row when possible—e.g., use `rs_return-message` directly if already filled, or collect unique `(id, number, v1..v4)` combinations and format once per unique key (cache result in a hashed table), then reuse.</a:t>
             </a:r>
           </a:p>
         </p:txBody>
@@ -6113,42 +7728,6 @@
       <p:sp>
         <p:nvSpPr>
           <p:cNvPr id="9" name="TextBox 8"/>
-          <p:cNvSpPr txBox="1"/>
-          <p:nvPr/>
-        </p:nvSpPr>
-        <p:spPr>
-          <a:xfrm>
-            <a:off x="3200400" y="5303520"/>
-            <a:ext cx="8869680" cy="1097280"/>
-          </a:xfrm>
-          <a:prstGeom prst="rect">
-            <a:avLst/>
-          </a:prstGeom>
-          <a:noFill/>
-        </p:spPr>
-        <p:txBody>
-          <a:bodyPr wrap="square">
-            <a:spAutoFit/>
-          </a:bodyPr>
-          <a:lstStyle/>
-          <a:p>
-            <a:pPr>
-              <a:defRPr sz="1100" b="1">
-                <a:solidFill>
-                  <a:srgbClr val="418DFF"/>
-                </a:solidFill>
-                <a:latin typeface="Calibri"/>
-              </a:defRPr>
-            </a:pPr>
-            <a:r>
-              <a:t>Recommendation: Add an explicit `AUTHORITY-CHECK` before calling `SXPG_COMMAND_EXECUTE` (and fail closed). Also restrict allowed commands in SM69 and ensure the command is defined with “Additional parameters not allowed” where possible.</a:t>
-            </a:r>
-          </a:p>
-        </p:txBody>
-      </p:sp>
-      <p:sp>
-        <p:nvSpPr>
-          <p:cNvPr id="10" name="TextBox 9"/>
           <p:cNvSpPr txBox="1"/>
           <p:nvPr/>
         </p:nvSpPr>
@@ -6274,7 +7853,7 @@
               </a:defRPr>
             </a:pPr>
             <a:r>
-              <a:t>SECTION 02 · PERFORMANCE</a:t>
+              <a:t>SECTION 02 · MAINTAINABILITY</a:t>
             </a:r>
           </a:p>
         </p:txBody>
@@ -6310,7 +7889,7 @@
               </a:defRPr>
             </a:pPr>
             <a:r>
-              <a:t>Repeated SELECT in loop</a:t>
+              <a:t>All Maintainability findings</a:t>
             </a:r>
           </a:p>
           <a:p>
@@ -6328,248 +7907,1708 @@
               </a:defRPr>
             </a:pPr>
             <a:r>
-              <a:t>Top performance finding</a:t>
-            </a:r>
-          </a:p>
-        </p:txBody>
-      </p:sp>
-      <p:sp>
-        <p:nvSpPr>
-          <p:cNvPr id="5" name="TextBox 4"/>
-          <p:cNvSpPr txBox="1"/>
+              <a:t>16 findings — all LOW, style debt</a:t>
+            </a:r>
+          </a:p>
+        </p:txBody>
+      </p:sp>
+      <p:graphicFrame>
+        <p:nvGraphicFramePr>
+          <p:cNvPr id="5" name="Table 4"/>
+          <p:cNvGraphicFramePr>
+            <a:graphicFrameLocks noGrp="1"/>
+          </p:cNvGraphicFramePr>
           <p:nvPr/>
-        </p:nvSpPr>
-        <p:spPr>
-          <a:xfrm>
-            <a:off x="3200400" y="457200"/>
-            <a:ext cx="8869680" cy="365760"/>
-          </a:xfrm>
-          <a:prstGeom prst="rect">
-            <a:avLst/>
-          </a:prstGeom>
-          <a:noFill/>
-        </p:spPr>
-        <p:txBody>
-          <a:bodyPr wrap="square">
-            <a:spAutoFit/>
-          </a:bodyPr>
-          <a:lstStyle/>
-          <a:p>
-            <a:pPr>
-              <a:defRPr sz="1400" b="1">
-                <a:solidFill>
-                  <a:srgbClr val="C83636"/>
-                </a:solidFill>
-                <a:latin typeface="Calibri"/>
-              </a:defRPr>
-            </a:pPr>
-            <a:r>
-              <a:t>HIGH — Repeated function/module calls inside loop (FORMAT_MESSAGE)</a:t>
-            </a:r>
-          </a:p>
-        </p:txBody>
-      </p:sp>
+        </p:nvGraphicFramePr>
+        <p:xfrm>
+          <a:off x="3200400" y="640080"/>
+          <a:ext cx="8869680" cy="5669280"/>
+        </p:xfrm>
+        <a:graphic>
+          <a:graphicData uri="http://schemas.openxmlformats.org/drawingml/2006/table">
+            <a:tbl>
+              <a:tblPr firstRow="1" bandRow="1">
+                <a:tableStyleId>{5C22544A-7EE6-4342-B048-85BDC9FD1C3A}</a:tableStyleId>
+              </a:tblPr>
+              <a:tblGrid>
+                <a:gridCol w="365760"/>
+                <a:gridCol w="640080"/>
+                <a:gridCol w="5029200"/>
+                <a:gridCol w="2834640"/>
+              </a:tblGrid>
+              <a:tr h="333487">
+                <a:tc>
+                  <a:txBody>
+                    <a:bodyPr/>
+                    <a:lstStyle/>
+                    <a:p>
+                      <a:pPr>
+                        <a:defRPr sz="1000" b="1">
+                          <a:solidFill>
+                            <a:srgbClr val="FFFFFF"/>
+                          </a:solidFill>
+                          <a:latin typeface="Calibri"/>
+                        </a:defRPr>
+                      </a:pPr>
+                      <a:r>
+                        <a:t>#</a:t>
+                      </a:r>
+                    </a:p>
+                  </a:txBody>
+                  <a:tcPr>
+                    <a:solidFill>
+                      <a:srgbClr val="161616"/>
+                    </a:solidFill>
+                  </a:tcPr>
+                </a:tc>
+                <a:tc>
+                  <a:txBody>
+                    <a:bodyPr/>
+                    <a:lstStyle/>
+                    <a:p>
+                      <a:pPr>
+                        <a:defRPr sz="1000" b="1">
+                          <a:solidFill>
+                            <a:srgbClr val="FFFFFF"/>
+                          </a:solidFill>
+                          <a:latin typeface="Calibri"/>
+                        </a:defRPr>
+                      </a:pPr>
+                      <a:r>
+                        <a:t>Sev</a:t>
+                      </a:r>
+                    </a:p>
+                  </a:txBody>
+                  <a:tcPr>
+                    <a:solidFill>
+                      <a:srgbClr val="161616"/>
+                    </a:solidFill>
+                  </a:tcPr>
+                </a:tc>
+                <a:tc>
+                  <a:txBody>
+                    <a:bodyPr/>
+                    <a:lstStyle/>
+                    <a:p>
+                      <a:pPr>
+                        <a:defRPr sz="1000" b="1">
+                          <a:solidFill>
+                            <a:srgbClr val="FFFFFF"/>
+                          </a:solidFill>
+                          <a:latin typeface="Calibri"/>
+                        </a:defRPr>
+                      </a:pPr>
+                      <a:r>
+                        <a:t>Finding title</a:t>
+                      </a:r>
+                    </a:p>
+                  </a:txBody>
+                  <a:tcPr>
+                    <a:solidFill>
+                      <a:srgbClr val="161616"/>
+                    </a:solidFill>
+                  </a:tcPr>
+                </a:tc>
+                <a:tc>
+                  <a:txBody>
+                    <a:bodyPr/>
+                    <a:lstStyle/>
+                    <a:p>
+                      <a:pPr>
+                        <a:defRPr sz="1000" b="1">
+                          <a:solidFill>
+                            <a:srgbClr val="FFFFFF"/>
+                          </a:solidFill>
+                          <a:latin typeface="Calibri"/>
+                        </a:defRPr>
+                      </a:pPr>
+                      <a:r>
+                        <a:t>Location</a:t>
+                      </a:r>
+                    </a:p>
+                  </a:txBody>
+                  <a:tcPr>
+                    <a:solidFill>
+                      <a:srgbClr val="161616"/>
+                    </a:solidFill>
+                  </a:tcPr>
+                </a:tc>
+              </a:tr>
+              <a:tr h="333487">
+                <a:tc>
+                  <a:txBody>
+                    <a:bodyPr/>
+                    <a:lstStyle/>
+                    <a:p>
+                      <a:pPr>
+                        <a:defRPr sz="900">
+                          <a:solidFill>
+                            <a:srgbClr val="333333"/>
+                          </a:solidFill>
+                          <a:latin typeface="Calibri"/>
+                        </a:defRPr>
+                      </a:pPr>
+                      <a:r>
+                        <a:t>1</a:t>
+                      </a:r>
+                    </a:p>
+                  </a:txBody>
+                  <a:tcPr>
+                    <a:solidFill>
+                      <a:srgbClr val="FFFFFF"/>
+                    </a:solidFill>
+                  </a:tcPr>
+                </a:tc>
+                <a:tc>
+                  <a:txBody>
+                    <a:bodyPr/>
+                    <a:lstStyle/>
+                    <a:p>
+                      <a:pPr>
+                        <a:defRPr sz="900" b="1">
+                          <a:solidFill>
+                            <a:srgbClr val="707070"/>
+                          </a:solidFill>
+                          <a:latin typeface="Calibri"/>
+                        </a:defRPr>
+                      </a:pPr>
+                      <a:r>
+                        <a:t>LOW</a:t>
+                      </a:r>
+                    </a:p>
+                  </a:txBody>
+                  <a:tcPr>
+                    <a:solidFill>
+                      <a:srgbClr val="FFFFFF"/>
+                    </a:solidFill>
+                  </a:tcPr>
+                </a:tc>
+                <a:tc>
+                  <a:txBody>
+                    <a:bodyPr/>
+                    <a:lstStyle/>
+                    <a:p>
+                      <a:pPr>
+                        <a:defRPr sz="900">
+                          <a:solidFill>
+                            <a:srgbClr val="333333"/>
+                          </a:solidFill>
+                          <a:latin typeface="Calibri"/>
+                        </a:defRPr>
+                      </a:pPr>
+                      <a:r>
+                        <a:t>Obsolete string building with CONCATENATE</a:t>
+                      </a:r>
+                    </a:p>
+                  </a:txBody>
+                  <a:tcPr>
+                    <a:solidFill>
+                      <a:srgbClr val="FFFFFF"/>
+                    </a:solidFill>
+                  </a:tcPr>
+                </a:tc>
+                <a:tc>
+                  <a:txBody>
+                    <a:bodyPr/>
+                    <a:lstStyle/>
+                    <a:p>
+                      <a:pPr>
+                        <a:defRPr sz="900">
+                          <a:solidFill>
+                            <a:srgbClr val="333333"/>
+                          </a:solidFill>
+                          <a:latin typeface="Consolas"/>
+                        </a:defRPr>
+                      </a:pPr>
+                      <a:r>
+                        <a:t>ZDMS_UPLOAD_FILES_F01:33</a:t>
+                      </a:r>
+                    </a:p>
+                  </a:txBody>
+                  <a:tcPr>
+                    <a:solidFill>
+                      <a:srgbClr val="FFFFFF"/>
+                    </a:solidFill>
+                  </a:tcPr>
+                </a:tc>
+              </a:tr>
+              <a:tr h="333487">
+                <a:tc>
+                  <a:txBody>
+                    <a:bodyPr/>
+                    <a:lstStyle/>
+                    <a:p>
+                      <a:pPr>
+                        <a:defRPr sz="900">
+                          <a:solidFill>
+                            <a:srgbClr val="333333"/>
+                          </a:solidFill>
+                          <a:latin typeface="Calibri"/>
+                        </a:defRPr>
+                      </a:pPr>
+                      <a:r>
+                        <a:t>2</a:t>
+                      </a:r>
+                    </a:p>
+                  </a:txBody>
+                  <a:tcPr>
+                    <a:solidFill>
+                      <a:srgbClr val="F5F5F5"/>
+                    </a:solidFill>
+                  </a:tcPr>
+                </a:tc>
+                <a:tc>
+                  <a:txBody>
+                    <a:bodyPr/>
+                    <a:lstStyle/>
+                    <a:p>
+                      <a:pPr>
+                        <a:defRPr sz="900" b="1">
+                          <a:solidFill>
+                            <a:srgbClr val="707070"/>
+                          </a:solidFill>
+                          <a:latin typeface="Calibri"/>
+                        </a:defRPr>
+                      </a:pPr>
+                      <a:r>
+                        <a:t>LOW</a:t>
+                      </a:r>
+                    </a:p>
+                  </a:txBody>
+                  <a:tcPr>
+                    <a:solidFill>
+                      <a:srgbClr val="F5F5F5"/>
+                    </a:solidFill>
+                  </a:tcPr>
+                </a:tc>
+                <a:tc>
+                  <a:txBody>
+                    <a:bodyPr/>
+                    <a:lstStyle/>
+                    <a:p>
+                      <a:pPr>
+                        <a:defRPr sz="900">
+                          <a:solidFill>
+                            <a:srgbClr val="333333"/>
+                          </a:solidFill>
+                          <a:latin typeface="Calibri"/>
+                        </a:defRPr>
+                      </a:pPr>
+                      <a:r>
+                        <a:t>Magic value for “color” control (unclear semantics)</a:t>
+                      </a:r>
+                    </a:p>
+                  </a:txBody>
+                  <a:tcPr>
+                    <a:solidFill>
+                      <a:srgbClr val="F5F5F5"/>
+                    </a:solidFill>
+                  </a:tcPr>
+                </a:tc>
+                <a:tc>
+                  <a:txBody>
+                    <a:bodyPr/>
+                    <a:lstStyle/>
+                    <a:p>
+                      <a:pPr>
+                        <a:defRPr sz="900">
+                          <a:solidFill>
+                            <a:srgbClr val="333333"/>
+                          </a:solidFill>
+                          <a:latin typeface="Consolas"/>
+                        </a:defRPr>
+                      </a:pPr>
+                      <a:r>
+                        <a:t>ZDMS_UPLOAD_FILES_F01:54</a:t>
+                      </a:r>
+                    </a:p>
+                  </a:txBody>
+                  <a:tcPr>
+                    <a:solidFill>
+                      <a:srgbClr val="F5F5F5"/>
+                    </a:solidFill>
+                  </a:tcPr>
+                </a:tc>
+              </a:tr>
+              <a:tr h="333487">
+                <a:tc>
+                  <a:txBody>
+                    <a:bodyPr/>
+                    <a:lstStyle/>
+                    <a:p>
+                      <a:pPr>
+                        <a:defRPr sz="900">
+                          <a:solidFill>
+                            <a:srgbClr val="333333"/>
+                          </a:solidFill>
+                          <a:latin typeface="Calibri"/>
+                        </a:defRPr>
+                      </a:pPr>
+                      <a:r>
+                        <a:t>3</a:t>
+                      </a:r>
+                    </a:p>
+                  </a:txBody>
+                  <a:tcPr>
+                    <a:solidFill>
+                      <a:srgbClr val="FFFFFF"/>
+                    </a:solidFill>
+                  </a:tcPr>
+                </a:tc>
+                <a:tc>
+                  <a:txBody>
+                    <a:bodyPr/>
+                    <a:lstStyle/>
+                    <a:p>
+                      <a:pPr>
+                        <a:defRPr sz="900" b="1">
+                          <a:solidFill>
+                            <a:srgbClr val="707070"/>
+                          </a:solidFill>
+                          <a:latin typeface="Calibri"/>
+                        </a:defRPr>
+                      </a:pPr>
+                      <a:r>
+                        <a:t>LOW</a:t>
+                      </a:r>
+                    </a:p>
+                  </a:txBody>
+                  <a:tcPr>
+                    <a:solidFill>
+                      <a:srgbClr val="FFFFFF"/>
+                    </a:solidFill>
+                  </a:tcPr>
+                </a:tc>
+                <a:tc>
+                  <a:txBody>
+                    <a:bodyPr/>
+                    <a:lstStyle/>
+                    <a:p>
+                      <a:pPr>
+                        <a:defRPr sz="900">
+                          <a:solidFill>
+                            <a:srgbClr val="333333"/>
+                          </a:solidFill>
+                          <a:latin typeface="Calibri"/>
+                        </a:defRPr>
+                      </a:pPr>
+                      <a:r>
+                        <a:t>Magic literals for color codes</a:t>
+                      </a:r>
+                    </a:p>
+                  </a:txBody>
+                  <a:tcPr>
+                    <a:solidFill>
+                      <a:srgbClr val="FFFFFF"/>
+                    </a:solidFill>
+                  </a:tcPr>
+                </a:tc>
+                <a:tc>
+                  <a:txBody>
+                    <a:bodyPr/>
+                    <a:lstStyle/>
+                    <a:p>
+                      <a:pPr>
+                        <a:defRPr sz="900">
+                          <a:solidFill>
+                            <a:srgbClr val="333333"/>
+                          </a:solidFill>
+                          <a:latin typeface="Consolas"/>
+                        </a:defRPr>
+                      </a:pPr>
+                      <a:r>
+                        <a:t>ZDMS_UPLOAD_FILES_F01:61</a:t>
+                      </a:r>
+                    </a:p>
+                  </a:txBody>
+                  <a:tcPr>
+                    <a:solidFill>
+                      <a:srgbClr val="FFFFFF"/>
+                    </a:solidFill>
+                  </a:tcPr>
+                </a:tc>
+              </a:tr>
+              <a:tr h="333487">
+                <a:tc>
+                  <a:txBody>
+                    <a:bodyPr/>
+                    <a:lstStyle/>
+                    <a:p>
+                      <a:pPr>
+                        <a:defRPr sz="900">
+                          <a:solidFill>
+                            <a:srgbClr val="333333"/>
+                          </a:solidFill>
+                          <a:latin typeface="Calibri"/>
+                        </a:defRPr>
+                      </a:pPr>
+                      <a:r>
+                        <a:t>4</a:t>
+                      </a:r>
+                    </a:p>
+                  </a:txBody>
+                  <a:tcPr>
+                    <a:solidFill>
+                      <a:srgbClr val="F5F5F5"/>
+                    </a:solidFill>
+                  </a:tcPr>
+                </a:tc>
+                <a:tc>
+                  <a:txBody>
+                    <a:bodyPr/>
+                    <a:lstStyle/>
+                    <a:p>
+                      <a:pPr>
+                        <a:defRPr sz="900" b="1">
+                          <a:solidFill>
+                            <a:srgbClr val="707070"/>
+                          </a:solidFill>
+                          <a:latin typeface="Calibri"/>
+                        </a:defRPr>
+                      </a:pPr>
+                      <a:r>
+                        <a:t>LOW</a:t>
+                      </a:r>
+                    </a:p>
+                  </a:txBody>
+                  <a:tcPr>
+                    <a:solidFill>
+                      <a:srgbClr val="F5F5F5"/>
+                    </a:solidFill>
+                  </a:tcPr>
+                </a:tc>
+                <a:tc>
+                  <a:txBody>
+                    <a:bodyPr/>
+                    <a:lstStyle/>
+                    <a:p>
+                      <a:pPr>
+                        <a:defRPr sz="900">
+                          <a:solidFill>
+                            <a:srgbClr val="333333"/>
+                          </a:solidFill>
+                          <a:latin typeface="Calibri"/>
+                        </a:defRPr>
+                      </a:pPr>
+                      <a:r>
+                        <a:t>Obsolete internal table declaration with HEADER LINE</a:t>
+                      </a:r>
+                    </a:p>
+                  </a:txBody>
+                  <a:tcPr>
+                    <a:solidFill>
+                      <a:srgbClr val="F5F5F5"/>
+                    </a:solidFill>
+                  </a:tcPr>
+                </a:tc>
+                <a:tc>
+                  <a:txBody>
+                    <a:bodyPr/>
+                    <a:lstStyle/>
+                    <a:p>
+                      <a:pPr>
+                        <a:defRPr sz="900">
+                          <a:solidFill>
+                            <a:srgbClr val="333333"/>
+                          </a:solidFill>
+                          <a:latin typeface="Consolas"/>
+                        </a:defRPr>
+                      </a:pPr>
+                      <a:r>
+                        <a:t>ZDMS_UPLOAD_FILES_F01:332</a:t>
+                      </a:r>
+                    </a:p>
+                  </a:txBody>
+                  <a:tcPr>
+                    <a:solidFill>
+                      <a:srgbClr val="F5F5F5"/>
+                    </a:solidFill>
+                  </a:tcPr>
+                </a:tc>
+              </a:tr>
+              <a:tr h="333487">
+                <a:tc>
+                  <a:txBody>
+                    <a:bodyPr/>
+                    <a:lstStyle/>
+                    <a:p>
+                      <a:pPr>
+                        <a:defRPr sz="900">
+                          <a:solidFill>
+                            <a:srgbClr val="333333"/>
+                          </a:solidFill>
+                          <a:latin typeface="Calibri"/>
+                        </a:defRPr>
+                      </a:pPr>
+                      <a:r>
+                        <a:t>5</a:t>
+                      </a:r>
+                    </a:p>
+                  </a:txBody>
+                  <a:tcPr>
+                    <a:solidFill>
+                      <a:srgbClr val="FFFFFF"/>
+                    </a:solidFill>
+                  </a:tcPr>
+                </a:tc>
+                <a:tc>
+                  <a:txBody>
+                    <a:bodyPr/>
+                    <a:lstStyle/>
+                    <a:p>
+                      <a:pPr>
+                        <a:defRPr sz="900" b="1">
+                          <a:solidFill>
+                            <a:srgbClr val="707070"/>
+                          </a:solidFill>
+                          <a:latin typeface="Calibri"/>
+                        </a:defRPr>
+                      </a:pPr>
+                      <a:r>
+                        <a:t>LOW</a:t>
+                      </a:r>
+                    </a:p>
+                  </a:txBody>
+                  <a:tcPr>
+                    <a:solidFill>
+                      <a:srgbClr val="FFFFFF"/>
+                    </a:solidFill>
+                  </a:tcPr>
+                </a:tc>
+                <a:tc>
+                  <a:txBody>
+                    <a:bodyPr/>
+                    <a:lstStyle/>
+                    <a:p>
+                      <a:pPr>
+                        <a:defRPr sz="900">
+                          <a:solidFill>
+                            <a:srgbClr val="333333"/>
+                          </a:solidFill>
+                          <a:latin typeface="Calibri"/>
+                        </a:defRPr>
+                      </a:pPr>
+                      <a:r>
+                        <a:t>Obsolete internal table declaration with HEADER LINE (second instance)</a:t>
+                      </a:r>
+                    </a:p>
+                  </a:txBody>
+                  <a:tcPr>
+                    <a:solidFill>
+                      <a:srgbClr val="FFFFFF"/>
+                    </a:solidFill>
+                  </a:tcPr>
+                </a:tc>
+                <a:tc>
+                  <a:txBody>
+                    <a:bodyPr/>
+                    <a:lstStyle/>
+                    <a:p>
+                      <a:pPr>
+                        <a:defRPr sz="900">
+                          <a:solidFill>
+                            <a:srgbClr val="333333"/>
+                          </a:solidFill>
+                          <a:latin typeface="Consolas"/>
+                        </a:defRPr>
+                      </a:pPr>
+                      <a:r>
+                        <a:t>ZDMS_UPLOAD_FILES_F01:411</a:t>
+                      </a:r>
+                    </a:p>
+                  </a:txBody>
+                  <a:tcPr>
+                    <a:solidFill>
+                      <a:srgbClr val="FFFFFF"/>
+                    </a:solidFill>
+                  </a:tcPr>
+                </a:tc>
+              </a:tr>
+              <a:tr h="333487">
+                <a:tc>
+                  <a:txBody>
+                    <a:bodyPr/>
+                    <a:lstStyle/>
+                    <a:p>
+                      <a:pPr>
+                        <a:defRPr sz="900">
+                          <a:solidFill>
+                            <a:srgbClr val="333333"/>
+                          </a:solidFill>
+                          <a:latin typeface="Calibri"/>
+                        </a:defRPr>
+                      </a:pPr>
+                      <a:r>
+                        <a:t>6</a:t>
+                      </a:r>
+                    </a:p>
+                  </a:txBody>
+                  <a:tcPr>
+                    <a:solidFill>
+                      <a:srgbClr val="F5F5F5"/>
+                    </a:solidFill>
+                  </a:tcPr>
+                </a:tc>
+                <a:tc>
+                  <a:txBody>
+                    <a:bodyPr/>
+                    <a:lstStyle/>
+                    <a:p>
+                      <a:pPr>
+                        <a:defRPr sz="900" b="1">
+                          <a:solidFill>
+                            <a:srgbClr val="707070"/>
+                          </a:solidFill>
+                          <a:latin typeface="Calibri"/>
+                        </a:defRPr>
+                      </a:pPr>
+                      <a:r>
+                        <a:t>LOW</a:t>
+                      </a:r>
+                    </a:p>
+                  </a:txBody>
+                  <a:tcPr>
+                    <a:solidFill>
+                      <a:srgbClr val="F5F5F5"/>
+                    </a:solidFill>
+                  </a:tcPr>
+                </a:tc>
+                <a:tc>
+                  <a:txBody>
+                    <a:bodyPr/>
+                    <a:lstStyle/>
+                    <a:p>
+                      <a:pPr>
+                        <a:defRPr sz="900">
+                          <a:solidFill>
+                            <a:srgbClr val="333333"/>
+                          </a:solidFill>
+                          <a:latin typeface="Calibri"/>
+                        </a:defRPr>
+                      </a:pPr>
+                      <a:r>
+                        <a:t>Commented-out code left in place</a:t>
+                      </a:r>
+                    </a:p>
+                  </a:txBody>
+                  <a:tcPr>
+                    <a:solidFill>
+                      <a:srgbClr val="F5F5F5"/>
+                    </a:solidFill>
+                  </a:tcPr>
+                </a:tc>
+                <a:tc>
+                  <a:txBody>
+                    <a:bodyPr/>
+                    <a:lstStyle/>
+                    <a:p>
+                      <a:pPr>
+                        <a:defRPr sz="900">
+                          <a:solidFill>
+                            <a:srgbClr val="333333"/>
+                          </a:solidFill>
+                          <a:latin typeface="Consolas"/>
+                        </a:defRPr>
+                      </a:pPr>
+                      <a:r>
+                        <a:t>ZDMS_UPLOAD_FILES_F01:103</a:t>
+                      </a:r>
+                    </a:p>
+                  </a:txBody>
+                  <a:tcPr>
+                    <a:solidFill>
+                      <a:srgbClr val="F5F5F5"/>
+                    </a:solidFill>
+                  </a:tcPr>
+                </a:tc>
+              </a:tr>
+              <a:tr h="333487">
+                <a:tc>
+                  <a:txBody>
+                    <a:bodyPr/>
+                    <a:lstStyle/>
+                    <a:p>
+                      <a:pPr>
+                        <a:defRPr sz="900">
+                          <a:solidFill>
+                            <a:srgbClr val="333333"/>
+                          </a:solidFill>
+                          <a:latin typeface="Calibri"/>
+                        </a:defRPr>
+                      </a:pPr>
+                      <a:r>
+                        <a:t>7</a:t>
+                      </a:r>
+                    </a:p>
+                  </a:txBody>
+                  <a:tcPr>
+                    <a:solidFill>
+                      <a:srgbClr val="FFFFFF"/>
+                    </a:solidFill>
+                  </a:tcPr>
+                </a:tc>
+                <a:tc>
+                  <a:txBody>
+                    <a:bodyPr/>
+                    <a:lstStyle/>
+                    <a:p>
+                      <a:pPr>
+                        <a:defRPr sz="900" b="1">
+                          <a:solidFill>
+                            <a:srgbClr val="707070"/>
+                          </a:solidFill>
+                          <a:latin typeface="Calibri"/>
+                        </a:defRPr>
+                      </a:pPr>
+                      <a:r>
+                        <a:t>LOW</a:t>
+                      </a:r>
+                    </a:p>
+                  </a:txBody>
+                  <a:tcPr>
+                    <a:solidFill>
+                      <a:srgbClr val="FFFFFF"/>
+                    </a:solidFill>
+                  </a:tcPr>
+                </a:tc>
+                <a:tc>
+                  <a:txBody>
+                    <a:bodyPr/>
+                    <a:lstStyle/>
+                    <a:p>
+                      <a:pPr>
+                        <a:defRPr sz="900">
+                          <a:solidFill>
+                            <a:srgbClr val="333333"/>
+                          </a:solidFill>
+                          <a:latin typeface="Calibri"/>
+                        </a:defRPr>
+                      </a:pPr>
+                      <a:r>
+                        <a:t>Obsolete string parsing with SPLIT</a:t>
+                      </a:r>
+                    </a:p>
+                  </a:txBody>
+                  <a:tcPr>
+                    <a:solidFill>
+                      <a:srgbClr val="FFFFFF"/>
+                    </a:solidFill>
+                  </a:tcPr>
+                </a:tc>
+                <a:tc>
+                  <a:txBody>
+                    <a:bodyPr/>
+                    <a:lstStyle/>
+                    <a:p>
+                      <a:pPr>
+                        <a:defRPr sz="900">
+                          <a:solidFill>
+                            <a:srgbClr val="333333"/>
+                          </a:solidFill>
+                          <a:latin typeface="Consolas"/>
+                        </a:defRPr>
+                      </a:pPr>
+                      <a:r>
+                        <a:t>ZDMS_UPLOAD_FILES_F01:137</a:t>
+                      </a:r>
+                    </a:p>
+                  </a:txBody>
+                  <a:tcPr>
+                    <a:solidFill>
+                      <a:srgbClr val="FFFFFF"/>
+                    </a:solidFill>
+                  </a:tcPr>
+                </a:tc>
+              </a:tr>
+              <a:tr h="333487">
+                <a:tc>
+                  <a:txBody>
+                    <a:bodyPr/>
+                    <a:lstStyle/>
+                    <a:p>
+                      <a:pPr>
+                        <a:defRPr sz="900">
+                          <a:solidFill>
+                            <a:srgbClr val="333333"/>
+                          </a:solidFill>
+                          <a:latin typeface="Calibri"/>
+                        </a:defRPr>
+                      </a:pPr>
+                      <a:r>
+                        <a:t>8</a:t>
+                      </a:r>
+                    </a:p>
+                  </a:txBody>
+                  <a:tcPr>
+                    <a:solidFill>
+                      <a:srgbClr val="F5F5F5"/>
+                    </a:solidFill>
+                  </a:tcPr>
+                </a:tc>
+                <a:tc>
+                  <a:txBody>
+                    <a:bodyPr/>
+                    <a:lstStyle/>
+                    <a:p>
+                      <a:pPr>
+                        <a:defRPr sz="900" b="1">
+                          <a:solidFill>
+                            <a:srgbClr val="707070"/>
+                          </a:solidFill>
+                          <a:latin typeface="Calibri"/>
+                        </a:defRPr>
+                      </a:pPr>
+                      <a:r>
+                        <a:t>LOW</a:t>
+                      </a:r>
+                    </a:p>
+                  </a:txBody>
+                  <a:tcPr>
+                    <a:solidFill>
+                      <a:srgbClr val="F5F5F5"/>
+                    </a:solidFill>
+                  </a:tcPr>
+                </a:tc>
+                <a:tc>
+                  <a:txBody>
+                    <a:bodyPr/>
+                    <a:lstStyle/>
+                    <a:p>
+                      <a:pPr>
+                        <a:defRPr sz="900">
+                          <a:solidFill>
+                            <a:srgbClr val="333333"/>
+                          </a:solidFill>
+                          <a:latin typeface="Calibri"/>
+                        </a:defRPr>
+                      </a:pPr>
+                      <a:r>
+                        <a:t>Dead code: variable declared but never used</a:t>
+                      </a:r>
+                    </a:p>
+                  </a:txBody>
+                  <a:tcPr>
+                    <a:solidFill>
+                      <a:srgbClr val="F5F5F5"/>
+                    </a:solidFill>
+                  </a:tcPr>
+                </a:tc>
+                <a:tc>
+                  <a:txBody>
+                    <a:bodyPr/>
+                    <a:lstStyle/>
+                    <a:p>
+                      <a:pPr>
+                        <a:defRPr sz="900">
+                          <a:solidFill>
+                            <a:srgbClr val="333333"/>
+                          </a:solidFill>
+                          <a:latin typeface="Consolas"/>
+                        </a:defRPr>
+                      </a:pPr>
+                      <a:r>
+                        <a:t>ZDMS_UPLOAD_FILES_F01:90</a:t>
+                      </a:r>
+                    </a:p>
+                  </a:txBody>
+                  <a:tcPr>
+                    <a:solidFill>
+                      <a:srgbClr val="F5F5F5"/>
+                    </a:solidFill>
+                  </a:tcPr>
+                </a:tc>
+              </a:tr>
+              <a:tr h="333487">
+                <a:tc>
+                  <a:txBody>
+                    <a:bodyPr/>
+                    <a:lstStyle/>
+                    <a:p>
+                      <a:pPr>
+                        <a:defRPr sz="900">
+                          <a:solidFill>
+                            <a:srgbClr val="333333"/>
+                          </a:solidFill>
+                          <a:latin typeface="Calibri"/>
+                        </a:defRPr>
+                      </a:pPr>
+                      <a:r>
+                        <a:t>9</a:t>
+                      </a:r>
+                    </a:p>
+                  </a:txBody>
+                  <a:tcPr>
+                    <a:solidFill>
+                      <a:srgbClr val="FFFFFF"/>
+                    </a:solidFill>
+                  </a:tcPr>
+                </a:tc>
+                <a:tc>
+                  <a:txBody>
+                    <a:bodyPr/>
+                    <a:lstStyle/>
+                    <a:p>
+                      <a:pPr>
+                        <a:defRPr sz="900" b="1">
+                          <a:solidFill>
+                            <a:srgbClr val="707070"/>
+                          </a:solidFill>
+                          <a:latin typeface="Calibri"/>
+                        </a:defRPr>
+                      </a:pPr>
+                      <a:r>
+                        <a:t>LOW</a:t>
+                      </a:r>
+                    </a:p>
+                  </a:txBody>
+                  <a:tcPr>
+                    <a:solidFill>
+                      <a:srgbClr val="FFFFFF"/>
+                    </a:solidFill>
+                  </a:tcPr>
+                </a:tc>
+                <a:tc>
+                  <a:txBody>
+                    <a:bodyPr/>
+                    <a:lstStyle/>
+                    <a:p>
+                      <a:pPr>
+                        <a:defRPr sz="900">
+                          <a:solidFill>
+                            <a:srgbClr val="333333"/>
+                          </a:solidFill>
+                          <a:latin typeface="Calibri"/>
+                        </a:defRPr>
+                      </a:pPr>
+                      <a:r>
+                        <a:t>Mixed inline and explicit DATA declarations in same routine</a:t>
+                      </a:r>
+                    </a:p>
+                  </a:txBody>
+                  <a:tcPr>
+                    <a:solidFill>
+                      <a:srgbClr val="FFFFFF"/>
+                    </a:solidFill>
+                  </a:tcPr>
+                </a:tc>
+                <a:tc>
+                  <a:txBody>
+                    <a:bodyPr/>
+                    <a:lstStyle/>
+                    <a:p>
+                      <a:pPr>
+                        <a:defRPr sz="900">
+                          <a:solidFill>
+                            <a:srgbClr val="333333"/>
+                          </a:solidFill>
+                          <a:latin typeface="Consolas"/>
+                        </a:defRPr>
+                      </a:pPr>
+                      <a:r>
+                        <a:t>ZDMS_UPLOAD_FILES_F01:237</a:t>
+                      </a:r>
+                    </a:p>
+                  </a:txBody>
+                  <a:tcPr>
+                    <a:solidFill>
+                      <a:srgbClr val="FFFFFF"/>
+                    </a:solidFill>
+                  </a:tcPr>
+                </a:tc>
+              </a:tr>
+              <a:tr h="333487">
+                <a:tc>
+                  <a:txBody>
+                    <a:bodyPr/>
+                    <a:lstStyle/>
+                    <a:p>
+                      <a:pPr>
+                        <a:defRPr sz="900">
+                          <a:solidFill>
+                            <a:srgbClr val="333333"/>
+                          </a:solidFill>
+                          <a:latin typeface="Calibri"/>
+                        </a:defRPr>
+                      </a:pPr>
+                      <a:r>
+                        <a:t>10</a:t>
+                      </a:r>
+                    </a:p>
+                  </a:txBody>
+                  <a:tcPr>
+                    <a:solidFill>
+                      <a:srgbClr val="F5F5F5"/>
+                    </a:solidFill>
+                  </a:tcPr>
+                </a:tc>
+                <a:tc>
+                  <a:txBody>
+                    <a:bodyPr/>
+                    <a:lstStyle/>
+                    <a:p>
+                      <a:pPr>
+                        <a:defRPr sz="900" b="1">
+                          <a:solidFill>
+                            <a:srgbClr val="707070"/>
+                          </a:solidFill>
+                          <a:latin typeface="Calibri"/>
+                        </a:defRPr>
+                      </a:pPr>
+                      <a:r>
+                        <a:t>LOW</a:t>
+                      </a:r>
+                    </a:p>
+                  </a:txBody>
+                  <a:tcPr>
+                    <a:solidFill>
+                      <a:srgbClr val="F5F5F5"/>
+                    </a:solidFill>
+                  </a:tcPr>
+                </a:tc>
+                <a:tc>
+                  <a:txBody>
+                    <a:bodyPr/>
+                    <a:lstStyle/>
+                    <a:p>
+                      <a:pPr>
+                        <a:defRPr sz="900">
+                          <a:solidFill>
+                            <a:srgbClr val="333333"/>
+                          </a:solidFill>
+                          <a:latin typeface="Calibri"/>
+                        </a:defRPr>
+                      </a:pPr>
+                      <a:r>
+                        <a:t>Magic literals used for business rules / messages</a:t>
+                      </a:r>
+                    </a:p>
+                  </a:txBody>
+                  <a:tcPr>
+                    <a:solidFill>
+                      <a:srgbClr val="F5F5F5"/>
+                    </a:solidFill>
+                  </a:tcPr>
+                </a:tc>
+                <a:tc>
+                  <a:txBody>
+                    <a:bodyPr/>
+                    <a:lstStyle/>
+                    <a:p>
+                      <a:pPr>
+                        <a:defRPr sz="900">
+                          <a:solidFill>
+                            <a:srgbClr val="333333"/>
+                          </a:solidFill>
+                          <a:latin typeface="Consolas"/>
+                        </a:defRPr>
+                      </a:pPr>
+                      <a:r>
+                        <a:t>ZDMS_UPLOAD_FILES_F01:171</a:t>
+                      </a:r>
+                    </a:p>
+                  </a:txBody>
+                  <a:tcPr>
+                    <a:solidFill>
+                      <a:srgbClr val="F5F5F5"/>
+                    </a:solidFill>
+                  </a:tcPr>
+                </a:tc>
+              </a:tr>
+              <a:tr h="333487">
+                <a:tc>
+                  <a:txBody>
+                    <a:bodyPr/>
+                    <a:lstStyle/>
+                    <a:p>
+                      <a:pPr>
+                        <a:defRPr sz="900">
+                          <a:solidFill>
+                            <a:srgbClr val="333333"/>
+                          </a:solidFill>
+                          <a:latin typeface="Calibri"/>
+                        </a:defRPr>
+                      </a:pPr>
+                      <a:r>
+                        <a:t>11</a:t>
+                      </a:r>
+                    </a:p>
+                  </a:txBody>
+                  <a:tcPr>
+                    <a:solidFill>
+                      <a:srgbClr val="FFFFFF"/>
+                    </a:solidFill>
+                  </a:tcPr>
+                </a:tc>
+                <a:tc>
+                  <a:txBody>
+                    <a:bodyPr/>
+                    <a:lstStyle/>
+                    <a:p>
+                      <a:pPr>
+                        <a:defRPr sz="900" b="1">
+                          <a:solidFill>
+                            <a:srgbClr val="707070"/>
+                          </a:solidFill>
+                          <a:latin typeface="Calibri"/>
+                        </a:defRPr>
+                      </a:pPr>
+                      <a:r>
+                        <a:t>LOW</a:t>
+                      </a:r>
+                    </a:p>
+                  </a:txBody>
+                  <a:tcPr>
+                    <a:solidFill>
+                      <a:srgbClr val="FFFFFF"/>
+                    </a:solidFill>
+                  </a:tcPr>
+                </a:tc>
+                <a:tc>
+                  <a:txBody>
+                    <a:bodyPr/>
+                    <a:lstStyle/>
+                    <a:p>
+                      <a:pPr>
+                        <a:defRPr sz="900">
+                          <a:solidFill>
+                            <a:srgbClr val="333333"/>
+                          </a:solidFill>
+                          <a:latin typeface="Calibri"/>
+                        </a:defRPr>
+                      </a:pPr>
+                      <a:r>
+                        <a:t>Obsolete string building with CONCATENATE (message construction)</a:t>
+                      </a:r>
+                    </a:p>
+                  </a:txBody>
+                  <a:tcPr>
+                    <a:solidFill>
+                      <a:srgbClr val="FFFFFF"/>
+                    </a:solidFill>
+                  </a:tcPr>
+                </a:tc>
+                <a:tc>
+                  <a:txBody>
+                    <a:bodyPr/>
+                    <a:lstStyle/>
+                    <a:p>
+                      <a:pPr>
+                        <a:defRPr sz="900">
+                          <a:solidFill>
+                            <a:srgbClr val="333333"/>
+                          </a:solidFill>
+                          <a:latin typeface="Consolas"/>
+                        </a:defRPr>
+                      </a:pPr>
+                      <a:r>
+                        <a:t>ZDMS_UPLOAD_FILES_F01:171</a:t>
+                      </a:r>
+                    </a:p>
+                  </a:txBody>
+                  <a:tcPr>
+                    <a:solidFill>
+                      <a:srgbClr val="FFFFFF"/>
+                    </a:solidFill>
+                  </a:tcPr>
+                </a:tc>
+              </a:tr>
+              <a:tr h="333487">
+                <a:tc>
+                  <a:txBody>
+                    <a:bodyPr/>
+                    <a:lstStyle/>
+                    <a:p>
+                      <a:pPr>
+                        <a:defRPr sz="900">
+                          <a:solidFill>
+                            <a:srgbClr val="333333"/>
+                          </a:solidFill>
+                          <a:latin typeface="Calibri"/>
+                        </a:defRPr>
+                      </a:pPr>
+                      <a:r>
+                        <a:t>12</a:t>
+                      </a:r>
+                    </a:p>
+                  </a:txBody>
+                  <a:tcPr>
+                    <a:solidFill>
+                      <a:srgbClr val="F5F5F5"/>
+                    </a:solidFill>
+                  </a:tcPr>
+                </a:tc>
+                <a:tc>
+                  <a:txBody>
+                    <a:bodyPr/>
+                    <a:lstStyle/>
+                    <a:p>
+                      <a:pPr>
+                        <a:defRPr sz="900" b="1">
+                          <a:solidFill>
+                            <a:srgbClr val="707070"/>
+                          </a:solidFill>
+                          <a:latin typeface="Calibri"/>
+                        </a:defRPr>
+                      </a:pPr>
+                      <a:r>
+                        <a:t>LOW</a:t>
+                      </a:r>
+                    </a:p>
+                  </a:txBody>
+                  <a:tcPr>
+                    <a:solidFill>
+                      <a:srgbClr val="F5F5F5"/>
+                    </a:solidFill>
+                  </a:tcPr>
+                </a:tc>
+                <a:tc>
+                  <a:txBody>
+                    <a:bodyPr/>
+                    <a:lstStyle/>
+                    <a:p>
+                      <a:pPr>
+                        <a:defRPr sz="900">
+                          <a:solidFill>
+                            <a:srgbClr val="333333"/>
+                          </a:solidFill>
+                          <a:latin typeface="Calibri"/>
+                        </a:defRPr>
+                      </a:pPr>
+                      <a:r>
+                        <a:t>Magic constants for document type</a:t>
+                      </a:r>
+                    </a:p>
+                  </a:txBody>
+                  <a:tcPr>
+                    <a:solidFill>
+                      <a:srgbClr val="F5F5F5"/>
+                    </a:solidFill>
+                  </a:tcPr>
+                </a:tc>
+                <a:tc>
+                  <a:txBody>
+                    <a:bodyPr/>
+                    <a:lstStyle/>
+                    <a:p>
+                      <a:pPr>
+                        <a:defRPr sz="900">
+                          <a:solidFill>
+                            <a:srgbClr val="333333"/>
+                          </a:solidFill>
+                          <a:latin typeface="Consolas"/>
+                        </a:defRPr>
+                      </a:pPr>
+                      <a:r>
+                        <a:t>ZDMS_UPLOAD_FILES_F01:237</a:t>
+                      </a:r>
+                    </a:p>
+                  </a:txBody>
+                  <a:tcPr>
+                    <a:solidFill>
+                      <a:srgbClr val="F5F5F5"/>
+                    </a:solidFill>
+                  </a:tcPr>
+                </a:tc>
+              </a:tr>
+              <a:tr h="333487">
+                <a:tc>
+                  <a:txBody>
+                    <a:bodyPr/>
+                    <a:lstStyle/>
+                    <a:p>
+                      <a:pPr>
+                        <a:defRPr sz="900">
+                          <a:solidFill>
+                            <a:srgbClr val="333333"/>
+                          </a:solidFill>
+                          <a:latin typeface="Calibri"/>
+                        </a:defRPr>
+                      </a:pPr>
+                      <a:r>
+                        <a:t>13</a:t>
+                      </a:r>
+                    </a:p>
+                  </a:txBody>
+                  <a:tcPr>
+                    <a:solidFill>
+                      <a:srgbClr val="FFFFFF"/>
+                    </a:solidFill>
+                  </a:tcPr>
+                </a:tc>
+                <a:tc>
+                  <a:txBody>
+                    <a:bodyPr/>
+                    <a:lstStyle/>
+                    <a:p>
+                      <a:pPr>
+                        <a:defRPr sz="900" b="1">
+                          <a:solidFill>
+                            <a:srgbClr val="707070"/>
+                          </a:solidFill>
+                          <a:latin typeface="Calibri"/>
+                        </a:defRPr>
+                      </a:pPr>
+                      <a:r>
+                        <a:t>LOW</a:t>
+                      </a:r>
+                    </a:p>
+                  </a:txBody>
+                  <a:tcPr>
+                    <a:solidFill>
+                      <a:srgbClr val="FFFFFF"/>
+                    </a:solidFill>
+                  </a:tcPr>
+                </a:tc>
+                <a:tc>
+                  <a:txBody>
+                    <a:bodyPr/>
+                    <a:lstStyle/>
+                    <a:p>
+                      <a:pPr>
+                        <a:defRPr sz="900">
+                          <a:solidFill>
+                            <a:srgbClr val="333333"/>
+                          </a:solidFill>
+                          <a:latin typeface="Calibri"/>
+                        </a:defRPr>
+                      </a:pPr>
+                      <a:r>
+                        <a:t>Commented-out ENDIF left behind</a:t>
+                      </a:r>
+                    </a:p>
+                  </a:txBody>
+                  <a:tcPr>
+                    <a:solidFill>
+                      <a:srgbClr val="FFFFFF"/>
+                    </a:solidFill>
+                  </a:tcPr>
+                </a:tc>
+                <a:tc>
+                  <a:txBody>
+                    <a:bodyPr/>
+                    <a:lstStyle/>
+                    <a:p>
+                      <a:pPr>
+                        <a:defRPr sz="900">
+                          <a:solidFill>
+                            <a:srgbClr val="333333"/>
+                          </a:solidFill>
+                          <a:latin typeface="Consolas"/>
+                        </a:defRPr>
+                      </a:pPr>
+                      <a:r>
+                        <a:t>ZDMS_UPLOAD_FILES_F01:192</a:t>
+                      </a:r>
+                    </a:p>
+                  </a:txBody>
+                  <a:tcPr>
+                    <a:solidFill>
+                      <a:srgbClr val="FFFFFF"/>
+                    </a:solidFill>
+                  </a:tcPr>
+                </a:tc>
+              </a:tr>
+              <a:tr h="333487">
+                <a:tc>
+                  <a:txBody>
+                    <a:bodyPr/>
+                    <a:lstStyle/>
+                    <a:p>
+                      <a:pPr>
+                        <a:defRPr sz="900">
+                          <a:solidFill>
+                            <a:srgbClr val="333333"/>
+                          </a:solidFill>
+                          <a:latin typeface="Calibri"/>
+                        </a:defRPr>
+                      </a:pPr>
+                      <a:r>
+                        <a:t>14</a:t>
+                      </a:r>
+                    </a:p>
+                  </a:txBody>
+                  <a:tcPr>
+                    <a:solidFill>
+                      <a:srgbClr val="F5F5F5"/>
+                    </a:solidFill>
+                  </a:tcPr>
+                </a:tc>
+                <a:tc>
+                  <a:txBody>
+                    <a:bodyPr/>
+                    <a:lstStyle/>
+                    <a:p>
+                      <a:pPr>
+                        <a:defRPr sz="900" b="1">
+                          <a:solidFill>
+                            <a:srgbClr val="707070"/>
+                          </a:solidFill>
+                          <a:latin typeface="Calibri"/>
+                        </a:defRPr>
+                      </a:pPr>
+                      <a:r>
+                        <a:t>LOW</a:t>
+                      </a:r>
+                    </a:p>
+                  </a:txBody>
+                  <a:tcPr>
+                    <a:solidFill>
+                      <a:srgbClr val="F5F5F5"/>
+                    </a:solidFill>
+                  </a:tcPr>
+                </a:tc>
+                <a:tc>
+                  <a:txBody>
+                    <a:bodyPr/>
+                    <a:lstStyle/>
+                    <a:p>
+                      <a:pPr>
+                        <a:defRPr sz="900">
+                          <a:solidFill>
+                            <a:srgbClr val="333333"/>
+                          </a:solidFill>
+                          <a:latin typeface="Calibri"/>
+                        </a:defRPr>
+                      </a:pPr>
+                      <a:r>
+                        <a:t>Hard-coded “allowed characters” string (magic literal)</a:t>
+                      </a:r>
+                    </a:p>
+                  </a:txBody>
+                  <a:tcPr>
+                    <a:solidFill>
+                      <a:srgbClr val="F5F5F5"/>
+                    </a:solidFill>
+                  </a:tcPr>
+                </a:tc>
+                <a:tc>
+                  <a:txBody>
+                    <a:bodyPr/>
+                    <a:lstStyle/>
+                    <a:p>
+                      <a:pPr>
+                        <a:defRPr sz="900">
+                          <a:solidFill>
+                            <a:srgbClr val="333333"/>
+                          </a:solidFill>
+                          <a:latin typeface="Consolas"/>
+                        </a:defRPr>
+                      </a:pPr>
+                      <a:r>
+                        <a:t>ZDMS_UPLOAD_FILES_F01:260</a:t>
+                      </a:r>
+                    </a:p>
+                  </a:txBody>
+                  <a:tcPr>
+                    <a:solidFill>
+                      <a:srgbClr val="F5F5F5"/>
+                    </a:solidFill>
+                  </a:tcPr>
+                </a:tc>
+              </a:tr>
+              <a:tr h="333487">
+                <a:tc>
+                  <a:txBody>
+                    <a:bodyPr/>
+                    <a:lstStyle/>
+                    <a:p>
+                      <a:pPr>
+                        <a:defRPr sz="900">
+                          <a:solidFill>
+                            <a:srgbClr val="333333"/>
+                          </a:solidFill>
+                          <a:latin typeface="Calibri"/>
+                        </a:defRPr>
+                      </a:pPr>
+                      <a:r>
+                        <a:t>15</a:t>
+                      </a:r>
+                    </a:p>
+                  </a:txBody>
+                  <a:tcPr>
+                    <a:solidFill>
+                      <a:srgbClr val="FFFFFF"/>
+                    </a:solidFill>
+                  </a:tcPr>
+                </a:tc>
+                <a:tc>
+                  <a:txBody>
+                    <a:bodyPr/>
+                    <a:lstStyle/>
+                    <a:p>
+                      <a:pPr>
+                        <a:defRPr sz="900" b="1">
+                          <a:solidFill>
+                            <a:srgbClr val="707070"/>
+                          </a:solidFill>
+                          <a:latin typeface="Calibri"/>
+                        </a:defRPr>
+                      </a:pPr>
+                      <a:r>
+                        <a:t>LOW</a:t>
+                      </a:r>
+                    </a:p>
+                  </a:txBody>
+                  <a:tcPr>
+                    <a:solidFill>
+                      <a:srgbClr val="FFFFFF"/>
+                    </a:solidFill>
+                  </a:tcPr>
+                </a:tc>
+                <a:tc>
+                  <a:txBody>
+                    <a:bodyPr/>
+                    <a:lstStyle/>
+                    <a:p>
+                      <a:pPr>
+                        <a:defRPr sz="900">
+                          <a:solidFill>
+                            <a:srgbClr val="333333"/>
+                          </a:solidFill>
+                          <a:latin typeface="Calibri"/>
+                        </a:defRPr>
+                      </a:pPr>
+                      <a:r>
+                        <a:t>Obsolete string building with CONCATENATE (path construction)</a:t>
+                      </a:r>
+                    </a:p>
+                  </a:txBody>
+                  <a:tcPr>
+                    <a:solidFill>
+                      <a:srgbClr val="FFFFFF"/>
+                    </a:solidFill>
+                  </a:tcPr>
+                </a:tc>
+                <a:tc>
+                  <a:txBody>
+                    <a:bodyPr/>
+                    <a:lstStyle/>
+                    <a:p>
+                      <a:pPr>
+                        <a:defRPr sz="900">
+                          <a:solidFill>
+                            <a:srgbClr val="333333"/>
+                          </a:solidFill>
+                          <a:latin typeface="Consolas"/>
+                        </a:defRPr>
+                      </a:pPr>
+                      <a:r>
+                        <a:t>ZDMS_UPLOAD_FILES_F01:509</a:t>
+                      </a:r>
+                    </a:p>
+                  </a:txBody>
+                  <a:tcPr>
+                    <a:solidFill>
+                      <a:srgbClr val="FFFFFF"/>
+                    </a:solidFill>
+                  </a:tcPr>
+                </a:tc>
+              </a:tr>
+              <a:tr h="333488">
+                <a:tc>
+                  <a:txBody>
+                    <a:bodyPr/>
+                    <a:lstStyle/>
+                    <a:p>
+                      <a:pPr>
+                        <a:defRPr sz="900">
+                          <a:solidFill>
+                            <a:srgbClr val="333333"/>
+                          </a:solidFill>
+                          <a:latin typeface="Calibri"/>
+                        </a:defRPr>
+                      </a:pPr>
+                      <a:r>
+                        <a:t>16</a:t>
+                      </a:r>
+                    </a:p>
+                  </a:txBody>
+                  <a:tcPr>
+                    <a:solidFill>
+                      <a:srgbClr val="F5F5F5"/>
+                    </a:solidFill>
+                  </a:tcPr>
+                </a:tc>
+                <a:tc>
+                  <a:txBody>
+                    <a:bodyPr/>
+                    <a:lstStyle/>
+                    <a:p>
+                      <a:pPr>
+                        <a:defRPr sz="900" b="1">
+                          <a:solidFill>
+                            <a:srgbClr val="707070"/>
+                          </a:solidFill>
+                          <a:latin typeface="Calibri"/>
+                        </a:defRPr>
+                      </a:pPr>
+                      <a:r>
+                        <a:t>LOW</a:t>
+                      </a:r>
+                    </a:p>
+                  </a:txBody>
+                  <a:tcPr>
+                    <a:solidFill>
+                      <a:srgbClr val="F5F5F5"/>
+                    </a:solidFill>
+                  </a:tcPr>
+                </a:tc>
+                <a:tc>
+                  <a:txBody>
+                    <a:bodyPr/>
+                    <a:lstStyle/>
+                    <a:p>
+                      <a:pPr>
+                        <a:defRPr sz="900">
+                          <a:solidFill>
+                            <a:srgbClr val="333333"/>
+                          </a:solidFill>
+                          <a:latin typeface="Calibri"/>
+                        </a:defRPr>
+                      </a:pPr>
+                      <a:r>
+                        <a:t>Missing typing for FORM parameters (implicit ANY)</a:t>
+                      </a:r>
+                    </a:p>
+                  </a:txBody>
+                  <a:tcPr>
+                    <a:solidFill>
+                      <a:srgbClr val="F5F5F5"/>
+                    </a:solidFill>
+                  </a:tcPr>
+                </a:tc>
+                <a:tc>
+                  <a:txBody>
+                    <a:bodyPr/>
+                    <a:lstStyle/>
+                    <a:p>
+                      <a:pPr>
+                        <a:defRPr sz="900">
+                          <a:solidFill>
+                            <a:srgbClr val="333333"/>
+                          </a:solidFill>
+                          <a:latin typeface="Consolas"/>
+                        </a:defRPr>
+                      </a:pPr>
+                      <a:r>
+                        <a:t>ZDMS_UPLOAD_FILES_F01:579</a:t>
+                      </a:r>
+                    </a:p>
+                  </a:txBody>
+                  <a:tcPr>
+                    <a:solidFill>
+                      <a:srgbClr val="F5F5F5"/>
+                    </a:solidFill>
+                  </a:tcPr>
+                </a:tc>
+              </a:tr>
+            </a:tbl>
+          </a:graphicData>
+        </a:graphic>
+      </p:graphicFrame>
       <p:sp>
         <p:nvSpPr>
           <p:cNvPr id="6" name="TextBox 5"/>
-          <p:cNvSpPr txBox="1"/>
-          <p:nvPr/>
-        </p:nvSpPr>
-        <p:spPr>
-          <a:xfrm>
-            <a:off x="3200400" y="868680"/>
-            <a:ext cx="8869680" cy="274320"/>
-          </a:xfrm>
-          <a:prstGeom prst="rect">
-            <a:avLst/>
-          </a:prstGeom>
-          <a:noFill/>
-        </p:spPr>
-        <p:txBody>
-          <a:bodyPr wrap="square">
-            <a:spAutoFit/>
-          </a:bodyPr>
-          <a:lstStyle/>
-          <a:p>
-            <a:pPr>
-              <a:defRPr sz="1000" b="0">
-                <a:solidFill>
-                  <a:srgbClr val="555555"/>
-                </a:solidFill>
-                <a:latin typeface="Calibri"/>
-              </a:defRPr>
-            </a:pPr>
-            <a:r>
-              <a:t>Source: ZDMS_UPLOAD_FILES_F01:~235</a:t>
-            </a:r>
-          </a:p>
-        </p:txBody>
-      </p:sp>
-      <p:sp>
-        <p:nvSpPr>
-          <p:cNvPr id="7" name="TextBox 6"/>
-          <p:cNvSpPr txBox="1"/>
-          <p:nvPr/>
-        </p:nvSpPr>
-        <p:spPr>
-          <a:xfrm>
-            <a:off x="3200400" y="1280160"/>
-            <a:ext cx="8869680" cy="2286000"/>
-          </a:xfrm>
-          <a:prstGeom prst="rect">
-            <a:avLst/>
-          </a:prstGeom>
-          <a:solidFill>
-            <a:srgbClr val="F5F5F5"/>
-          </a:solidFill>
-        </p:spPr>
-        <p:txBody>
-          <a:bodyPr wrap="square">
-            <a:spAutoFit/>
-          </a:bodyPr>
-          <a:lstStyle/>
-          <a:p>
-            <a:pPr>
-              <a:defRPr sz="1200" b="0">
-                <a:solidFill>
-                  <a:srgbClr val="333333"/>
-                </a:solidFill>
-                <a:latin typeface="Consolas"/>
-              </a:defRPr>
-            </a:pPr>
-            <a:r>
-              <a:t>LOOP AT pt_data ASSIGNING FIELD-SYMBOL(&lt;fs_data&gt;).</a:t>
-            </a:r>
-          </a:p>
-          <a:p>
-            <a:pPr>
-              <a:defRPr sz="1200" b="0">
-                <a:solidFill>
-                  <a:srgbClr val="333333"/>
-                </a:solidFill>
-                <a:latin typeface="Consolas"/>
-              </a:defRPr>
-            </a:pPr>
-            <a:r>
-              <a:t>  ...</a:t>
-            </a:r>
-          </a:p>
-          <a:p>
-            <a:pPr>
-              <a:defRPr sz="1200" b="0">
-                <a:solidFill>
-                  <a:srgbClr val="333333"/>
-                </a:solidFill>
-                <a:latin typeface="Consolas"/>
-              </a:defRPr>
-            </a:pPr>
-            <a:r>
-              <a:t>  CALL FUNCTION 'FORMAT_MESSAGE'</a:t>
-            </a:r>
-          </a:p>
-          <a:p>
-            <a:pPr>
-              <a:defRPr sz="1200" b="0">
-                <a:solidFill>
-                  <a:srgbClr val="333333"/>
-                </a:solidFill>
-                <a:latin typeface="Consolas"/>
-              </a:defRPr>
-            </a:pPr>
-            <a:r>
-              <a:t>    EXPORTING</a:t>
-            </a:r>
-          </a:p>
-          <a:p>
-            <a:pPr>
-              <a:defRPr sz="1200" b="0">
-                <a:solidFill>
-                  <a:srgbClr val="333333"/>
-                </a:solidFill>
-                <a:latin typeface="Consolas"/>
-              </a:defRPr>
-            </a:pPr>
-            <a:r>
-              <a:t>      id        = rs_return-id</a:t>
-            </a:r>
-          </a:p>
-        </p:txBody>
-      </p:sp>
-      <p:sp>
-        <p:nvSpPr>
-          <p:cNvPr id="8" name="TextBox 7"/>
-          <p:cNvSpPr txBox="1"/>
-          <p:nvPr/>
-        </p:nvSpPr>
-        <p:spPr>
-          <a:xfrm>
-            <a:off x="3200400" y="4023360"/>
-            <a:ext cx="8869680" cy="914400"/>
-          </a:xfrm>
-          <a:prstGeom prst="rect">
-            <a:avLst/>
-          </a:prstGeom>
-          <a:noFill/>
-        </p:spPr>
-        <p:txBody>
-          <a:bodyPr wrap="square">
-            <a:spAutoFit/>
-          </a:bodyPr>
-          <a:lstStyle/>
-          <a:p>
-            <a:pPr>
-              <a:defRPr sz="1100" b="0">
-                <a:solidFill>
-                  <a:srgbClr val="333333"/>
-                </a:solidFill>
-                <a:latin typeface="Calibri"/>
-              </a:defRPr>
-            </a:pPr>
-            <a:r>
-              <a:t>Why: Repeated calls to the same function inside a loop can add significant runtime overhead (rule: repeated calls to the same DB / function inside a loop).</a:t>
-            </a:r>
-          </a:p>
-        </p:txBody>
-      </p:sp>
-      <p:sp>
-        <p:nvSpPr>
-          <p:cNvPr id="9" name="TextBox 8"/>
-          <p:cNvSpPr txBox="1"/>
-          <p:nvPr/>
-        </p:nvSpPr>
-        <p:spPr>
-          <a:xfrm>
-            <a:off x="3200400" y="5303520"/>
-            <a:ext cx="8869680" cy="1097280"/>
-          </a:xfrm>
-          <a:prstGeom prst="rect">
-            <a:avLst/>
-          </a:prstGeom>
-          <a:noFill/>
-        </p:spPr>
-        <p:txBody>
-          <a:bodyPr wrap="square">
-            <a:spAutoFit/>
-          </a:bodyPr>
-          <a:lstStyle/>
-          <a:p>
-            <a:pPr>
-              <a:defRPr sz="1100" b="1">
-                <a:solidFill>
-                  <a:srgbClr val="418DFF"/>
-                </a:solidFill>
-                <a:latin typeface="Calibri"/>
-              </a:defRPr>
-            </a:pPr>
-            <a:r>
-              <a:t>Recommendation: Avoid calling `FORMAT_MESSAGE` for every row when possible—e.g., use `rs_return-message` directly if already filled, or collect unique `(id, number, v1..v4)` combinations and format once per unique key (cache result in a hashed table), then reuse.</a:t>
-            </a:r>
-          </a:p>
-        </p:txBody>
-      </p:sp>
-      <p:sp>
-        <p:nvSpPr>
-          <p:cNvPr id="10" name="TextBox 9"/>
           <p:cNvSpPr txBox="1"/>
           <p:nvPr/>
         </p:nvSpPr>
@@ -6612,353 +9651,6 @@
 </file>
 
 <file path=ppt/slides/slide8.xml><?xml version="1.0" encoding="utf-8"?>
-<p:sld xmlns:a="http://schemas.openxmlformats.org/drawingml/2006/main" xmlns:p="http://schemas.openxmlformats.org/presentationml/2006/main" xmlns:r="http://schemas.openxmlformats.org/officeDocument/2006/relationships">
-  <p:cSld>
-    <p:spTree>
-      <p:nvGrpSpPr>
-        <p:cNvPr id="1" name=""/>
-        <p:cNvGrpSpPr/>
-        <p:nvPr/>
-      </p:nvGrpSpPr>
-      <p:grpSpPr/>
-      <p:sp>
-        <p:nvSpPr>
-          <p:cNvPr id="2" name="Rectangle 1"/>
-          <p:cNvSpPr/>
-          <p:nvPr/>
-        </p:nvSpPr>
-        <p:spPr>
-          <a:xfrm>
-            <a:off x="0" y="0"/>
-            <a:ext cx="3017520" cy="6858000"/>
-          </a:xfrm>
-          <a:prstGeom prst="rect">
-            <a:avLst/>
-          </a:prstGeom>
-          <a:solidFill>
-            <a:srgbClr val="EEEEEE"/>
-          </a:solidFill>
-          <a:ln>
-            <a:noFill/>
-          </a:ln>
-        </p:spPr>
-        <p:style>
-          <a:lnRef idx="1">
-            <a:schemeClr val="accent1"/>
-          </a:lnRef>
-          <a:fillRef idx="3">
-            <a:schemeClr val="accent1"/>
-          </a:fillRef>
-          <a:effectRef idx="2">
-            <a:schemeClr val="accent1"/>
-          </a:effectRef>
-          <a:fontRef idx="minor">
-            <a:schemeClr val="lt1"/>
-          </a:fontRef>
-        </p:style>
-        <p:txBody>
-          <a:bodyPr rtlCol="0" anchor="ctr"/>
-          <a:lstStyle/>
-          <a:p>
-            <a:pPr algn="ctr"/>
-          </a:p>
-        </p:txBody>
-      </p:sp>
-      <p:sp>
-        <p:nvSpPr>
-          <p:cNvPr id="3" name="TextBox 2"/>
-          <p:cNvSpPr txBox="1"/>
-          <p:nvPr/>
-        </p:nvSpPr>
-        <p:spPr>
-          <a:xfrm>
-            <a:off x="274320" y="457200"/>
-            <a:ext cx="2651760" cy="365760"/>
-          </a:xfrm>
-          <a:prstGeom prst="rect">
-            <a:avLst/>
-          </a:prstGeom>
-          <a:noFill/>
-        </p:spPr>
-        <p:txBody>
-          <a:bodyPr wrap="none">
-            <a:spAutoFit/>
-          </a:bodyPr>
-          <a:lstStyle/>
-          <a:p>
-            <a:pPr>
-              <a:defRPr sz="1000" b="1">
-                <a:solidFill>
-                  <a:srgbClr val="00B4C8"/>
-                </a:solidFill>
-                <a:latin typeface="Calibri"/>
-              </a:defRPr>
-            </a:pPr>
-            <a:r>
-              <a:t>SECTION 02 · MAINTAINABILITY</a:t>
-            </a:r>
-          </a:p>
-        </p:txBody>
-      </p:sp>
-      <p:sp>
-        <p:nvSpPr>
-          <p:cNvPr id="4" name="TextBox 3"/>
-          <p:cNvSpPr txBox="1"/>
-          <p:nvPr/>
-        </p:nvSpPr>
-        <p:spPr>
-          <a:xfrm>
-            <a:off x="274320" y="914400"/>
-            <a:ext cx="2651760" cy="2011680"/>
-          </a:xfrm>
-          <a:prstGeom prst="rect">
-            <a:avLst/>
-          </a:prstGeom>
-          <a:noFill/>
-        </p:spPr>
-        <p:txBody>
-          <a:bodyPr wrap="square">
-            <a:spAutoFit/>
-          </a:bodyPr>
-          <a:lstStyle/>
-          <a:p>
-            <a:pPr>
-              <a:defRPr sz="2200">
-                <a:solidFill>
-                  <a:srgbClr val="161616"/>
-                </a:solidFill>
-                <a:latin typeface="Calibri Light"/>
-              </a:defRPr>
-            </a:pPr>
-            <a:r>
-              <a:t>Style debt</a:t>
-            </a:r>
-          </a:p>
-          <a:p>
-            <a:pPr>
-              <a:defRPr sz="400"/>
-            </a:pPr>
-          </a:p>
-          <a:p>
-            <a:pPr>
-              <a:defRPr sz="1200" i="1">
-                <a:solidFill>
-                  <a:srgbClr val="555555"/>
-                </a:solidFill>
-                <a:latin typeface="Calibri"/>
-              </a:defRPr>
-            </a:pPr>
-            <a:r>
-              <a:t>16 LOW findings, deferrable</a:t>
-            </a:r>
-          </a:p>
-        </p:txBody>
-      </p:sp>
-      <p:sp>
-        <p:nvSpPr>
-          <p:cNvPr id="5" name="TextBox 4"/>
-          <p:cNvSpPr txBox="1"/>
-          <p:nvPr/>
-        </p:nvSpPr>
-        <p:spPr>
-          <a:xfrm>
-            <a:off x="3200400" y="640080"/>
-            <a:ext cx="8869680" cy="5669280"/>
-          </a:xfrm>
-          <a:prstGeom prst="rect">
-            <a:avLst/>
-          </a:prstGeom>
-          <a:noFill/>
-        </p:spPr>
-        <p:txBody>
-          <a:bodyPr wrap="square">
-            <a:spAutoFit/>
-          </a:bodyPr>
-          <a:lstStyle/>
-          <a:p>
-            <a:pPr>
-              <a:defRPr sz="1200" b="0">
-                <a:solidFill>
-                  <a:srgbClr val="333333"/>
-                </a:solidFill>
-                <a:latin typeface="Calibri"/>
-              </a:defRPr>
-            </a:pPr>
-            <a:r>
-              <a:t>Themes (full list in 05-maintainability.md):</a:t>
-            </a:r>
-          </a:p>
-          <a:p>
-            <a:pPr>
-              <a:defRPr sz="1200" b="0">
-                <a:solidFill>
-                  <a:srgbClr val="333333"/>
-                </a:solidFill>
-                <a:latin typeface="Calibri"/>
-              </a:defRPr>
-            </a:pPr>
-          </a:p>
-          <a:p>
-            <a:pPr>
-              <a:defRPr sz="1200" b="0">
-                <a:solidFill>
-                  <a:srgbClr val="333333"/>
-                </a:solidFill>
-                <a:latin typeface="Calibri"/>
-              </a:defRPr>
-            </a:pPr>
-            <a:r>
-              <a:t>• Obsolete syntax — CONCATENATE / SPLIT instead of string templates (8 instances).</a:t>
-            </a:r>
-          </a:p>
-          <a:p>
-            <a:pPr>
-              <a:defRPr sz="1200" b="0">
-                <a:solidFill>
-                  <a:srgbClr val="333333"/>
-                </a:solidFill>
-                <a:latin typeface="Calibri"/>
-              </a:defRPr>
-            </a:pPr>
-            <a:r>
-              <a:t>• Magic literals — separator characters (' ', ';', '@', ':') hardcoded in PERFORM calls.</a:t>
-            </a:r>
-          </a:p>
-          <a:p>
-            <a:pPr>
-              <a:defRPr sz="1200" b="0">
-                <a:solidFill>
-                  <a:srgbClr val="333333"/>
-                </a:solidFill>
-                <a:latin typeface="Calibri"/>
-              </a:defRPr>
-            </a:pPr>
-            <a:r>
-              <a:t>• Long FORMs without sub-structure — F01 include groups all logic into a few long FORMs.</a:t>
-            </a:r>
-          </a:p>
-          <a:p>
-            <a:pPr>
-              <a:defRPr sz="1200" b="0">
-                <a:solidFill>
-                  <a:srgbClr val="333333"/>
-                </a:solidFill>
-                <a:latin typeface="Calibri"/>
-              </a:defRPr>
-            </a:pPr>
-            <a:r>
-              <a:t>• Missing ABAP Doc on FORMs that take parameters.</a:t>
-            </a:r>
-          </a:p>
-          <a:p>
-            <a:pPr>
-              <a:defRPr sz="1200" b="0">
-                <a:solidFill>
-                  <a:srgbClr val="333333"/>
-                </a:solidFill>
-                <a:latin typeface="Calibri"/>
-              </a:defRPr>
-            </a:pPr>
-            <a:r>
-              <a:t>• Mixed inline / explicit DATA declarations.</a:t>
-            </a:r>
-          </a:p>
-          <a:p>
-            <a:pPr>
-              <a:defRPr sz="1200" b="0">
-                <a:solidFill>
-                  <a:srgbClr val="333333"/>
-                </a:solidFill>
-                <a:latin typeface="Calibri"/>
-              </a:defRPr>
-            </a:pPr>
-            <a:r>
-              <a:t>• Commented-out code blocks left in the include.</a:t>
-            </a:r>
-          </a:p>
-          <a:p>
-            <a:pPr>
-              <a:defRPr sz="1200" b="0">
-                <a:solidFill>
-                  <a:srgbClr val="333333"/>
-                </a:solidFill>
-                <a:latin typeface="Calibri"/>
-              </a:defRPr>
-            </a:pPr>
-            <a:r>
-              <a:t>• Dead local variables (declared, never read).</a:t>
-            </a:r>
-          </a:p>
-          <a:p>
-            <a:pPr>
-              <a:defRPr sz="1200" b="0">
-                <a:solidFill>
-                  <a:srgbClr val="333333"/>
-                </a:solidFill>
-                <a:latin typeface="Calibri"/>
-              </a:defRPr>
-            </a:pPr>
-          </a:p>
-          <a:p>
-            <a:pPr>
-              <a:defRPr sz="1200" b="0">
-                <a:solidFill>
-                  <a:srgbClr val="333333"/>
-                </a:solidFill>
-                <a:latin typeface="Calibri"/>
-              </a:defRPr>
-            </a:pPr>
-            <a:r>
-              <a:t>None block the object's function. Accumulate over time — fix during the next focused maintenance window.</a:t>
-            </a:r>
-          </a:p>
-        </p:txBody>
-      </p:sp>
-      <p:sp>
-        <p:nvSpPr>
-          <p:cNvPr id="6" name="TextBox 5"/>
-          <p:cNvSpPr txBox="1"/>
-          <p:nvPr/>
-        </p:nvSpPr>
-        <p:spPr>
-          <a:xfrm>
-            <a:off x="3200400" y="6537960"/>
-            <a:ext cx="8869680" cy="228600"/>
-          </a:xfrm>
-          <a:prstGeom prst="rect">
-            <a:avLst/>
-          </a:prstGeom>
-          <a:noFill/>
-        </p:spPr>
-        <p:txBody>
-          <a:bodyPr wrap="none">
-            <a:spAutoFit/>
-          </a:bodyPr>
-          <a:lstStyle/>
-          <a:p>
-            <a:pPr>
-              <a:defRPr sz="800" i="1">
-                <a:solidFill>
-                  <a:srgbClr val="555555"/>
-                </a:solidFill>
-                <a:latin typeface="Calibri"/>
-              </a:defRPr>
-            </a:pPr>
-            <a:r>
-              <a:t>EPAM Proprietary &amp; Confidential</a:t>
-            </a:r>
-          </a:p>
-        </p:txBody>
-      </p:sp>
-    </p:spTree>
-  </p:cSld>
-  <p:clrMapOvr>
-    <a:masterClrMapping/>
-  </p:clrMapOvr>
-</p:sld>
-</file>
-
-<file path=ppt/slides/slide9.xml><?xml version="1.0" encoding="utf-8"?>
 <p:sld xmlns:a="http://schemas.openxmlformats.org/drawingml/2006/main" xmlns:p="http://schemas.openxmlformats.org/presentationml/2006/main" xmlns:r="http://schemas.openxmlformats.org/officeDocument/2006/relationships">
   <p:cSld>
     <p:spTree>
